--- a/madd-decks/madd-alif/14-ha.pptx
+++ b/madd-decks/madd-alif/14-ha.pptx
@@ -18,11 +18,9 @@
     <p:sldId id="266" r:id="rId12"/>
     <p:sldId id="267" r:id="rId13"/>
     <p:sldId id="268" r:id="rId14"/>
-    <p:sldId id="269" r:id="rId15"/>
-    <p:sldId id="270" r:id="rId16"/>
   </p:sldIdLst>
   <p:notesMasterIdLst>
-    <p:notesMasterId r:id="rId17"/>
+    <p:notesMasterId r:id="rId15"/>
   </p:notesMasterIdLst>
   <p:sldSz cx="9144000" cy="5143500"/>
   <p:notesSz cx="5143500" cy="9144000"/>
@@ -910,182 +908,6 @@
 </p:notes>
 </file>
 
-<file path=ppt/notesSlides/notesSlide14.xml><?xml version="1.0" encoding="utf-8"?>
-<p:notes xmlns:a="http://schemas.openxmlformats.org/drawingml/2006/main" xmlns:r="http://schemas.openxmlformats.org/officeDocument/2006/relationships" xmlns:p="http://schemas.openxmlformats.org/presentationml/2006/main">
-  <p:cSld>
-    <p:spTree>
-      <p:nvGrpSpPr>
-        <p:cNvPr id="1" name=""/>
-        <p:cNvGrpSpPr/>
-        <p:nvPr/>
-      </p:nvGrpSpPr>
-      <p:grpSpPr>
-        <a:xfrm>
-          <a:off x="0" y="0"/>
-          <a:ext cx="0" cy="0"/>
-          <a:chOff x="0" y="0"/>
-          <a:chExt cx="0" cy="0"/>
-        </a:xfrm>
-      </p:grpSpPr>
-      <p:sp>
-        <p:nvSpPr>
-          <p:cNvPr id="2" name="Slide Image Placeholder 1"/>
-          <p:cNvSpPr>
-            <a:spLocks noGrp="1" noRot="1" noChangeAspect="1"/>
-          </p:cNvSpPr>
-          <p:nvPr>
-            <p:ph type="sldImg"/>
-          </p:nvPr>
-        </p:nvSpPr>
-        <p:spPr/>
-      </p:sp>
-      <p:sp>
-        <p:nvSpPr>
-          <p:cNvPr id="3" name="Notes Placeholder 2"/>
-          <p:cNvSpPr>
-            <a:spLocks noGrp="1"/>
-          </p:cNvSpPr>
-          <p:nvPr>
-            <p:ph type="body" idx="1"/>
-          </p:nvPr>
-        </p:nvSpPr>
-        <p:spPr/>
-        <p:txBody>
-          <a:bodyPr/>
-          <a:lstStyle/>
-          <a:p>
-            <a:r>
-              <a:rPr lang="en-US" dirty="0"/>
-              <a:t/>
-            </a:r>
-            <a:endParaRPr lang="en-US" dirty="0"/>
-          </a:p>
-        </p:txBody>
-      </p:sp>
-      <p:sp>
-        <p:nvSpPr>
-          <p:cNvPr id="4" name="Slide Number Placeholder 3"/>
-          <p:cNvSpPr>
-            <a:spLocks noGrp="1"/>
-          </p:cNvSpPr>
-          <p:nvPr>
-            <p:ph type="sldNum" sz="quarter" idx="10"/>
-          </p:nvPr>
-        </p:nvSpPr>
-        <p:spPr/>
-        <p:txBody>
-          <a:bodyPr/>
-          <a:lstStyle/>
-          <a:p>
-            <a:fld id="{F7021451-1387-4CA6-816F-3879F97B5CBC}" type="slidenum">
-              <a:rPr lang="en-US"/>
-              <a:t>14</a:t>
-            </a:fld>
-            <a:endParaRPr lang="en-US"/>
-          </a:p>
-        </p:txBody>
-      </p:sp>
-    </p:spTree>
-    <p:extLst>
-      <p:ext uri="{BB962C8B-B14F-4D97-AF65-F5344CB8AC3E}">
-        <p14:creationId xmlns:p14="http://schemas.microsoft.com/office/powerpoint/2010/main" val="1024086991"/>
-      </p:ext>
-    </p:extLst>
-  </p:cSld>
-  <p:clrMapOvr>
-    <a:masterClrMapping/>
-  </p:clrMapOvr>
-</p:notes>
-</file>
-
-<file path=ppt/notesSlides/notesSlide15.xml><?xml version="1.0" encoding="utf-8"?>
-<p:notes xmlns:a="http://schemas.openxmlformats.org/drawingml/2006/main" xmlns:r="http://schemas.openxmlformats.org/officeDocument/2006/relationships" xmlns:p="http://schemas.openxmlformats.org/presentationml/2006/main">
-  <p:cSld>
-    <p:spTree>
-      <p:nvGrpSpPr>
-        <p:cNvPr id="1" name=""/>
-        <p:cNvGrpSpPr/>
-        <p:nvPr/>
-      </p:nvGrpSpPr>
-      <p:grpSpPr>
-        <a:xfrm>
-          <a:off x="0" y="0"/>
-          <a:ext cx="0" cy="0"/>
-          <a:chOff x="0" y="0"/>
-          <a:chExt cx="0" cy="0"/>
-        </a:xfrm>
-      </p:grpSpPr>
-      <p:sp>
-        <p:nvSpPr>
-          <p:cNvPr id="2" name="Slide Image Placeholder 1"/>
-          <p:cNvSpPr>
-            <a:spLocks noGrp="1" noRot="1" noChangeAspect="1"/>
-          </p:cNvSpPr>
-          <p:nvPr>
-            <p:ph type="sldImg"/>
-          </p:nvPr>
-        </p:nvSpPr>
-        <p:spPr/>
-      </p:sp>
-      <p:sp>
-        <p:nvSpPr>
-          <p:cNvPr id="3" name="Notes Placeholder 2"/>
-          <p:cNvSpPr>
-            <a:spLocks noGrp="1"/>
-          </p:cNvSpPr>
-          <p:nvPr>
-            <p:ph type="body" idx="1"/>
-          </p:nvPr>
-        </p:nvSpPr>
-        <p:spPr/>
-        <p:txBody>
-          <a:bodyPr/>
-          <a:lstStyle/>
-          <a:p>
-            <a:r>
-              <a:rPr lang="en-US" dirty="0"/>
-              <a:t/>
-            </a:r>
-            <a:endParaRPr lang="en-US" dirty="0"/>
-          </a:p>
-        </p:txBody>
-      </p:sp>
-      <p:sp>
-        <p:nvSpPr>
-          <p:cNvPr id="4" name="Slide Number Placeholder 3"/>
-          <p:cNvSpPr>
-            <a:spLocks noGrp="1"/>
-          </p:cNvSpPr>
-          <p:nvPr>
-            <p:ph type="sldNum" sz="quarter" idx="10"/>
-          </p:nvPr>
-        </p:nvSpPr>
-        <p:spPr/>
-        <p:txBody>
-          <a:bodyPr/>
-          <a:lstStyle/>
-          <a:p>
-            <a:fld id="{F7021451-1387-4CA6-816F-3879F97B5CBC}" type="slidenum">
-              <a:rPr lang="en-US"/>
-              <a:t>15</a:t>
-            </a:fld>
-            <a:endParaRPr lang="en-US"/>
-          </a:p>
-        </p:txBody>
-      </p:sp>
-    </p:spTree>
-    <p:extLst>
-      <p:ext uri="{BB962C8B-B14F-4D97-AF65-F5344CB8AC3E}">
-        <p14:creationId xmlns:p14="http://schemas.microsoft.com/office/powerpoint/2010/main" val="1024086991"/>
-      </p:ext>
-    </p:extLst>
-  </p:cSld>
-  <p:clrMapOvr>
-    <a:masterClrMapping/>
-  </p:clrMapOvr>
-</p:notes>
-</file>
-
 <file path=ppt/notesSlides/notesSlide2.xml><?xml version="1.0" encoding="utf-8"?>
 <p:notes xmlns:a="http://schemas.openxmlformats.org/drawingml/2006/main" xmlns:r="http://schemas.openxmlformats.org/officeDocument/2006/relationships" xmlns:p="http://schemas.openxmlformats.org/presentationml/2006/main">
   <p:cSld>
@@ -3807,7 +3629,7 @@
                 <a:ea typeface="Arial" pitchFamily="34" charset="-122"/>
                 <a:cs typeface="Arial" pitchFamily="34" charset="-120"/>
               </a:rPr>
-              <a:t>ت</a:t>
+              <a:t>س</a:t>
             </a:r>
             <a:endParaRPr lang="ar-SA" sz="5400" dirty="0"/>
           </a:p>
@@ -3846,7 +3668,7 @@
                 <a:ea typeface="Arial" pitchFamily="34" charset="-122"/>
                 <a:cs typeface="Arial" pitchFamily="34" charset="-120"/>
               </a:rPr>
-              <a:t>تَ</a:t>
+              <a:t>سَ</a:t>
             </a:r>
             <a:endParaRPr lang="ar-SA" sz="5400" dirty="0"/>
           </a:p>
@@ -3885,7 +3707,7 @@
                 <a:ea typeface="Arial" pitchFamily="34" charset="-122"/>
                 <a:cs typeface="Arial" pitchFamily="34" charset="-120"/>
               </a:rPr>
-              <a:t>ب</a:t>
+              <a:t>ف</a:t>
             </a:r>
             <a:endParaRPr lang="ar-SA" sz="5400" dirty="0"/>
           </a:p>
@@ -3924,7 +3746,7 @@
                 <a:ea typeface="Arial" pitchFamily="34" charset="-122"/>
                 <a:cs typeface="Arial" pitchFamily="34" charset="-120"/>
               </a:rPr>
-              <a:t>بَ</a:t>
+              <a:t>فَ</a:t>
             </a:r>
             <a:endParaRPr lang="ar-SA" sz="5400" dirty="0"/>
           </a:p>
@@ -4080,7 +3902,7 @@
                 <a:ea typeface="Arial" pitchFamily="34" charset="-122"/>
                 <a:cs typeface="Arial" pitchFamily="34" charset="-120"/>
               </a:rPr>
-              <a:t>تَبَهَا</a:t>
+              <a:t>سَفَهَا</a:t>
             </a:r>
             <a:endParaRPr lang="ar-SA" sz="6600" dirty="0"/>
           </a:p>
@@ -5483,163 +5305,7 @@
         </p:nvSpPr>
         <p:spPr>
           <a:xfrm>
-            <a:off x="7269480" y="1920240"/>
-            <a:ext cx="1280160" cy="1280160"/>
-          </a:xfrm>
-          <a:prstGeom prst="rect">
-            <a:avLst/>
-          </a:prstGeom>
-          <a:noFill/>
-          <a:ln/>
-        </p:spPr>
-        <p:txBody>
-          <a:bodyPr wrap="square" lIns="0" tIns="0" rIns="0" bIns="0" rtlCol="0" anchor="ctr"/>
-          <a:lstStyle/>
-          <a:p>
-            <a:pPr rtl="1" algn="ctr" indent="0" marL="0">
-              <a:buNone/>
-            </a:pPr>
-            <a:r>
-              <a:rPr lang="ar-SA" altLang="en-US" sz="5400" dirty="0">
-                <a:solidFill>
-                  <a:srgbClr val="16213E"/>
-                </a:solidFill>
-                <a:latin typeface="Arial" pitchFamily="34" charset="0"/>
-                <a:ea typeface="Arial" pitchFamily="34" charset="-122"/>
-                <a:cs typeface="Arial" pitchFamily="34" charset="-120"/>
-              </a:rPr>
-              <a:t>ث</a:t>
-            </a:r>
-            <a:endParaRPr lang="ar-SA" sz="5400" dirty="0"/>
-          </a:p>
-        </p:txBody>
-      </p:sp>
-      <p:sp>
-        <p:nvSpPr>
-          <p:cNvPr id="32" name="F1 fathah"/>
-          <p:cNvSpPr txBox="1"/>
-          <p:nvPr/>
-        </p:nvSpPr>
-        <p:spPr>
-          <a:xfrm>
-            <a:off x="7269480" y="1920240"/>
-            <a:ext cx="1280160" cy="1280160"/>
-          </a:xfrm>
-          <a:prstGeom prst="rect">
-            <a:avLst/>
-          </a:prstGeom>
-          <a:noFill/>
-          <a:ln/>
-        </p:spPr>
-        <p:txBody>
-          <a:bodyPr wrap="square" lIns="0" tIns="0" rIns="0" bIns="0" rtlCol="0" anchor="ctr"/>
-          <a:lstStyle/>
-          <a:p>
-            <a:pPr rtl="1" algn="ctr" indent="0" marL="0">
-              <a:buNone/>
-            </a:pPr>
-            <a:r>
-              <a:rPr lang="ar-SA" altLang="en-US" sz="5400" dirty="0">
-                <a:solidFill>
-                  <a:srgbClr val="16213E"/>
-                </a:solidFill>
-                <a:latin typeface="Arial" pitchFamily="34" charset="0"/>
-                <a:ea typeface="Arial" pitchFamily="34" charset="-122"/>
-                <a:cs typeface="Arial" pitchFamily="34" charset="-120"/>
-              </a:rPr>
-              <a:t>ثَ</a:t>
-            </a:r>
-            <a:endParaRPr lang="ar-SA" sz="5400" dirty="0"/>
-          </a:p>
-        </p:txBody>
-      </p:sp>
-      <p:sp>
-        <p:nvSpPr>
-          <p:cNvPr id="33" name="L2 letter"/>
-          <p:cNvSpPr txBox="1"/>
-          <p:nvPr/>
-        </p:nvSpPr>
-        <p:spPr>
-          <a:xfrm>
-            <a:off x="5486400" y="1920240"/>
-            <a:ext cx="1280160" cy="1280160"/>
-          </a:xfrm>
-          <a:prstGeom prst="rect">
-            <a:avLst/>
-          </a:prstGeom>
-          <a:noFill/>
-          <a:ln/>
-        </p:spPr>
-        <p:txBody>
-          <a:bodyPr wrap="square" lIns="0" tIns="0" rIns="0" bIns="0" rtlCol="0" anchor="ctr"/>
-          <a:lstStyle/>
-          <a:p>
-            <a:pPr rtl="1" algn="ctr" indent="0" marL="0">
-              <a:buNone/>
-            </a:pPr>
-            <a:r>
-              <a:rPr lang="ar-SA" altLang="en-US" sz="5400" dirty="0">
-                <a:solidFill>
-                  <a:srgbClr val="16213E"/>
-                </a:solidFill>
-                <a:latin typeface="Arial" pitchFamily="34" charset="0"/>
-                <a:ea typeface="Arial" pitchFamily="34" charset="-122"/>
-                <a:cs typeface="Arial" pitchFamily="34" charset="-120"/>
-              </a:rPr>
-              <a:t>ب</a:t>
-            </a:r>
-            <a:endParaRPr lang="ar-SA" sz="5400" dirty="0"/>
-          </a:p>
-        </p:txBody>
-      </p:sp>
-      <p:sp>
-        <p:nvSpPr>
-          <p:cNvPr id="34" name="F2 fathah"/>
-          <p:cNvSpPr txBox="1"/>
-          <p:nvPr/>
-        </p:nvSpPr>
-        <p:spPr>
-          <a:xfrm>
-            <a:off x="5486400" y="1920240"/>
-            <a:ext cx="1280160" cy="1280160"/>
-          </a:xfrm>
-          <a:prstGeom prst="rect">
-            <a:avLst/>
-          </a:prstGeom>
-          <a:noFill/>
-          <a:ln/>
-        </p:spPr>
-        <p:txBody>
-          <a:bodyPr wrap="square" lIns="0" tIns="0" rIns="0" bIns="0" rtlCol="0" anchor="ctr"/>
-          <a:lstStyle/>
-          <a:p>
-            <a:pPr rtl="1" algn="ctr" indent="0" marL="0">
-              <a:buNone/>
-            </a:pPr>
-            <a:r>
-              <a:rPr lang="ar-SA" altLang="en-US" sz="5400" dirty="0">
-                <a:solidFill>
-                  <a:srgbClr val="16213E"/>
-                </a:solidFill>
-                <a:latin typeface="Arial" pitchFamily="34" charset="0"/>
-                <a:ea typeface="Arial" pitchFamily="34" charset="-122"/>
-                <a:cs typeface="Arial" pitchFamily="34" charset="-120"/>
-              </a:rPr>
-              <a:t>بَ</a:t>
-            </a:r>
-            <a:endParaRPr lang="ar-SA" sz="5400" dirty="0"/>
-          </a:p>
-        </p:txBody>
-      </p:sp>
-      <p:sp>
-        <p:nvSpPr>
-          <p:cNvPr id="35" name="L3 letter"/>
-          <p:cNvSpPr txBox="1"/>
-          <p:nvPr/>
-        </p:nvSpPr>
-        <p:spPr>
-          <a:xfrm>
-            <a:off x="3930457" y="1920240"/>
+            <a:off x="7496617" y="1920240"/>
             <a:ext cx="1280160" cy="1280160"/>
           </a:xfrm>
           <a:prstGeom prst="rect">
@@ -5672,13 +5338,13 @@
       </p:sp>
       <p:sp>
         <p:nvSpPr>
-          <p:cNvPr id="36" name="F3 fathah"/>
+          <p:cNvPr id="32" name="F1 fathah"/>
           <p:cNvSpPr txBox="1"/>
           <p:nvPr/>
         </p:nvSpPr>
         <p:spPr>
           <a:xfrm>
-            <a:off x="3930457" y="1920240"/>
+            <a:off x="7496617" y="1920240"/>
             <a:ext cx="1280160" cy="1280160"/>
           </a:xfrm>
           <a:prstGeom prst="rect">
@@ -5711,13 +5377,13 @@
       </p:sp>
       <p:sp>
         <p:nvSpPr>
-          <p:cNvPr id="37" name="M3 alif"/>
+          <p:cNvPr id="33" name="M1 alif"/>
           <p:cNvSpPr txBox="1"/>
           <p:nvPr/>
         </p:nvSpPr>
         <p:spPr>
           <a:xfrm>
-            <a:off x="3318175" y="1920240"/>
+            <a:off x="6884335" y="1920240"/>
             <a:ext cx="1280160" cy="1280160"/>
           </a:xfrm>
           <a:prstGeom prst="rect">
@@ -5750,6 +5416,162 @@
       </p:sp>
       <p:sp>
         <p:nvSpPr>
+          <p:cNvPr id="34" name="L2 letter"/>
+          <p:cNvSpPr txBox="1"/>
+          <p:nvPr/>
+        </p:nvSpPr>
+        <p:spPr>
+          <a:xfrm>
+            <a:off x="5486400" y="1920240"/>
+            <a:ext cx="1280160" cy="1280160"/>
+          </a:xfrm>
+          <a:prstGeom prst="rect">
+            <a:avLst/>
+          </a:prstGeom>
+          <a:noFill/>
+          <a:ln/>
+        </p:spPr>
+        <p:txBody>
+          <a:bodyPr wrap="square" lIns="0" tIns="0" rIns="0" bIns="0" rtlCol="0" anchor="ctr"/>
+          <a:lstStyle/>
+          <a:p>
+            <a:pPr rtl="1" algn="ctr" indent="0" marL="0">
+              <a:buNone/>
+            </a:pPr>
+            <a:r>
+              <a:rPr lang="ar-SA" altLang="en-US" sz="5400" dirty="0">
+                <a:solidFill>
+                  <a:srgbClr val="16213E"/>
+                </a:solidFill>
+                <a:latin typeface="Arial" pitchFamily="34" charset="0"/>
+                <a:ea typeface="Arial" pitchFamily="34" charset="-122"/>
+                <a:cs typeface="Arial" pitchFamily="34" charset="-120"/>
+              </a:rPr>
+              <a:t>ج</a:t>
+            </a:r>
+            <a:endParaRPr lang="ar-SA" sz="5400" dirty="0"/>
+          </a:p>
+        </p:txBody>
+      </p:sp>
+      <p:sp>
+        <p:nvSpPr>
+          <p:cNvPr id="35" name="F2 fathah"/>
+          <p:cNvSpPr txBox="1"/>
+          <p:nvPr/>
+        </p:nvSpPr>
+        <p:spPr>
+          <a:xfrm>
+            <a:off x="5486400" y="1920240"/>
+            <a:ext cx="1280160" cy="1280160"/>
+          </a:xfrm>
+          <a:prstGeom prst="rect">
+            <a:avLst/>
+          </a:prstGeom>
+          <a:noFill/>
+          <a:ln/>
+        </p:spPr>
+        <p:txBody>
+          <a:bodyPr wrap="square" lIns="0" tIns="0" rIns="0" bIns="0" rtlCol="0" anchor="ctr"/>
+          <a:lstStyle/>
+          <a:p>
+            <a:pPr rtl="1" algn="ctr" indent="0" marL="0">
+              <a:buNone/>
+            </a:pPr>
+            <a:r>
+              <a:rPr lang="ar-SA" altLang="en-US" sz="5400" dirty="0">
+                <a:solidFill>
+                  <a:srgbClr val="16213E"/>
+                </a:solidFill>
+                <a:latin typeface="Arial" pitchFamily="34" charset="0"/>
+                <a:ea typeface="Arial" pitchFamily="34" charset="-122"/>
+                <a:cs typeface="Arial" pitchFamily="34" charset="-120"/>
+              </a:rPr>
+              <a:t>جَ</a:t>
+            </a:r>
+            <a:endParaRPr lang="ar-SA" sz="5400" dirty="0"/>
+          </a:p>
+        </p:txBody>
+      </p:sp>
+      <p:sp>
+        <p:nvSpPr>
+          <p:cNvPr id="36" name="L3 letter"/>
+          <p:cNvSpPr txBox="1"/>
+          <p:nvPr/>
+        </p:nvSpPr>
+        <p:spPr>
+          <a:xfrm>
+            <a:off x="3703320" y="1920240"/>
+            <a:ext cx="1280160" cy="1280160"/>
+          </a:xfrm>
+          <a:prstGeom prst="rect">
+            <a:avLst/>
+          </a:prstGeom>
+          <a:noFill/>
+          <a:ln/>
+        </p:spPr>
+        <p:txBody>
+          <a:bodyPr wrap="square" lIns="0" tIns="0" rIns="0" bIns="0" rtlCol="0" anchor="ctr"/>
+          <a:lstStyle/>
+          <a:p>
+            <a:pPr rtl="1" algn="ctr" indent="0" marL="0">
+              <a:buNone/>
+            </a:pPr>
+            <a:r>
+              <a:rPr lang="ar-SA" altLang="en-US" sz="5400" dirty="0">
+                <a:solidFill>
+                  <a:srgbClr val="16213E"/>
+                </a:solidFill>
+                <a:latin typeface="Arial" pitchFamily="34" charset="0"/>
+                <a:ea typeface="Arial" pitchFamily="34" charset="-122"/>
+                <a:cs typeface="Arial" pitchFamily="34" charset="-120"/>
+              </a:rPr>
+              <a:t>ر</a:t>
+            </a:r>
+            <a:endParaRPr lang="ar-SA" sz="5400" dirty="0"/>
+          </a:p>
+        </p:txBody>
+      </p:sp>
+      <p:sp>
+        <p:nvSpPr>
+          <p:cNvPr id="37" name="F3 fathah"/>
+          <p:cNvSpPr txBox="1"/>
+          <p:nvPr/>
+        </p:nvSpPr>
+        <p:spPr>
+          <a:xfrm>
+            <a:off x="3703320" y="1920240"/>
+            <a:ext cx="1280160" cy="1280160"/>
+          </a:xfrm>
+          <a:prstGeom prst="rect">
+            <a:avLst/>
+          </a:prstGeom>
+          <a:noFill/>
+          <a:ln/>
+        </p:spPr>
+        <p:txBody>
+          <a:bodyPr wrap="square" lIns="0" tIns="0" rIns="0" bIns="0" rtlCol="0" anchor="ctr"/>
+          <a:lstStyle/>
+          <a:p>
+            <a:pPr rtl="1" algn="ctr" indent="0" marL="0">
+              <a:buNone/>
+            </a:pPr>
+            <a:r>
+              <a:rPr lang="ar-SA" altLang="en-US" sz="5400" dirty="0">
+                <a:solidFill>
+                  <a:srgbClr val="16213E"/>
+                </a:solidFill>
+                <a:latin typeface="Arial" pitchFamily="34" charset="0"/>
+                <a:ea typeface="Arial" pitchFamily="34" charset="-122"/>
+                <a:cs typeface="Arial" pitchFamily="34" charset="-120"/>
+              </a:rPr>
+              <a:t>رَ</a:t>
+            </a:r>
+            <a:endParaRPr lang="ar-SA" sz="5400" dirty="0"/>
+          </a:p>
+        </p:txBody>
+      </p:sp>
+      <p:sp>
+        <p:nvSpPr>
           <p:cNvPr id="38" name="R result"/>
           <p:cNvSpPr txBox="1"/>
           <p:nvPr/>
@@ -5781,7 +5603,7 @@
                 <a:ea typeface="Arial" pitchFamily="34" charset="-122"/>
                 <a:cs typeface="Arial" pitchFamily="34" charset="-120"/>
               </a:rPr>
-              <a:t>ثَبَهَا</a:t>
+              <a:t>هَاجَرَ</a:t>
             </a:r>
             <a:endParaRPr lang="ar-SA" sz="6600" dirty="0"/>
           </a:p>
@@ -5932,7 +5754,7 @@
                                           </p:stCondLst>
                                         </p:cTn>
                                         <p:tgtEl>
-                                          <p:spTgt spid="28"/>
+                                          <p:spTgt spid="33"/>
                                         </p:tgtEl>
                                         <p:attrNameLst>
                                           <p:attrName>style.visibility</p:attrName>
@@ -5946,7 +5768,7 @@
                                       <p:cBhvr>
                                         <p:cTn id="17" dur="300"/>
                                         <p:tgtEl>
-                                          <p:spTgt spid="28"/>
+                                          <p:spTgt spid="33"/>
                                         </p:tgtEl>
                                       </p:cBhvr>
                                     </p:animEffect>
@@ -5985,7 +5807,7 @@
                                           </p:stCondLst>
                                         </p:cTn>
                                         <p:tgtEl>
-                                          <p:spTgt spid="33"/>
+                                          <p:spTgt spid="28"/>
                                         </p:tgtEl>
                                         <p:attrNameLst>
                                           <p:attrName>style.visibility</p:attrName>
@@ -5999,7 +5821,7 @@
                                       <p:cBhvr>
                                         <p:cTn id="22" dur="300"/>
                                         <p:tgtEl>
-                                          <p:spTgt spid="33"/>
+                                          <p:spTgt spid="28"/>
                                         </p:tgtEl>
                                       </p:cBhvr>
                                     </p:animEffect>
@@ -6091,7 +5913,7 @@
                                           </p:stCondLst>
                                         </p:cTn>
                                         <p:tgtEl>
-                                          <p:spTgt spid="29"/>
+                                          <p:spTgt spid="35"/>
                                         </p:tgtEl>
                                         <p:attrNameLst>
                                           <p:attrName>style.visibility</p:attrName>
@@ -6105,7 +5927,7 @@
                                       <p:cBhvr>
                                         <p:cTn id="32" dur="300"/>
                                         <p:tgtEl>
-                                          <p:spTgt spid="29"/>
+                                          <p:spTgt spid="35"/>
                                         </p:tgtEl>
                                       </p:cBhvr>
                                     </p:animEffect>
@@ -6144,7 +5966,7 @@
                                           </p:stCondLst>
                                         </p:cTn>
                                         <p:tgtEl>
-                                          <p:spTgt spid="35"/>
+                                          <p:spTgt spid="29"/>
                                         </p:tgtEl>
                                         <p:attrNameLst>
                                           <p:attrName>style.visibility</p:attrName>
@@ -6158,7 +5980,7 @@
                                       <p:cBhvr>
                                         <p:cTn id="37" dur="300"/>
                                         <p:tgtEl>
-                                          <p:spTgt spid="35"/>
+                                          <p:spTgt spid="29"/>
                                         </p:tgtEl>
                                       </p:cBhvr>
                                     </p:animEffect>
@@ -6407,11 +6229,11 @@
     <p:bldLst>
       <p:bldP spid="31" grpId="0"/>
       <p:bldP spid="32" grpId="0"/>
+      <p:bldP spid="33" grpId="0"/>
       <p:bldP spid="28" grpId="0" animBg="1"/>
-      <p:bldP spid="33" grpId="0"/>
       <p:bldP spid="34" grpId="0"/>
+      <p:bldP spid="35" grpId="0"/>
       <p:bldP spid="29" grpId="0" animBg="1"/>
-      <p:bldP spid="35" grpId="0"/>
       <p:bldP spid="36" grpId="0"/>
       <p:bldP spid="37" grpId="0"/>
       <p:bldP spid="30" grpId="0" animBg="1"/>
@@ -7184,7 +7006,124 @@
         </p:nvSpPr>
         <p:spPr>
           <a:xfrm>
-            <a:off x="7269480" y="1920240"/>
+            <a:off x="7496617" y="1920240"/>
+            <a:ext cx="1280160" cy="1280160"/>
+          </a:xfrm>
+          <a:prstGeom prst="rect">
+            <a:avLst/>
+          </a:prstGeom>
+          <a:noFill/>
+          <a:ln/>
+        </p:spPr>
+        <p:txBody>
+          <a:bodyPr wrap="square" lIns="0" tIns="0" rIns="0" bIns="0" rtlCol="0" anchor="ctr"/>
+          <a:lstStyle/>
+          <a:p>
+            <a:pPr rtl="1" algn="ctr" indent="0" marL="0">
+              <a:buNone/>
+            </a:pPr>
+            <a:r>
+              <a:rPr lang="ar-SA" altLang="en-US" sz="5400" dirty="0">
+                <a:solidFill>
+                  <a:srgbClr val="16213E"/>
+                </a:solidFill>
+                <a:latin typeface="Arial" pitchFamily="34" charset="0"/>
+                <a:ea typeface="Arial" pitchFamily="34" charset="-122"/>
+                <a:cs typeface="Arial" pitchFamily="34" charset="-120"/>
+              </a:rPr>
+              <a:t>ه</a:t>
+            </a:r>
+            <a:endParaRPr lang="ar-SA" sz="5400" dirty="0"/>
+          </a:p>
+        </p:txBody>
+      </p:sp>
+      <p:sp>
+        <p:nvSpPr>
+          <p:cNvPr id="32" name="F1 fathah"/>
+          <p:cNvSpPr txBox="1"/>
+          <p:nvPr/>
+        </p:nvSpPr>
+        <p:spPr>
+          <a:xfrm>
+            <a:off x="7496617" y="1920240"/>
+            <a:ext cx="1280160" cy="1280160"/>
+          </a:xfrm>
+          <a:prstGeom prst="rect">
+            <a:avLst/>
+          </a:prstGeom>
+          <a:noFill/>
+          <a:ln/>
+        </p:spPr>
+        <p:txBody>
+          <a:bodyPr wrap="square" lIns="0" tIns="0" rIns="0" bIns="0" rtlCol="0" anchor="ctr"/>
+          <a:lstStyle/>
+          <a:p>
+            <a:pPr rtl="1" algn="ctr" indent="0" marL="0">
+              <a:buNone/>
+            </a:pPr>
+            <a:r>
+              <a:rPr lang="ar-SA" altLang="en-US" sz="5400" dirty="0">
+                <a:solidFill>
+                  <a:srgbClr val="16213E"/>
+                </a:solidFill>
+                <a:latin typeface="Arial" pitchFamily="34" charset="0"/>
+                <a:ea typeface="Arial" pitchFamily="34" charset="-122"/>
+                <a:cs typeface="Arial" pitchFamily="34" charset="-120"/>
+              </a:rPr>
+              <a:t>هَ</a:t>
+            </a:r>
+            <a:endParaRPr lang="ar-SA" sz="5400" dirty="0"/>
+          </a:p>
+        </p:txBody>
+      </p:sp>
+      <p:sp>
+        <p:nvSpPr>
+          <p:cNvPr id="33" name="M1 alif"/>
+          <p:cNvSpPr txBox="1"/>
+          <p:nvPr/>
+        </p:nvSpPr>
+        <p:spPr>
+          <a:xfrm>
+            <a:off x="6884335" y="1920240"/>
+            <a:ext cx="1280160" cy="1280160"/>
+          </a:xfrm>
+          <a:prstGeom prst="rect">
+            <a:avLst/>
+          </a:prstGeom>
+          <a:noFill/>
+          <a:ln/>
+        </p:spPr>
+        <p:txBody>
+          <a:bodyPr wrap="square" lIns="0" tIns="0" rIns="0" bIns="0" rtlCol="0" anchor="ctr"/>
+          <a:lstStyle/>
+          <a:p>
+            <a:pPr rtl="1" algn="ctr" indent="0" marL="0">
+              <a:buNone/>
+            </a:pPr>
+            <a:r>
+              <a:rPr lang="ar-SA" altLang="en-US" sz="5400" dirty="0">
+                <a:solidFill>
+                  <a:srgbClr val="16213E"/>
+                </a:solidFill>
+                <a:latin typeface="Arial" pitchFamily="34" charset="0"/>
+                <a:ea typeface="Arial" pitchFamily="34" charset="-122"/>
+                <a:cs typeface="Arial" pitchFamily="34" charset="-120"/>
+              </a:rPr>
+              <a:t>ا</a:t>
+            </a:r>
+            <a:endParaRPr lang="ar-SA" sz="5400" dirty="0"/>
+          </a:p>
+        </p:txBody>
+      </p:sp>
+      <p:sp>
+        <p:nvSpPr>
+          <p:cNvPr id="34" name="L2 letter"/>
+          <p:cNvSpPr txBox="1"/>
+          <p:nvPr/>
+        </p:nvSpPr>
+        <p:spPr>
+          <a:xfrm>
+            <a:off x="5486400" y="1920240"/>
             <a:ext cx="1280160" cy="1280160"/>
           </a:xfrm>
           <a:prstGeom prst="rect">
@@ -7217,13 +7156,13 @@
       </p:sp>
       <p:sp>
         <p:nvSpPr>
-          <p:cNvPr id="32" name="F1 fathah"/>
+          <p:cNvPr id="35" name="F2 fathah"/>
           <p:cNvSpPr txBox="1"/>
           <p:nvPr/>
         </p:nvSpPr>
         <p:spPr>
           <a:xfrm>
-            <a:off x="7269480" y="1920240"/>
+            <a:off x="5486400" y="1920240"/>
             <a:ext cx="1280160" cy="1280160"/>
           </a:xfrm>
           <a:prstGeom prst="rect">
@@ -7256,13 +7195,13 @@
       </p:sp>
       <p:sp>
         <p:nvSpPr>
-          <p:cNvPr id="33" name="L2 letter"/>
+          <p:cNvPr id="36" name="L3 letter"/>
           <p:cNvSpPr txBox="1"/>
           <p:nvPr/>
         </p:nvSpPr>
         <p:spPr>
           <a:xfrm>
-            <a:off x="5486400" y="1920240"/>
+            <a:off x="3703320" y="1920240"/>
             <a:ext cx="1280160" cy="1280160"/>
           </a:xfrm>
           <a:prstGeom prst="rect">
@@ -7287,7 +7226,7 @@
                 <a:ea typeface="Arial" pitchFamily="34" charset="-122"/>
                 <a:cs typeface="Arial" pitchFamily="34" charset="-120"/>
               </a:rPr>
-              <a:t>ب</a:t>
+              <a:t>م</a:t>
             </a:r>
             <a:endParaRPr lang="ar-SA" sz="5400" dirty="0"/>
           </a:p>
@@ -7295,13 +7234,13 @@
       </p:sp>
       <p:sp>
         <p:nvSpPr>
-          <p:cNvPr id="34" name="F2 fathah"/>
+          <p:cNvPr id="37" name="F3 fathah"/>
           <p:cNvSpPr txBox="1"/>
           <p:nvPr/>
         </p:nvSpPr>
         <p:spPr>
           <a:xfrm>
-            <a:off x="5486400" y="1920240"/>
+            <a:off x="3703320" y="1920240"/>
             <a:ext cx="1280160" cy="1280160"/>
           </a:xfrm>
           <a:prstGeom prst="rect">
@@ -7326,124 +7265,7 @@
                 <a:ea typeface="Arial" pitchFamily="34" charset="-122"/>
                 <a:cs typeface="Arial" pitchFamily="34" charset="-120"/>
               </a:rPr>
-              <a:t>بَ</a:t>
-            </a:r>
-            <a:endParaRPr lang="ar-SA" sz="5400" dirty="0"/>
-          </a:p>
-        </p:txBody>
-      </p:sp>
-      <p:sp>
-        <p:nvSpPr>
-          <p:cNvPr id="35" name="L3 letter"/>
-          <p:cNvSpPr txBox="1"/>
-          <p:nvPr/>
-        </p:nvSpPr>
-        <p:spPr>
-          <a:xfrm>
-            <a:off x="3930457" y="1920240"/>
-            <a:ext cx="1280160" cy="1280160"/>
-          </a:xfrm>
-          <a:prstGeom prst="rect">
-            <a:avLst/>
-          </a:prstGeom>
-          <a:noFill/>
-          <a:ln/>
-        </p:spPr>
-        <p:txBody>
-          <a:bodyPr wrap="square" lIns="0" tIns="0" rIns="0" bIns="0" rtlCol="0" anchor="ctr"/>
-          <a:lstStyle/>
-          <a:p>
-            <a:pPr rtl="1" algn="ctr" indent="0" marL="0">
-              <a:buNone/>
-            </a:pPr>
-            <a:r>
-              <a:rPr lang="ar-SA" altLang="en-US" sz="5400" dirty="0">
-                <a:solidFill>
-                  <a:srgbClr val="16213E"/>
-                </a:solidFill>
-                <a:latin typeface="Arial" pitchFamily="34" charset="0"/>
-                <a:ea typeface="Arial" pitchFamily="34" charset="-122"/>
-                <a:cs typeface="Arial" pitchFamily="34" charset="-120"/>
-              </a:rPr>
-              <a:t>ه</a:t>
-            </a:r>
-            <a:endParaRPr lang="ar-SA" sz="5400" dirty="0"/>
-          </a:p>
-        </p:txBody>
-      </p:sp>
-      <p:sp>
-        <p:nvSpPr>
-          <p:cNvPr id="36" name="F3 fathah"/>
-          <p:cNvSpPr txBox="1"/>
-          <p:nvPr/>
-        </p:nvSpPr>
-        <p:spPr>
-          <a:xfrm>
-            <a:off x="3930457" y="1920240"/>
-            <a:ext cx="1280160" cy="1280160"/>
-          </a:xfrm>
-          <a:prstGeom prst="rect">
-            <a:avLst/>
-          </a:prstGeom>
-          <a:noFill/>
-          <a:ln/>
-        </p:spPr>
-        <p:txBody>
-          <a:bodyPr wrap="square" lIns="0" tIns="0" rIns="0" bIns="0" rtlCol="0" anchor="ctr"/>
-          <a:lstStyle/>
-          <a:p>
-            <a:pPr rtl="1" algn="ctr" indent="0" marL="0">
-              <a:buNone/>
-            </a:pPr>
-            <a:r>
-              <a:rPr lang="ar-SA" altLang="en-US" sz="5400" dirty="0">
-                <a:solidFill>
-                  <a:srgbClr val="16213E"/>
-                </a:solidFill>
-                <a:latin typeface="Arial" pitchFamily="34" charset="0"/>
-                <a:ea typeface="Arial" pitchFamily="34" charset="-122"/>
-                <a:cs typeface="Arial" pitchFamily="34" charset="-120"/>
-              </a:rPr>
-              <a:t>هَ</a:t>
-            </a:r>
-            <a:endParaRPr lang="ar-SA" sz="5400" dirty="0"/>
-          </a:p>
-        </p:txBody>
-      </p:sp>
-      <p:sp>
-        <p:nvSpPr>
-          <p:cNvPr id="37" name="M3 alif"/>
-          <p:cNvSpPr txBox="1"/>
-          <p:nvPr/>
-        </p:nvSpPr>
-        <p:spPr>
-          <a:xfrm>
-            <a:off x="3318175" y="1920240"/>
-            <a:ext cx="1280160" cy="1280160"/>
-          </a:xfrm>
-          <a:prstGeom prst="rect">
-            <a:avLst/>
-          </a:prstGeom>
-          <a:noFill/>
-          <a:ln/>
-        </p:spPr>
-        <p:txBody>
-          <a:bodyPr wrap="square" lIns="0" tIns="0" rIns="0" bIns="0" rtlCol="0" anchor="ctr"/>
-          <a:lstStyle/>
-          <a:p>
-            <a:pPr rtl="1" algn="ctr" indent="0" marL="0">
-              <a:buNone/>
-            </a:pPr>
-            <a:r>
-              <a:rPr lang="ar-SA" altLang="en-US" sz="5400" dirty="0">
-                <a:solidFill>
-                  <a:srgbClr val="16213E"/>
-                </a:solidFill>
-                <a:latin typeface="Arial" pitchFamily="34" charset="0"/>
-                <a:ea typeface="Arial" pitchFamily="34" charset="-122"/>
-                <a:cs typeface="Arial" pitchFamily="34" charset="-120"/>
-              </a:rPr>
-              <a:t>ا</a:t>
+              <a:t>مَ</a:t>
             </a:r>
             <a:endParaRPr lang="ar-SA" sz="5400" dirty="0"/>
           </a:p>
@@ -7482,7 +7304,7 @@
                 <a:ea typeface="Arial" pitchFamily="34" charset="-122"/>
                 <a:cs typeface="Arial" pitchFamily="34" charset="-120"/>
               </a:rPr>
-              <a:t>جَبَهَا</a:t>
+              <a:t>هَاجَمَ</a:t>
             </a:r>
             <a:endParaRPr lang="ar-SA" sz="6600" dirty="0"/>
           </a:p>
@@ -7633,7 +7455,7 @@
                                           </p:stCondLst>
                                         </p:cTn>
                                         <p:tgtEl>
-                                          <p:spTgt spid="28"/>
+                                          <p:spTgt spid="33"/>
                                         </p:tgtEl>
                                         <p:attrNameLst>
                                           <p:attrName>style.visibility</p:attrName>
@@ -7647,7 +7469,7 @@
                                       <p:cBhvr>
                                         <p:cTn id="17" dur="300"/>
                                         <p:tgtEl>
-                                          <p:spTgt spid="28"/>
+                                          <p:spTgt spid="33"/>
                                         </p:tgtEl>
                                       </p:cBhvr>
                                     </p:animEffect>
@@ -7686,7 +7508,7 @@
                                           </p:stCondLst>
                                         </p:cTn>
                                         <p:tgtEl>
-                                          <p:spTgt spid="33"/>
+                                          <p:spTgt spid="28"/>
                                         </p:tgtEl>
                                         <p:attrNameLst>
                                           <p:attrName>style.visibility</p:attrName>
@@ -7700,7 +7522,7 @@
                                       <p:cBhvr>
                                         <p:cTn id="22" dur="300"/>
                                         <p:tgtEl>
-                                          <p:spTgt spid="33"/>
+                                          <p:spTgt spid="28"/>
                                         </p:tgtEl>
                                       </p:cBhvr>
                                     </p:animEffect>
@@ -7792,7 +7614,7 @@
                                           </p:stCondLst>
                                         </p:cTn>
                                         <p:tgtEl>
-                                          <p:spTgt spid="29"/>
+                                          <p:spTgt spid="35"/>
                                         </p:tgtEl>
                                         <p:attrNameLst>
                                           <p:attrName>style.visibility</p:attrName>
@@ -7806,7 +7628,7 @@
                                       <p:cBhvr>
                                         <p:cTn id="32" dur="300"/>
                                         <p:tgtEl>
-                                          <p:spTgt spid="29"/>
+                                          <p:spTgt spid="35"/>
                                         </p:tgtEl>
                                       </p:cBhvr>
                                     </p:animEffect>
@@ -7845,7 +7667,7 @@
                                           </p:stCondLst>
                                         </p:cTn>
                                         <p:tgtEl>
-                                          <p:spTgt spid="35"/>
+                                          <p:spTgt spid="29"/>
                                         </p:tgtEl>
                                         <p:attrNameLst>
                                           <p:attrName>style.visibility</p:attrName>
@@ -7859,7 +7681,7 @@
                                       <p:cBhvr>
                                         <p:cTn id="37" dur="300"/>
                                         <p:tgtEl>
-                                          <p:spTgt spid="35"/>
+                                          <p:spTgt spid="29"/>
                                         </p:tgtEl>
                                       </p:cBhvr>
                                     </p:animEffect>
@@ -8108,11 +7930,11 @@
     <p:bldLst>
       <p:bldP spid="31" grpId="0"/>
       <p:bldP spid="32" grpId="0"/>
+      <p:bldP spid="33" grpId="0"/>
       <p:bldP spid="28" grpId="0" animBg="1"/>
-      <p:bldP spid="33" grpId="0"/>
       <p:bldP spid="34" grpId="0"/>
+      <p:bldP spid="35" grpId="0"/>
       <p:bldP spid="29" grpId="0" animBg="1"/>
-      <p:bldP spid="35" grpId="0"/>
       <p:bldP spid="36" grpId="0"/>
       <p:bldP spid="37" grpId="0"/>
       <p:bldP spid="30" grpId="0" animBg="1"/>
@@ -8885,163 +8707,7 @@
         </p:nvSpPr>
         <p:spPr>
           <a:xfrm>
-            <a:off x="7269480" y="1920240"/>
-            <a:ext cx="1280160" cy="1280160"/>
-          </a:xfrm>
-          <a:prstGeom prst="rect">
-            <a:avLst/>
-          </a:prstGeom>
-          <a:noFill/>
-          <a:ln/>
-        </p:spPr>
-        <p:txBody>
-          <a:bodyPr wrap="square" lIns="0" tIns="0" rIns="0" bIns="0" rtlCol="0" anchor="ctr"/>
-          <a:lstStyle/>
-          <a:p>
-            <a:pPr rtl="1" algn="ctr" indent="0" marL="0">
-              <a:buNone/>
-            </a:pPr>
-            <a:r>
-              <a:rPr lang="ar-SA" altLang="en-US" sz="5400" dirty="0">
-                <a:solidFill>
-                  <a:srgbClr val="16213E"/>
-                </a:solidFill>
-                <a:latin typeface="Arial" pitchFamily="34" charset="0"/>
-                <a:ea typeface="Arial" pitchFamily="34" charset="-122"/>
-                <a:cs typeface="Arial" pitchFamily="34" charset="-120"/>
-              </a:rPr>
-              <a:t>ح</a:t>
-            </a:r>
-            <a:endParaRPr lang="ar-SA" sz="5400" dirty="0"/>
-          </a:p>
-        </p:txBody>
-      </p:sp>
-      <p:sp>
-        <p:nvSpPr>
-          <p:cNvPr id="32" name="F1 fathah"/>
-          <p:cNvSpPr txBox="1"/>
-          <p:nvPr/>
-        </p:nvSpPr>
-        <p:spPr>
-          <a:xfrm>
-            <a:off x="7269480" y="1920240"/>
-            <a:ext cx="1280160" cy="1280160"/>
-          </a:xfrm>
-          <a:prstGeom prst="rect">
-            <a:avLst/>
-          </a:prstGeom>
-          <a:noFill/>
-          <a:ln/>
-        </p:spPr>
-        <p:txBody>
-          <a:bodyPr wrap="square" lIns="0" tIns="0" rIns="0" bIns="0" rtlCol="0" anchor="ctr"/>
-          <a:lstStyle/>
-          <a:p>
-            <a:pPr rtl="1" algn="ctr" indent="0" marL="0">
-              <a:buNone/>
-            </a:pPr>
-            <a:r>
-              <a:rPr lang="ar-SA" altLang="en-US" sz="5400" dirty="0">
-                <a:solidFill>
-                  <a:srgbClr val="16213E"/>
-                </a:solidFill>
-                <a:latin typeface="Arial" pitchFamily="34" charset="0"/>
-                <a:ea typeface="Arial" pitchFamily="34" charset="-122"/>
-                <a:cs typeface="Arial" pitchFamily="34" charset="-120"/>
-              </a:rPr>
-              <a:t>حَ</a:t>
-            </a:r>
-            <a:endParaRPr lang="ar-SA" sz="5400" dirty="0"/>
-          </a:p>
-        </p:txBody>
-      </p:sp>
-      <p:sp>
-        <p:nvSpPr>
-          <p:cNvPr id="33" name="L2 letter"/>
-          <p:cNvSpPr txBox="1"/>
-          <p:nvPr/>
-        </p:nvSpPr>
-        <p:spPr>
-          <a:xfrm>
-            <a:off x="5486400" y="1920240"/>
-            <a:ext cx="1280160" cy="1280160"/>
-          </a:xfrm>
-          <a:prstGeom prst="rect">
-            <a:avLst/>
-          </a:prstGeom>
-          <a:noFill/>
-          <a:ln/>
-        </p:spPr>
-        <p:txBody>
-          <a:bodyPr wrap="square" lIns="0" tIns="0" rIns="0" bIns="0" rtlCol="0" anchor="ctr"/>
-          <a:lstStyle/>
-          <a:p>
-            <a:pPr rtl="1" algn="ctr" indent="0" marL="0">
-              <a:buNone/>
-            </a:pPr>
-            <a:r>
-              <a:rPr lang="ar-SA" altLang="en-US" sz="5400" dirty="0">
-                <a:solidFill>
-                  <a:srgbClr val="16213E"/>
-                </a:solidFill>
-                <a:latin typeface="Arial" pitchFamily="34" charset="0"/>
-                <a:ea typeface="Arial" pitchFamily="34" charset="-122"/>
-                <a:cs typeface="Arial" pitchFamily="34" charset="-120"/>
-              </a:rPr>
-              <a:t>ب</a:t>
-            </a:r>
-            <a:endParaRPr lang="ar-SA" sz="5400" dirty="0"/>
-          </a:p>
-        </p:txBody>
-      </p:sp>
-      <p:sp>
-        <p:nvSpPr>
-          <p:cNvPr id="34" name="F2 fathah"/>
-          <p:cNvSpPr txBox="1"/>
-          <p:nvPr/>
-        </p:nvSpPr>
-        <p:spPr>
-          <a:xfrm>
-            <a:off x="5486400" y="1920240"/>
-            <a:ext cx="1280160" cy="1280160"/>
-          </a:xfrm>
-          <a:prstGeom prst="rect">
-            <a:avLst/>
-          </a:prstGeom>
-          <a:noFill/>
-          <a:ln/>
-        </p:spPr>
-        <p:txBody>
-          <a:bodyPr wrap="square" lIns="0" tIns="0" rIns="0" bIns="0" rtlCol="0" anchor="ctr"/>
-          <a:lstStyle/>
-          <a:p>
-            <a:pPr rtl="1" algn="ctr" indent="0" marL="0">
-              <a:buNone/>
-            </a:pPr>
-            <a:r>
-              <a:rPr lang="ar-SA" altLang="en-US" sz="5400" dirty="0">
-                <a:solidFill>
-                  <a:srgbClr val="16213E"/>
-                </a:solidFill>
-                <a:latin typeface="Arial" pitchFamily="34" charset="0"/>
-                <a:ea typeface="Arial" pitchFamily="34" charset="-122"/>
-                <a:cs typeface="Arial" pitchFamily="34" charset="-120"/>
-              </a:rPr>
-              <a:t>بَ</a:t>
-            </a:r>
-            <a:endParaRPr lang="ar-SA" sz="5400" dirty="0"/>
-          </a:p>
-        </p:txBody>
-      </p:sp>
-      <p:sp>
-        <p:nvSpPr>
-          <p:cNvPr id="35" name="L3 letter"/>
-          <p:cNvSpPr txBox="1"/>
-          <p:nvPr/>
-        </p:nvSpPr>
-        <p:spPr>
-          <a:xfrm>
-            <a:off x="3930457" y="1920240"/>
+            <a:off x="7496617" y="1920240"/>
             <a:ext cx="1280160" cy="1280160"/>
           </a:xfrm>
           <a:prstGeom prst="rect">
@@ -9074,13 +8740,13 @@
       </p:sp>
       <p:sp>
         <p:nvSpPr>
-          <p:cNvPr id="36" name="F3 fathah"/>
+          <p:cNvPr id="32" name="F1 fathah"/>
           <p:cNvSpPr txBox="1"/>
           <p:nvPr/>
         </p:nvSpPr>
         <p:spPr>
           <a:xfrm>
-            <a:off x="3930457" y="1920240"/>
+            <a:off x="7496617" y="1920240"/>
             <a:ext cx="1280160" cy="1280160"/>
           </a:xfrm>
           <a:prstGeom prst="rect">
@@ -9113,13 +8779,13 @@
       </p:sp>
       <p:sp>
         <p:nvSpPr>
-          <p:cNvPr id="37" name="M3 alif"/>
+          <p:cNvPr id="33" name="M1 alif"/>
           <p:cNvSpPr txBox="1"/>
           <p:nvPr/>
         </p:nvSpPr>
         <p:spPr>
           <a:xfrm>
-            <a:off x="3318175" y="1920240"/>
+            <a:off x="6884335" y="1920240"/>
             <a:ext cx="1280160" cy="1280160"/>
           </a:xfrm>
           <a:prstGeom prst="rect">
@@ -9152,6 +8818,162 @@
       </p:sp>
       <p:sp>
         <p:nvSpPr>
+          <p:cNvPr id="34" name="L2 letter"/>
+          <p:cNvSpPr txBox="1"/>
+          <p:nvPr/>
+        </p:nvSpPr>
+        <p:spPr>
+          <a:xfrm>
+            <a:off x="5486400" y="1920240"/>
+            <a:ext cx="1280160" cy="1280160"/>
+          </a:xfrm>
+          <a:prstGeom prst="rect">
+            <a:avLst/>
+          </a:prstGeom>
+          <a:noFill/>
+          <a:ln/>
+        </p:spPr>
+        <p:txBody>
+          <a:bodyPr wrap="square" lIns="0" tIns="0" rIns="0" bIns="0" rtlCol="0" anchor="ctr"/>
+          <a:lstStyle/>
+          <a:p>
+            <a:pPr rtl="1" algn="ctr" indent="0" marL="0">
+              <a:buNone/>
+            </a:pPr>
+            <a:r>
+              <a:rPr lang="ar-SA" altLang="en-US" sz="5400" dirty="0">
+                <a:solidFill>
+                  <a:srgbClr val="16213E"/>
+                </a:solidFill>
+                <a:latin typeface="Arial" pitchFamily="34" charset="0"/>
+                <a:ea typeface="Arial" pitchFamily="34" charset="-122"/>
+                <a:cs typeface="Arial" pitchFamily="34" charset="-120"/>
+              </a:rPr>
+              <a:t>ت</a:t>
+            </a:r>
+            <a:endParaRPr lang="ar-SA" sz="5400" dirty="0"/>
+          </a:p>
+        </p:txBody>
+      </p:sp>
+      <p:sp>
+        <p:nvSpPr>
+          <p:cNvPr id="35" name="F2 fathah"/>
+          <p:cNvSpPr txBox="1"/>
+          <p:nvPr/>
+        </p:nvSpPr>
+        <p:spPr>
+          <a:xfrm>
+            <a:off x="5486400" y="1920240"/>
+            <a:ext cx="1280160" cy="1280160"/>
+          </a:xfrm>
+          <a:prstGeom prst="rect">
+            <a:avLst/>
+          </a:prstGeom>
+          <a:noFill/>
+          <a:ln/>
+        </p:spPr>
+        <p:txBody>
+          <a:bodyPr wrap="square" lIns="0" tIns="0" rIns="0" bIns="0" rtlCol="0" anchor="ctr"/>
+          <a:lstStyle/>
+          <a:p>
+            <a:pPr rtl="1" algn="ctr" indent="0" marL="0">
+              <a:buNone/>
+            </a:pPr>
+            <a:r>
+              <a:rPr lang="ar-SA" altLang="en-US" sz="5400" dirty="0">
+                <a:solidFill>
+                  <a:srgbClr val="16213E"/>
+                </a:solidFill>
+                <a:latin typeface="Arial" pitchFamily="34" charset="0"/>
+                <a:ea typeface="Arial" pitchFamily="34" charset="-122"/>
+                <a:cs typeface="Arial" pitchFamily="34" charset="-120"/>
+              </a:rPr>
+              <a:t>تَ</a:t>
+            </a:r>
+            <a:endParaRPr lang="ar-SA" sz="5400" dirty="0"/>
+          </a:p>
+        </p:txBody>
+      </p:sp>
+      <p:sp>
+        <p:nvSpPr>
+          <p:cNvPr id="36" name="L3 letter"/>
+          <p:cNvSpPr txBox="1"/>
+          <p:nvPr/>
+        </p:nvSpPr>
+        <p:spPr>
+          <a:xfrm>
+            <a:off x="3703320" y="1920240"/>
+            <a:ext cx="1280160" cy="1280160"/>
+          </a:xfrm>
+          <a:prstGeom prst="rect">
+            <a:avLst/>
+          </a:prstGeom>
+          <a:noFill/>
+          <a:ln/>
+        </p:spPr>
+        <p:txBody>
+          <a:bodyPr wrap="square" lIns="0" tIns="0" rIns="0" bIns="0" rtlCol="0" anchor="ctr"/>
+          <a:lstStyle/>
+          <a:p>
+            <a:pPr rtl="1" algn="ctr" indent="0" marL="0">
+              <a:buNone/>
+            </a:pPr>
+            <a:r>
+              <a:rPr lang="ar-SA" altLang="en-US" sz="5400" dirty="0">
+                <a:solidFill>
+                  <a:srgbClr val="16213E"/>
+                </a:solidFill>
+                <a:latin typeface="Arial" pitchFamily="34" charset="0"/>
+                <a:ea typeface="Arial" pitchFamily="34" charset="-122"/>
+                <a:cs typeface="Arial" pitchFamily="34" charset="-120"/>
+              </a:rPr>
+              <a:t>ف</a:t>
+            </a:r>
+            <a:endParaRPr lang="ar-SA" sz="5400" dirty="0"/>
+          </a:p>
+        </p:txBody>
+      </p:sp>
+      <p:sp>
+        <p:nvSpPr>
+          <p:cNvPr id="37" name="F3 fathah"/>
+          <p:cNvSpPr txBox="1"/>
+          <p:nvPr/>
+        </p:nvSpPr>
+        <p:spPr>
+          <a:xfrm>
+            <a:off x="3703320" y="1920240"/>
+            <a:ext cx="1280160" cy="1280160"/>
+          </a:xfrm>
+          <a:prstGeom prst="rect">
+            <a:avLst/>
+          </a:prstGeom>
+          <a:noFill/>
+          <a:ln/>
+        </p:spPr>
+        <p:txBody>
+          <a:bodyPr wrap="square" lIns="0" tIns="0" rIns="0" bIns="0" rtlCol="0" anchor="ctr"/>
+          <a:lstStyle/>
+          <a:p>
+            <a:pPr rtl="1" algn="ctr" indent="0" marL="0">
+              <a:buNone/>
+            </a:pPr>
+            <a:r>
+              <a:rPr lang="ar-SA" altLang="en-US" sz="5400" dirty="0">
+                <a:solidFill>
+                  <a:srgbClr val="16213E"/>
+                </a:solidFill>
+                <a:latin typeface="Arial" pitchFamily="34" charset="0"/>
+                <a:ea typeface="Arial" pitchFamily="34" charset="-122"/>
+                <a:cs typeface="Arial" pitchFamily="34" charset="-120"/>
+              </a:rPr>
+              <a:t>فَ</a:t>
+            </a:r>
+            <a:endParaRPr lang="ar-SA" sz="5400" dirty="0"/>
+          </a:p>
+        </p:txBody>
+      </p:sp>
+      <p:sp>
+        <p:nvSpPr>
           <p:cNvPr id="38" name="R result"/>
           <p:cNvSpPr txBox="1"/>
           <p:nvPr/>
@@ -9183,7 +9005,7 @@
                 <a:ea typeface="Arial" pitchFamily="34" charset="-122"/>
                 <a:cs typeface="Arial" pitchFamily="34" charset="-120"/>
               </a:rPr>
-              <a:t>حَبَهَا</a:t>
+              <a:t>هَاتَفَ</a:t>
             </a:r>
             <a:endParaRPr lang="ar-SA" sz="6600" dirty="0"/>
           </a:p>
@@ -9334,7 +9156,7 @@
                                           </p:stCondLst>
                                         </p:cTn>
                                         <p:tgtEl>
-                                          <p:spTgt spid="28"/>
+                                          <p:spTgt spid="33"/>
                                         </p:tgtEl>
                                         <p:attrNameLst>
                                           <p:attrName>style.visibility</p:attrName>
@@ -9348,7 +9170,7 @@
                                       <p:cBhvr>
                                         <p:cTn id="17" dur="300"/>
                                         <p:tgtEl>
-                                          <p:spTgt spid="28"/>
+                                          <p:spTgt spid="33"/>
                                         </p:tgtEl>
                                       </p:cBhvr>
                                     </p:animEffect>
@@ -9387,7 +9209,7 @@
                                           </p:stCondLst>
                                         </p:cTn>
                                         <p:tgtEl>
-                                          <p:spTgt spid="33"/>
+                                          <p:spTgt spid="28"/>
                                         </p:tgtEl>
                                         <p:attrNameLst>
                                           <p:attrName>style.visibility</p:attrName>
@@ -9401,7 +9223,7 @@
                                       <p:cBhvr>
                                         <p:cTn id="22" dur="300"/>
                                         <p:tgtEl>
-                                          <p:spTgt spid="33"/>
+                                          <p:spTgt spid="28"/>
                                         </p:tgtEl>
                                       </p:cBhvr>
                                     </p:animEffect>
@@ -9493,7 +9315,7 @@
                                           </p:stCondLst>
                                         </p:cTn>
                                         <p:tgtEl>
-                                          <p:spTgt spid="29"/>
+                                          <p:spTgt spid="35"/>
                                         </p:tgtEl>
                                         <p:attrNameLst>
                                           <p:attrName>style.visibility</p:attrName>
@@ -9507,7 +9329,7 @@
                                       <p:cBhvr>
                                         <p:cTn id="32" dur="300"/>
                                         <p:tgtEl>
-                                          <p:spTgt spid="29"/>
+                                          <p:spTgt spid="35"/>
                                         </p:tgtEl>
                                       </p:cBhvr>
                                     </p:animEffect>
@@ -9546,7 +9368,7 @@
                                           </p:stCondLst>
                                         </p:cTn>
                                         <p:tgtEl>
-                                          <p:spTgt spid="35"/>
+                                          <p:spTgt spid="29"/>
                                         </p:tgtEl>
                                         <p:attrNameLst>
                                           <p:attrName>style.visibility</p:attrName>
@@ -9560,7 +9382,7 @@
                                       <p:cBhvr>
                                         <p:cTn id="37" dur="300"/>
                                         <p:tgtEl>
-                                          <p:spTgt spid="35"/>
+                                          <p:spTgt spid="29"/>
                                         </p:tgtEl>
                                       </p:cBhvr>
                                     </p:animEffect>
@@ -9809,3413 +9631,11 @@
     <p:bldLst>
       <p:bldP spid="31" grpId="0"/>
       <p:bldP spid="32" grpId="0"/>
+      <p:bldP spid="33" grpId="0"/>
       <p:bldP spid="28" grpId="0" animBg="1"/>
-      <p:bldP spid="33" grpId="0"/>
       <p:bldP spid="34" grpId="0"/>
+      <p:bldP spid="35" grpId="0"/>
       <p:bldP spid="29" grpId="0" animBg="1"/>
-      <p:bldP spid="35" grpId="0"/>
-      <p:bldP spid="36" grpId="0"/>
-      <p:bldP spid="37" grpId="0"/>
-      <p:bldP spid="30" grpId="0" animBg="1"/>
-      <p:bldP spid="38" grpId="0"/>
-    </p:bldLst>
-  </p:timing>
-</p:sld>
-</file>
-
-<file path=ppt/slides/slide14.xml><?xml version="1.0" encoding="utf-8"?>
-<p:sld xmlns:a="http://schemas.openxmlformats.org/drawingml/2006/main" xmlns:r="http://schemas.openxmlformats.org/officeDocument/2006/relationships" xmlns:p="http://schemas.openxmlformats.org/presentationml/2006/main">
-  <p:cSld name="Slide 14">
-    <p:bg>
-      <p:bgPr>
-        <a:solidFill>
-          <a:srgbClr val="1B2A5C"/>
-        </a:solidFill>
-      </p:bgPr>
-    </p:bg>
-    <p:spTree>
-      <p:nvGrpSpPr>
-        <p:cNvPr id="1" name=""/>
-        <p:cNvGrpSpPr/>
-        <p:nvPr/>
-      </p:nvGrpSpPr>
-      <p:grpSpPr>
-        <a:xfrm>
-          <a:off x="0" y="0"/>
-          <a:ext cx="0" cy="0"/>
-          <a:chOff x="0" y="0"/>
-          <a:chExt cx="0" cy="0"/>
-        </a:xfrm>
-      </p:grpSpPr>
-      <p:sp>
-        <p:nvSpPr>
-          <p:cNvPr id="2" name="Deco ground left"/>
-          <p:cNvSpPr/>
-          <p:nvPr/>
-        </p:nvSpPr>
-        <p:spPr>
-          <a:xfrm>
-            <a:off x="-1097280" y="4663440"/>
-            <a:ext cx="4754880" cy="1371600"/>
-          </a:xfrm>
-          <a:prstGeom prst="ellipse">
-            <a:avLst/>
-          </a:prstGeom>
-          <a:solidFill>
-            <a:srgbClr val="5B4B9A"/>
-          </a:solidFill>
-          <a:ln w="12700">
-            <a:solidFill>
-              <a:srgbClr val="5B4B9A"/>
-            </a:solidFill>
-            <a:prstDash val="solid"/>
-          </a:ln>
-        </p:spPr>
-      </p:sp>
-      <p:sp>
-        <p:nvSpPr>
-          <p:cNvPr id="3" name="Deco ground right"/>
-          <p:cNvSpPr/>
-          <p:nvPr/>
-        </p:nvSpPr>
-        <p:spPr>
-          <a:xfrm>
-            <a:off x="4206240" y="4754880"/>
-            <a:ext cx="5852160" cy="1371600"/>
-          </a:xfrm>
-          <a:prstGeom prst="ellipse">
-            <a:avLst/>
-          </a:prstGeom>
-          <a:solidFill>
-            <a:srgbClr val="7A63C4"/>
-          </a:solidFill>
-          <a:ln w="12700">
-            <a:solidFill>
-              <a:srgbClr val="7A63C4"/>
-            </a:solidFill>
-            <a:prstDash val="solid"/>
-          </a:ln>
-        </p:spPr>
-      </p:sp>
-      <p:sp>
-        <p:nvSpPr>
-          <p:cNvPr id="4" name="Deco star 1"/>
-          <p:cNvSpPr/>
-          <p:nvPr/>
-        </p:nvSpPr>
-        <p:spPr>
-          <a:xfrm>
-            <a:off x="457200" y="1143000"/>
-            <a:ext cx="182880" cy="182880"/>
-          </a:xfrm>
-          <a:prstGeom prst="star5">
-            <a:avLst/>
-          </a:prstGeom>
-          <a:solidFill>
-            <a:srgbClr val="FFD23F"/>
-          </a:solidFill>
-          <a:ln w="12700">
-            <a:solidFill>
-              <a:srgbClr val="FFD23F"/>
-            </a:solidFill>
-            <a:prstDash val="solid"/>
-          </a:ln>
-        </p:spPr>
-      </p:sp>
-      <p:sp>
-        <p:nvSpPr>
-          <p:cNvPr id="5" name="Deco star 2"/>
-          <p:cNvSpPr/>
-          <p:nvPr/>
-        </p:nvSpPr>
-        <p:spPr>
-          <a:xfrm>
-            <a:off x="1463040" y="777240"/>
-            <a:ext cx="228600" cy="228600"/>
-          </a:xfrm>
-          <a:prstGeom prst="star5">
-            <a:avLst/>
-          </a:prstGeom>
-          <a:solidFill>
-            <a:srgbClr val="FFFFFF"/>
-          </a:solidFill>
-          <a:ln w="12700">
-            <a:solidFill>
-              <a:srgbClr val="FFFFFF"/>
-            </a:solidFill>
-            <a:prstDash val="solid"/>
-          </a:ln>
-        </p:spPr>
-      </p:sp>
-      <p:sp>
-        <p:nvSpPr>
-          <p:cNvPr id="6" name="Deco star 3"/>
-          <p:cNvSpPr/>
-          <p:nvPr/>
-        </p:nvSpPr>
-        <p:spPr>
-          <a:xfrm>
-            <a:off x="2286000" y="274320"/>
-            <a:ext cx="274320" cy="274320"/>
-          </a:xfrm>
-          <a:prstGeom prst="star5">
-            <a:avLst/>
-          </a:prstGeom>
-          <a:solidFill>
-            <a:srgbClr val="FFD23F"/>
-          </a:solidFill>
-          <a:ln w="12700">
-            <a:solidFill>
-              <a:srgbClr val="FFD23F"/>
-            </a:solidFill>
-            <a:prstDash val="solid"/>
-          </a:ln>
-        </p:spPr>
-      </p:sp>
-      <p:sp>
-        <p:nvSpPr>
-          <p:cNvPr id="7" name="Deco star 4"/>
-          <p:cNvSpPr/>
-          <p:nvPr/>
-        </p:nvSpPr>
-        <p:spPr>
-          <a:xfrm>
-            <a:off x="3383280" y="640080"/>
-            <a:ext cx="182880" cy="182880"/>
-          </a:xfrm>
-          <a:prstGeom prst="star5">
-            <a:avLst/>
-          </a:prstGeom>
-          <a:solidFill>
-            <a:srgbClr val="FFFFFF"/>
-          </a:solidFill>
-          <a:ln w="12700">
-            <a:solidFill>
-              <a:srgbClr val="FFFFFF"/>
-            </a:solidFill>
-            <a:prstDash val="solid"/>
-          </a:ln>
-        </p:spPr>
-      </p:sp>
-      <p:sp>
-        <p:nvSpPr>
-          <p:cNvPr id="8" name="Deco star 5"/>
-          <p:cNvSpPr/>
-          <p:nvPr/>
-        </p:nvSpPr>
-        <p:spPr>
-          <a:xfrm>
-            <a:off x="4754880" y="228600"/>
-            <a:ext cx="228600" cy="228600"/>
-          </a:xfrm>
-          <a:prstGeom prst="star5">
-            <a:avLst/>
-          </a:prstGeom>
-          <a:solidFill>
-            <a:srgbClr val="FFD23F"/>
-          </a:solidFill>
-          <a:ln w="12700">
-            <a:solidFill>
-              <a:srgbClr val="FFD23F"/>
-            </a:solidFill>
-            <a:prstDash val="solid"/>
-          </a:ln>
-        </p:spPr>
-      </p:sp>
-      <p:sp>
-        <p:nvSpPr>
-          <p:cNvPr id="9" name="Deco star 6"/>
-          <p:cNvSpPr/>
-          <p:nvPr/>
-        </p:nvSpPr>
-        <p:spPr>
-          <a:xfrm>
-            <a:off x="5760720" y="731520"/>
-            <a:ext cx="201168" cy="201168"/>
-          </a:xfrm>
-          <a:prstGeom prst="star5">
-            <a:avLst/>
-          </a:prstGeom>
-          <a:solidFill>
-            <a:srgbClr val="FFFFFF"/>
-          </a:solidFill>
-          <a:ln w="12700">
-            <a:solidFill>
-              <a:srgbClr val="FFFFFF"/>
-            </a:solidFill>
-            <a:prstDash val="solid"/>
-          </a:ln>
-        </p:spPr>
-      </p:sp>
-      <p:sp>
-        <p:nvSpPr>
-          <p:cNvPr id="10" name="Deco star 7"/>
-          <p:cNvSpPr/>
-          <p:nvPr/>
-        </p:nvSpPr>
-        <p:spPr>
-          <a:xfrm>
-            <a:off x="6766560" y="320040"/>
-            <a:ext cx="256032" cy="256032"/>
-          </a:xfrm>
-          <a:prstGeom prst="star5">
-            <a:avLst/>
-          </a:prstGeom>
-          <a:solidFill>
-            <a:srgbClr val="FFD23F"/>
-          </a:solidFill>
-          <a:ln w="12700">
-            <a:solidFill>
-              <a:srgbClr val="FFD23F"/>
-            </a:solidFill>
-            <a:prstDash val="solid"/>
-          </a:ln>
-        </p:spPr>
-      </p:sp>
-      <p:sp>
-        <p:nvSpPr>
-          <p:cNvPr id="11" name="Deco star 8"/>
-          <p:cNvSpPr/>
-          <p:nvPr/>
-        </p:nvSpPr>
-        <p:spPr>
-          <a:xfrm>
-            <a:off x="8549640" y="1188720"/>
-            <a:ext cx="182880" cy="182880"/>
-          </a:xfrm>
-          <a:prstGeom prst="star5">
-            <a:avLst/>
-          </a:prstGeom>
-          <a:solidFill>
-            <a:srgbClr val="FFFFFF"/>
-          </a:solidFill>
-          <a:ln w="12700">
-            <a:solidFill>
-              <a:srgbClr val="FFFFFF"/>
-            </a:solidFill>
-            <a:prstDash val="solid"/>
-          </a:ln>
-        </p:spPr>
-      </p:sp>
-      <p:sp>
-        <p:nvSpPr>
-          <p:cNvPr id="12" name="Deco star 9"/>
-          <p:cNvSpPr/>
-          <p:nvPr/>
-        </p:nvSpPr>
-        <p:spPr>
-          <a:xfrm>
-            <a:off x="1737360" y="4206240"/>
-            <a:ext cx="201168" cy="201168"/>
-          </a:xfrm>
-          <a:prstGeom prst="star5">
-            <a:avLst/>
-          </a:prstGeom>
-          <a:solidFill>
-            <a:srgbClr val="FFD23F"/>
-          </a:solidFill>
-          <a:ln w="12700">
-            <a:solidFill>
-              <a:srgbClr val="FFD23F"/>
-            </a:solidFill>
-            <a:prstDash val="solid"/>
-          </a:ln>
-        </p:spPr>
-      </p:sp>
-      <p:sp>
-        <p:nvSpPr>
-          <p:cNvPr id="13" name="Deco star 10"/>
-          <p:cNvSpPr/>
-          <p:nvPr/>
-        </p:nvSpPr>
-        <p:spPr>
-          <a:xfrm>
-            <a:off x="2743200" y="4526280"/>
-            <a:ext cx="164592" cy="164592"/>
-          </a:xfrm>
-          <a:prstGeom prst="star5">
-            <a:avLst/>
-          </a:prstGeom>
-          <a:solidFill>
-            <a:srgbClr val="FFFFFF"/>
-          </a:solidFill>
-          <a:ln w="12700">
-            <a:solidFill>
-              <a:srgbClr val="FFFFFF"/>
-            </a:solidFill>
-            <a:prstDash val="solid"/>
-          </a:ln>
-        </p:spPr>
-      </p:sp>
-      <p:sp>
-        <p:nvSpPr>
-          <p:cNvPr id="14" name="Deco star 11"/>
-          <p:cNvSpPr/>
-          <p:nvPr/>
-        </p:nvSpPr>
-        <p:spPr>
-          <a:xfrm>
-            <a:off x="6400800" y="4480560"/>
-            <a:ext cx="182880" cy="182880"/>
-          </a:xfrm>
-          <a:prstGeom prst="star5">
-            <a:avLst/>
-          </a:prstGeom>
-          <a:solidFill>
-            <a:srgbClr val="FFD23F"/>
-          </a:solidFill>
-          <a:ln w="12700">
-            <a:solidFill>
-              <a:srgbClr val="FFD23F"/>
-            </a:solidFill>
-            <a:prstDash val="solid"/>
-          </a:ln>
-        </p:spPr>
-      </p:sp>
-      <p:sp>
-        <p:nvSpPr>
-          <p:cNvPr id="15" name="Deco star 12"/>
-          <p:cNvSpPr/>
-          <p:nvPr/>
-        </p:nvSpPr>
-        <p:spPr>
-          <a:xfrm>
-            <a:off x="7315200" y="4160520"/>
-            <a:ext cx="219456" cy="219456"/>
-          </a:xfrm>
-          <a:prstGeom prst="star5">
-            <a:avLst/>
-          </a:prstGeom>
-          <a:solidFill>
-            <a:srgbClr val="FFFFFF"/>
-          </a:solidFill>
-          <a:ln w="12700">
-            <a:solidFill>
-              <a:srgbClr val="FFFFFF"/>
-            </a:solidFill>
-            <a:prstDash val="solid"/>
-          </a:ln>
-        </p:spPr>
-      </p:sp>
-      <p:sp>
-        <p:nvSpPr>
-          <p:cNvPr id="16" name="Deco moon"/>
-          <p:cNvSpPr/>
-          <p:nvPr/>
-        </p:nvSpPr>
-        <p:spPr>
-          <a:xfrm>
-            <a:off x="320040" y="274320"/>
-            <a:ext cx="548640" cy="822960"/>
-          </a:xfrm>
-          <a:prstGeom prst="moon">
-            <a:avLst/>
-          </a:prstGeom>
-          <a:solidFill>
-            <a:srgbClr val="FFE48A"/>
-          </a:solidFill>
-          <a:ln w="12700">
-            <a:solidFill>
-              <a:srgbClr val="FFE48A"/>
-            </a:solidFill>
-            <a:prstDash val="solid"/>
-          </a:ln>
-        </p:spPr>
-      </p:sp>
-      <p:sp>
-        <p:nvSpPr>
-          <p:cNvPr id="17" name="Deco planet"/>
-          <p:cNvSpPr/>
-          <p:nvPr/>
-        </p:nvSpPr>
-        <p:spPr>
-          <a:xfrm>
-            <a:off x="7818120" y="274320"/>
-            <a:ext cx="777240" cy="777240"/>
-          </a:xfrm>
-          <a:prstGeom prst="ellipse">
-            <a:avLst/>
-          </a:prstGeom>
-          <a:solidFill>
-            <a:srgbClr val="FF8A5B"/>
-          </a:solidFill>
-          <a:ln w="12700">
-            <a:solidFill>
-              <a:srgbClr val="FF8A5B"/>
-            </a:solidFill>
-            <a:prstDash val="solid"/>
-          </a:ln>
-        </p:spPr>
-      </p:sp>
-      <p:sp>
-        <p:nvSpPr>
-          <p:cNvPr id="18" name="Deco planet ring"/>
-          <p:cNvSpPr/>
-          <p:nvPr/>
-        </p:nvSpPr>
-        <p:spPr>
-          <a:xfrm>
-            <a:off x="7543800" y="530352"/>
-            <a:ext cx="1325880" cy="274320"/>
-          </a:xfrm>
-          <a:prstGeom prst="ellipse">
-            <a:avLst/>
-          </a:prstGeom>
-          <a:solidFill>
-            <a:srgbClr val="FFD23F">
-              <a:alpha val="0"/>
-            </a:srgbClr>
-          </a:solidFill>
-          <a:ln w="38100">
-            <a:solidFill>
-              <a:srgbClr val="FFD23F"/>
-            </a:solidFill>
-            <a:prstDash val="solid"/>
-          </a:ln>
-        </p:spPr>
-      </p:sp>
-      <p:sp>
-        <p:nvSpPr>
-          <p:cNvPr id="19" name="Deco alien"/>
-          <p:cNvSpPr/>
-          <p:nvPr/>
-        </p:nvSpPr>
-        <p:spPr>
-          <a:xfrm>
-            <a:off x="365760" y="4069080"/>
-            <a:ext cx="731520" cy="731520"/>
-          </a:xfrm>
-          <a:prstGeom prst="smileyFace">
-            <a:avLst/>
-          </a:prstGeom>
-          <a:solidFill>
-            <a:srgbClr val="8ED98F"/>
-          </a:solidFill>
-          <a:ln w="12700">
-            <a:solidFill>
-              <a:srgbClr val="8ED98F"/>
-            </a:solidFill>
-            <a:prstDash val="solid"/>
-          </a:ln>
-        </p:spPr>
-      </p:sp>
-      <p:sp>
-        <p:nvSpPr>
-          <p:cNvPr id="20" name="Deco rocket nose"/>
-          <p:cNvSpPr/>
-          <p:nvPr/>
-        </p:nvSpPr>
-        <p:spPr>
-          <a:xfrm>
-            <a:off x="8229600" y="3611880"/>
-            <a:ext cx="411480" cy="320040"/>
-          </a:xfrm>
-          <a:prstGeom prst="triangle">
-            <a:avLst/>
-          </a:prstGeom>
-          <a:solidFill>
-            <a:srgbClr val="E8604C"/>
-          </a:solidFill>
-          <a:ln w="12700">
-            <a:solidFill>
-              <a:srgbClr val="E8604C"/>
-            </a:solidFill>
-            <a:prstDash val="solid"/>
-          </a:ln>
-        </p:spPr>
-      </p:sp>
-      <p:sp>
-        <p:nvSpPr>
-          <p:cNvPr id="21" name="Deco rocket body"/>
-          <p:cNvSpPr/>
-          <p:nvPr/>
-        </p:nvSpPr>
-        <p:spPr>
-          <a:xfrm>
-            <a:off x="8229600" y="3886200"/>
-            <a:ext cx="411480" cy="777240"/>
-          </a:xfrm>
-          <a:prstGeom prst="roundRect">
-            <a:avLst>
-              <a:gd name="adj" fmla="val 17778"/>
-            </a:avLst>
-          </a:prstGeom>
-          <a:solidFill>
-            <a:srgbClr val="FFFFFF"/>
-          </a:solidFill>
-          <a:ln w="12700">
-            <a:solidFill>
-              <a:srgbClr val="FFFFFF"/>
-            </a:solidFill>
-            <a:prstDash val="solid"/>
-          </a:ln>
-        </p:spPr>
-      </p:sp>
-      <p:sp>
-        <p:nvSpPr>
-          <p:cNvPr id="22" name="Deco rocket window"/>
-          <p:cNvSpPr/>
-          <p:nvPr/>
-        </p:nvSpPr>
-        <p:spPr>
-          <a:xfrm>
-            <a:off x="8321040" y="4069080"/>
-            <a:ext cx="228600" cy="228600"/>
-          </a:xfrm>
-          <a:prstGeom prst="ellipse">
-            <a:avLst/>
-          </a:prstGeom>
-          <a:solidFill>
-            <a:srgbClr val="3A8FD9"/>
-          </a:solidFill>
-          <a:ln w="12700">
-            <a:solidFill>
-              <a:srgbClr val="3A8FD9"/>
-            </a:solidFill>
-            <a:prstDash val="solid"/>
-          </a:ln>
-        </p:spPr>
-      </p:sp>
-      <p:sp>
-        <p:nvSpPr>
-          <p:cNvPr id="23" name="Deco rocket flame"/>
-          <p:cNvSpPr/>
-          <p:nvPr/>
-        </p:nvSpPr>
-        <p:spPr>
-          <a:xfrm rot="10800000">
-            <a:off x="8275320" y="4663440"/>
-            <a:ext cx="320040" cy="274320"/>
-          </a:xfrm>
-          <a:prstGeom prst="triangle">
-            <a:avLst/>
-          </a:prstGeom>
-          <a:solidFill>
-            <a:srgbClr val="FFB347"/>
-          </a:solidFill>
-          <a:ln w="12700">
-            <a:solidFill>
-              <a:srgbClr val="FFB347"/>
-            </a:solidFill>
-            <a:prstDash val="solid"/>
-          </a:ln>
-        </p:spPr>
-      </p:sp>
-      <p:sp>
-        <p:nvSpPr>
-          <p:cNvPr id="24" name="Circle 1"/>
-          <p:cNvSpPr/>
-          <p:nvPr/>
-        </p:nvSpPr>
-        <p:spPr>
-          <a:xfrm>
-            <a:off x="7269480" y="1920240"/>
-            <a:ext cx="1280160" cy="1280160"/>
-          </a:xfrm>
-          <a:prstGeom prst="ellipse">
-            <a:avLst/>
-          </a:prstGeom>
-          <a:solidFill>
-            <a:srgbClr val="FFFFFF"/>
-          </a:solidFill>
-          <a:ln w="101600">
-            <a:solidFill>
-              <a:srgbClr val="E8604C"/>
-            </a:solidFill>
-            <a:prstDash val="solid"/>
-          </a:ln>
-        </p:spPr>
-      </p:sp>
-      <p:sp>
-        <p:nvSpPr>
-          <p:cNvPr id="25" name="Circle 2"/>
-          <p:cNvSpPr/>
-          <p:nvPr/>
-        </p:nvSpPr>
-        <p:spPr>
-          <a:xfrm>
-            <a:off x="5486400" y="1920240"/>
-            <a:ext cx="1280160" cy="1280160"/>
-          </a:xfrm>
-          <a:prstGeom prst="ellipse">
-            <a:avLst/>
-          </a:prstGeom>
-          <a:solidFill>
-            <a:srgbClr val="FFFFFF"/>
-          </a:solidFill>
-          <a:ln w="101600">
-            <a:solidFill>
-              <a:srgbClr val="3A8FD9"/>
-            </a:solidFill>
-            <a:prstDash val="solid"/>
-          </a:ln>
-        </p:spPr>
-      </p:sp>
-      <p:sp>
-        <p:nvSpPr>
-          <p:cNvPr id="26" name="Circle 3"/>
-          <p:cNvSpPr/>
-          <p:nvPr/>
-        </p:nvSpPr>
-        <p:spPr>
-          <a:xfrm>
-            <a:off x="3703320" y="1920240"/>
-            <a:ext cx="1280160" cy="1280160"/>
-          </a:xfrm>
-          <a:prstGeom prst="ellipse">
-            <a:avLst/>
-          </a:prstGeom>
-          <a:solidFill>
-            <a:srgbClr val="FFFFFF"/>
-          </a:solidFill>
-          <a:ln w="101600">
-            <a:solidFill>
-              <a:srgbClr val="2FB57A"/>
-            </a:solidFill>
-            <a:prstDash val="solid"/>
-          </a:ln>
-        </p:spPr>
-      </p:sp>
-      <p:sp>
-        <p:nvSpPr>
-          <p:cNvPr id="27" name="Result panel"/>
-          <p:cNvSpPr/>
-          <p:nvPr/>
-        </p:nvSpPr>
-        <p:spPr>
-          <a:xfrm>
-            <a:off x="594360" y="1645920"/>
-            <a:ext cx="2331720" cy="1828800"/>
-          </a:xfrm>
-          <a:prstGeom prst="roundRect">
-            <a:avLst>
-              <a:gd name="adj" fmla="val 15000"/>
-            </a:avLst>
-          </a:prstGeom>
-          <a:solidFill>
-            <a:srgbClr val="FFFBE3"/>
-          </a:solidFill>
-          <a:ln w="76200">
-            <a:solidFill>
-              <a:srgbClr val="F2B134"/>
-            </a:solidFill>
-            <a:prstDash val="solid"/>
-          </a:ln>
-        </p:spPr>
-      </p:sp>
-      <p:sp>
-        <p:nvSpPr>
-          <p:cNvPr id="28" name="P1 plus"/>
-          <p:cNvSpPr/>
-          <p:nvPr/>
-        </p:nvSpPr>
-        <p:spPr>
-          <a:xfrm>
-            <a:off x="6844284" y="2386584"/>
-            <a:ext cx="347472" cy="347472"/>
-          </a:xfrm>
-          <a:prstGeom prst="mathPlus">
-            <a:avLst/>
-          </a:prstGeom>
-          <a:solidFill>
-            <a:srgbClr val="FFB347"/>
-          </a:solidFill>
-          <a:ln w="12700">
-            <a:solidFill>
-              <a:srgbClr val="FFB347"/>
-            </a:solidFill>
-            <a:prstDash val="solid"/>
-          </a:ln>
-        </p:spPr>
-      </p:sp>
-      <p:sp>
-        <p:nvSpPr>
-          <p:cNvPr id="29" name="P2 plus"/>
-          <p:cNvSpPr/>
-          <p:nvPr/>
-        </p:nvSpPr>
-        <p:spPr>
-          <a:xfrm>
-            <a:off x="5061204" y="2386584"/>
-            <a:ext cx="347472" cy="347472"/>
-          </a:xfrm>
-          <a:prstGeom prst="mathPlus">
-            <a:avLst/>
-          </a:prstGeom>
-          <a:solidFill>
-            <a:srgbClr val="FFB347"/>
-          </a:solidFill>
-          <a:ln w="12700">
-            <a:solidFill>
-              <a:srgbClr val="FFB347"/>
-            </a:solidFill>
-            <a:prstDash val="solid"/>
-          </a:ln>
-        </p:spPr>
-      </p:sp>
-      <p:sp>
-        <p:nvSpPr>
-          <p:cNvPr id="30" name="A arrow"/>
-          <p:cNvSpPr/>
-          <p:nvPr/>
-        </p:nvSpPr>
-        <p:spPr>
-          <a:xfrm>
-            <a:off x="3040380" y="2304288"/>
-            <a:ext cx="548640" cy="512064"/>
-          </a:xfrm>
-          <a:prstGeom prst="leftArrow">
-            <a:avLst/>
-          </a:prstGeom>
-          <a:solidFill>
-            <a:srgbClr val="FFD23F"/>
-          </a:solidFill>
-          <a:ln w="12700">
-            <a:solidFill>
-              <a:srgbClr val="FFD23F"/>
-            </a:solidFill>
-            <a:prstDash val="solid"/>
-          </a:ln>
-        </p:spPr>
-      </p:sp>
-      <p:sp>
-        <p:nvSpPr>
-          <p:cNvPr id="31" name="L1 letter"/>
-          <p:cNvSpPr txBox="1"/>
-          <p:nvPr/>
-        </p:nvSpPr>
-        <p:spPr>
-          <a:xfrm>
-            <a:off x="7269480" y="1920240"/>
-            <a:ext cx="1280160" cy="1280160"/>
-          </a:xfrm>
-          <a:prstGeom prst="rect">
-            <a:avLst/>
-          </a:prstGeom>
-          <a:noFill/>
-          <a:ln/>
-        </p:spPr>
-        <p:txBody>
-          <a:bodyPr wrap="square" lIns="0" tIns="0" rIns="0" bIns="0" rtlCol="0" anchor="ctr"/>
-          <a:lstStyle/>
-          <a:p>
-            <a:pPr rtl="1" algn="ctr" indent="0" marL="0">
-              <a:buNone/>
-            </a:pPr>
-            <a:r>
-              <a:rPr lang="ar-SA" altLang="en-US" sz="5400" dirty="0">
-                <a:solidFill>
-                  <a:srgbClr val="16213E"/>
-                </a:solidFill>
-                <a:latin typeface="Arial" pitchFamily="34" charset="0"/>
-                <a:ea typeface="Arial" pitchFamily="34" charset="-122"/>
-                <a:cs typeface="Arial" pitchFamily="34" charset="-120"/>
-              </a:rPr>
-              <a:t>خ</a:t>
-            </a:r>
-            <a:endParaRPr lang="ar-SA" sz="5400" dirty="0"/>
-          </a:p>
-        </p:txBody>
-      </p:sp>
-      <p:sp>
-        <p:nvSpPr>
-          <p:cNvPr id="32" name="F1 fathah"/>
-          <p:cNvSpPr txBox="1"/>
-          <p:nvPr/>
-        </p:nvSpPr>
-        <p:spPr>
-          <a:xfrm>
-            <a:off x="7269480" y="1920240"/>
-            <a:ext cx="1280160" cy="1280160"/>
-          </a:xfrm>
-          <a:prstGeom prst="rect">
-            <a:avLst/>
-          </a:prstGeom>
-          <a:noFill/>
-          <a:ln/>
-        </p:spPr>
-        <p:txBody>
-          <a:bodyPr wrap="square" lIns="0" tIns="0" rIns="0" bIns="0" rtlCol="0" anchor="ctr"/>
-          <a:lstStyle/>
-          <a:p>
-            <a:pPr rtl="1" algn="ctr" indent="0" marL="0">
-              <a:buNone/>
-            </a:pPr>
-            <a:r>
-              <a:rPr lang="ar-SA" altLang="en-US" sz="5400" dirty="0">
-                <a:solidFill>
-                  <a:srgbClr val="16213E"/>
-                </a:solidFill>
-                <a:latin typeface="Arial" pitchFamily="34" charset="0"/>
-                <a:ea typeface="Arial" pitchFamily="34" charset="-122"/>
-                <a:cs typeface="Arial" pitchFamily="34" charset="-120"/>
-              </a:rPr>
-              <a:t>خَ</a:t>
-            </a:r>
-            <a:endParaRPr lang="ar-SA" sz="5400" dirty="0"/>
-          </a:p>
-        </p:txBody>
-      </p:sp>
-      <p:sp>
-        <p:nvSpPr>
-          <p:cNvPr id="33" name="L2 letter"/>
-          <p:cNvSpPr txBox="1"/>
-          <p:nvPr/>
-        </p:nvSpPr>
-        <p:spPr>
-          <a:xfrm>
-            <a:off x="5486400" y="1920240"/>
-            <a:ext cx="1280160" cy="1280160"/>
-          </a:xfrm>
-          <a:prstGeom prst="rect">
-            <a:avLst/>
-          </a:prstGeom>
-          <a:noFill/>
-          <a:ln/>
-        </p:spPr>
-        <p:txBody>
-          <a:bodyPr wrap="square" lIns="0" tIns="0" rIns="0" bIns="0" rtlCol="0" anchor="ctr"/>
-          <a:lstStyle/>
-          <a:p>
-            <a:pPr rtl="1" algn="ctr" indent="0" marL="0">
-              <a:buNone/>
-            </a:pPr>
-            <a:r>
-              <a:rPr lang="ar-SA" altLang="en-US" sz="5400" dirty="0">
-                <a:solidFill>
-                  <a:srgbClr val="16213E"/>
-                </a:solidFill>
-                <a:latin typeface="Arial" pitchFamily="34" charset="0"/>
-                <a:ea typeface="Arial" pitchFamily="34" charset="-122"/>
-                <a:cs typeface="Arial" pitchFamily="34" charset="-120"/>
-              </a:rPr>
-              <a:t>ب</a:t>
-            </a:r>
-            <a:endParaRPr lang="ar-SA" sz="5400" dirty="0"/>
-          </a:p>
-        </p:txBody>
-      </p:sp>
-      <p:sp>
-        <p:nvSpPr>
-          <p:cNvPr id="34" name="F2 fathah"/>
-          <p:cNvSpPr txBox="1"/>
-          <p:nvPr/>
-        </p:nvSpPr>
-        <p:spPr>
-          <a:xfrm>
-            <a:off x="5486400" y="1920240"/>
-            <a:ext cx="1280160" cy="1280160"/>
-          </a:xfrm>
-          <a:prstGeom prst="rect">
-            <a:avLst/>
-          </a:prstGeom>
-          <a:noFill/>
-          <a:ln/>
-        </p:spPr>
-        <p:txBody>
-          <a:bodyPr wrap="square" lIns="0" tIns="0" rIns="0" bIns="0" rtlCol="0" anchor="ctr"/>
-          <a:lstStyle/>
-          <a:p>
-            <a:pPr rtl="1" algn="ctr" indent="0" marL="0">
-              <a:buNone/>
-            </a:pPr>
-            <a:r>
-              <a:rPr lang="ar-SA" altLang="en-US" sz="5400" dirty="0">
-                <a:solidFill>
-                  <a:srgbClr val="16213E"/>
-                </a:solidFill>
-                <a:latin typeface="Arial" pitchFamily="34" charset="0"/>
-                <a:ea typeface="Arial" pitchFamily="34" charset="-122"/>
-                <a:cs typeface="Arial" pitchFamily="34" charset="-120"/>
-              </a:rPr>
-              <a:t>بَ</a:t>
-            </a:r>
-            <a:endParaRPr lang="ar-SA" sz="5400" dirty="0"/>
-          </a:p>
-        </p:txBody>
-      </p:sp>
-      <p:sp>
-        <p:nvSpPr>
-          <p:cNvPr id="35" name="L3 letter"/>
-          <p:cNvSpPr txBox="1"/>
-          <p:nvPr/>
-        </p:nvSpPr>
-        <p:spPr>
-          <a:xfrm>
-            <a:off x="3930457" y="1920240"/>
-            <a:ext cx="1280160" cy="1280160"/>
-          </a:xfrm>
-          <a:prstGeom prst="rect">
-            <a:avLst/>
-          </a:prstGeom>
-          <a:noFill/>
-          <a:ln/>
-        </p:spPr>
-        <p:txBody>
-          <a:bodyPr wrap="square" lIns="0" tIns="0" rIns="0" bIns="0" rtlCol="0" anchor="ctr"/>
-          <a:lstStyle/>
-          <a:p>
-            <a:pPr rtl="1" algn="ctr" indent="0" marL="0">
-              <a:buNone/>
-            </a:pPr>
-            <a:r>
-              <a:rPr lang="ar-SA" altLang="en-US" sz="5400" dirty="0">
-                <a:solidFill>
-                  <a:srgbClr val="16213E"/>
-                </a:solidFill>
-                <a:latin typeface="Arial" pitchFamily="34" charset="0"/>
-                <a:ea typeface="Arial" pitchFamily="34" charset="-122"/>
-                <a:cs typeface="Arial" pitchFamily="34" charset="-120"/>
-              </a:rPr>
-              <a:t>ه</a:t>
-            </a:r>
-            <a:endParaRPr lang="ar-SA" sz="5400" dirty="0"/>
-          </a:p>
-        </p:txBody>
-      </p:sp>
-      <p:sp>
-        <p:nvSpPr>
-          <p:cNvPr id="36" name="F3 fathah"/>
-          <p:cNvSpPr txBox="1"/>
-          <p:nvPr/>
-        </p:nvSpPr>
-        <p:spPr>
-          <a:xfrm>
-            <a:off x="3930457" y="1920240"/>
-            <a:ext cx="1280160" cy="1280160"/>
-          </a:xfrm>
-          <a:prstGeom prst="rect">
-            <a:avLst/>
-          </a:prstGeom>
-          <a:noFill/>
-          <a:ln/>
-        </p:spPr>
-        <p:txBody>
-          <a:bodyPr wrap="square" lIns="0" tIns="0" rIns="0" bIns="0" rtlCol="0" anchor="ctr"/>
-          <a:lstStyle/>
-          <a:p>
-            <a:pPr rtl="1" algn="ctr" indent="0" marL="0">
-              <a:buNone/>
-            </a:pPr>
-            <a:r>
-              <a:rPr lang="ar-SA" altLang="en-US" sz="5400" dirty="0">
-                <a:solidFill>
-                  <a:srgbClr val="16213E"/>
-                </a:solidFill>
-                <a:latin typeface="Arial" pitchFamily="34" charset="0"/>
-                <a:ea typeface="Arial" pitchFamily="34" charset="-122"/>
-                <a:cs typeface="Arial" pitchFamily="34" charset="-120"/>
-              </a:rPr>
-              <a:t>هَ</a:t>
-            </a:r>
-            <a:endParaRPr lang="ar-SA" sz="5400" dirty="0"/>
-          </a:p>
-        </p:txBody>
-      </p:sp>
-      <p:sp>
-        <p:nvSpPr>
-          <p:cNvPr id="37" name="M3 alif"/>
-          <p:cNvSpPr txBox="1"/>
-          <p:nvPr/>
-        </p:nvSpPr>
-        <p:spPr>
-          <a:xfrm>
-            <a:off x="3318175" y="1920240"/>
-            <a:ext cx="1280160" cy="1280160"/>
-          </a:xfrm>
-          <a:prstGeom prst="rect">
-            <a:avLst/>
-          </a:prstGeom>
-          <a:noFill/>
-          <a:ln/>
-        </p:spPr>
-        <p:txBody>
-          <a:bodyPr wrap="square" lIns="0" tIns="0" rIns="0" bIns="0" rtlCol="0" anchor="ctr"/>
-          <a:lstStyle/>
-          <a:p>
-            <a:pPr rtl="1" algn="ctr" indent="0" marL="0">
-              <a:buNone/>
-            </a:pPr>
-            <a:r>
-              <a:rPr lang="ar-SA" altLang="en-US" sz="5400" dirty="0">
-                <a:solidFill>
-                  <a:srgbClr val="16213E"/>
-                </a:solidFill>
-                <a:latin typeface="Arial" pitchFamily="34" charset="0"/>
-                <a:ea typeface="Arial" pitchFamily="34" charset="-122"/>
-                <a:cs typeface="Arial" pitchFamily="34" charset="-120"/>
-              </a:rPr>
-              <a:t>ا</a:t>
-            </a:r>
-            <a:endParaRPr lang="ar-SA" sz="5400" dirty="0"/>
-          </a:p>
-        </p:txBody>
-      </p:sp>
-      <p:sp>
-        <p:nvSpPr>
-          <p:cNvPr id="38" name="R result"/>
-          <p:cNvSpPr txBox="1"/>
-          <p:nvPr/>
-        </p:nvSpPr>
-        <p:spPr>
-          <a:xfrm>
-            <a:off x="594360" y="1645920"/>
-            <a:ext cx="2331720" cy="1828800"/>
-          </a:xfrm>
-          <a:prstGeom prst="rect">
-            <a:avLst/>
-          </a:prstGeom>
-          <a:noFill/>
-          <a:ln/>
-        </p:spPr>
-        <p:txBody>
-          <a:bodyPr wrap="square" lIns="0" tIns="0" rIns="0" bIns="0" rtlCol="0" anchor="ctr"/>
-          <a:lstStyle/>
-          <a:p>
-            <a:pPr rtl="1" algn="ctr" indent="0" marL="0">
-              <a:buNone/>
-            </a:pPr>
-            <a:r>
-              <a:rPr lang="ar-SA" altLang="en-US" sz="6600" dirty="0">
-                <a:solidFill>
-                  <a:srgbClr val="16213E"/>
-                </a:solidFill>
-                <a:latin typeface="Arial" pitchFamily="34" charset="0"/>
-                <a:ea typeface="Arial" pitchFamily="34" charset="-122"/>
-                <a:cs typeface="Arial" pitchFamily="34" charset="-120"/>
-              </a:rPr>
-              <a:t>خَبَهَا</a:t>
-            </a:r>
-            <a:endParaRPr lang="ar-SA" sz="6600" dirty="0"/>
-          </a:p>
-        </p:txBody>
-      </p:sp>
-    </p:spTree>
-  </p:cSld>
-  <p:clrMapOvr>
-    <a:masterClrMapping/>
-  </p:clrMapOvr>
-  <p:timing>
-    <p:tnLst>
-      <p:par>
-        <p:cTn id="1" dur="indefinite" restart="never" nodeType="tmRoot">
-          <p:childTnLst>
-            <p:seq concurrent="1" nextAc="seek">
-              <p:cTn id="2" dur="indefinite" nodeType="mainSeq">
-                <p:childTnLst>
-                  <p:par>
-                    <p:cTn id="3" fill="hold">
-                      <p:stCondLst>
-                        <p:cond delay="indefinite"/>
-                      </p:stCondLst>
-                      <p:childTnLst>
-                        <p:par>
-                          <p:cTn id="4" fill="hold">
-                            <p:stCondLst>
-                              <p:cond delay="0"/>
-                            </p:stCondLst>
-                            <p:childTnLst>
-                              <p:par>
-                                <p:cTn id="5" presetID="10" presetClass="entr" presetSubtype="0" fill="hold" grpId="0" nodeType="clickEffect">
-                                  <p:stCondLst>
-                                    <p:cond delay="0"/>
-                                  </p:stCondLst>
-                                  <p:childTnLst>
-                                    <p:set>
-                                      <p:cBhvr>
-                                        <p:cTn id="6" dur="1" fill="hold">
-                                          <p:stCondLst>
-                                            <p:cond delay="0"/>
-                                          </p:stCondLst>
-                                        </p:cTn>
-                                        <p:tgtEl>
-                                          <p:spTgt spid="31"/>
-                                        </p:tgtEl>
-                                        <p:attrNameLst>
-                                          <p:attrName>style.visibility</p:attrName>
-                                        </p:attrNameLst>
-                                      </p:cBhvr>
-                                      <p:to>
-                                        <p:strVal val="visible"/>
-                                      </p:to>
-                                    </p:set>
-                                    <p:animEffect transition="in" filter="fade">
-                                      <p:cBhvr>
-                                        <p:cTn id="7" dur="300"/>
-                                        <p:tgtEl>
-                                          <p:spTgt spid="31"/>
-                                        </p:tgtEl>
-                                      </p:cBhvr>
-                                    </p:animEffect>
-                                  </p:childTnLst>
-                                </p:cTn>
-                              </p:par>
-                            </p:childTnLst>
-                          </p:cTn>
-                        </p:par>
-                      </p:childTnLst>
-                    </p:cTn>
-                  </p:par>
-                  <p:par>
-                    <p:cTn id="8" fill="hold">
-                      <p:stCondLst>
-                        <p:cond delay="indefinite"/>
-                      </p:stCondLst>
-                      <p:childTnLst>
-                        <p:par>
-                          <p:cTn id="9" fill="hold">
-                            <p:stCondLst>
-                              <p:cond delay="0"/>
-                            </p:stCondLst>
-                            <p:childTnLst>
-                              <p:par>
-                                <p:cTn id="10" presetID="10" presetClass="entr" presetSubtype="0" fill="hold" grpId="0" nodeType="clickEffect">
-                                  <p:stCondLst>
-                                    <p:cond delay="0"/>
-                                  </p:stCondLst>
-                                  <p:childTnLst>
-                                    <p:set>
-                                      <p:cBhvr>
-                                        <p:cTn id="11" dur="1" fill="hold">
-                                          <p:stCondLst>
-                                            <p:cond delay="0"/>
-                                          </p:stCondLst>
-                                        </p:cTn>
-                                        <p:tgtEl>
-                                          <p:spTgt spid="32"/>
-                                        </p:tgtEl>
-                                        <p:attrNameLst>
-                                          <p:attrName>style.visibility</p:attrName>
-                                        </p:attrNameLst>
-                                      </p:cBhvr>
-                                      <p:to>
-                                        <p:strVal val="visible"/>
-                                      </p:to>
-                                    </p:set>
-                                    <p:animEffect transition="in" filter="fade">
-                                      <p:cBhvr>
-                                        <p:cTn id="12" dur="300"/>
-                                        <p:tgtEl>
-                                          <p:spTgt spid="32"/>
-                                        </p:tgtEl>
-                                      </p:cBhvr>
-                                    </p:animEffect>
-                                  </p:childTnLst>
-                                </p:cTn>
-                              </p:par>
-                            </p:childTnLst>
-                          </p:cTn>
-                        </p:par>
-                      </p:childTnLst>
-                    </p:cTn>
-                  </p:par>
-                  <p:par>
-                    <p:cTn id="13" fill="hold">
-                      <p:stCondLst>
-                        <p:cond delay="indefinite"/>
-                      </p:stCondLst>
-                      <p:childTnLst>
-                        <p:par>
-                          <p:cTn id="14" fill="hold">
-                            <p:stCondLst>
-                              <p:cond delay="0"/>
-                            </p:stCondLst>
-                            <p:childTnLst>
-                              <p:par>
-                                <p:cTn id="15" presetID="10" presetClass="entr" presetSubtype="0" fill="hold" grpId="0" nodeType="clickEffect">
-                                  <p:stCondLst>
-                                    <p:cond delay="0"/>
-                                  </p:stCondLst>
-                                  <p:childTnLst>
-                                    <p:set>
-                                      <p:cBhvr>
-                                        <p:cTn id="16" dur="1" fill="hold">
-                                          <p:stCondLst>
-                                            <p:cond delay="0"/>
-                                          </p:stCondLst>
-                                        </p:cTn>
-                                        <p:tgtEl>
-                                          <p:spTgt spid="28"/>
-                                        </p:tgtEl>
-                                        <p:attrNameLst>
-                                          <p:attrName>style.visibility</p:attrName>
-                                        </p:attrNameLst>
-                                      </p:cBhvr>
-                                      <p:to>
-                                        <p:strVal val="visible"/>
-                                      </p:to>
-                                    </p:set>
-                                    <p:animEffect transition="in" filter="fade">
-                                      <p:cBhvr>
-                                        <p:cTn id="17" dur="300"/>
-                                        <p:tgtEl>
-                                          <p:spTgt spid="28"/>
-                                        </p:tgtEl>
-                                      </p:cBhvr>
-                                    </p:animEffect>
-                                  </p:childTnLst>
-                                </p:cTn>
-                              </p:par>
-                            </p:childTnLst>
-                          </p:cTn>
-                        </p:par>
-                      </p:childTnLst>
-                    </p:cTn>
-                  </p:par>
-                  <p:par>
-                    <p:cTn id="18" fill="hold">
-                      <p:stCondLst>
-                        <p:cond delay="indefinite"/>
-                      </p:stCondLst>
-                      <p:childTnLst>
-                        <p:par>
-                          <p:cTn id="19" fill="hold">
-                            <p:stCondLst>
-                              <p:cond delay="0"/>
-                            </p:stCondLst>
-                            <p:childTnLst>
-                              <p:par>
-                                <p:cTn id="20" presetID="10" presetClass="entr" presetSubtype="0" fill="hold" grpId="0" nodeType="clickEffect">
-                                  <p:stCondLst>
-                                    <p:cond delay="0"/>
-                                  </p:stCondLst>
-                                  <p:childTnLst>
-                                    <p:set>
-                                      <p:cBhvr>
-                                        <p:cTn id="21" dur="1" fill="hold">
-                                          <p:stCondLst>
-                                            <p:cond delay="0"/>
-                                          </p:stCondLst>
-                                        </p:cTn>
-                                        <p:tgtEl>
-                                          <p:spTgt spid="33"/>
-                                        </p:tgtEl>
-                                        <p:attrNameLst>
-                                          <p:attrName>style.visibility</p:attrName>
-                                        </p:attrNameLst>
-                                      </p:cBhvr>
-                                      <p:to>
-                                        <p:strVal val="visible"/>
-                                      </p:to>
-                                    </p:set>
-                                    <p:animEffect transition="in" filter="fade">
-                                      <p:cBhvr>
-                                        <p:cTn id="22" dur="300"/>
-                                        <p:tgtEl>
-                                          <p:spTgt spid="33"/>
-                                        </p:tgtEl>
-                                      </p:cBhvr>
-                                    </p:animEffect>
-                                  </p:childTnLst>
-                                </p:cTn>
-                              </p:par>
-                            </p:childTnLst>
-                          </p:cTn>
-                        </p:par>
-                      </p:childTnLst>
-                    </p:cTn>
-                  </p:par>
-                  <p:par>
-                    <p:cTn id="23" fill="hold">
-                      <p:stCondLst>
-                        <p:cond delay="indefinite"/>
-                      </p:stCondLst>
-                      <p:childTnLst>
-                        <p:par>
-                          <p:cTn id="24" fill="hold">
-                            <p:stCondLst>
-                              <p:cond delay="0"/>
-                            </p:stCondLst>
-                            <p:childTnLst>
-                              <p:par>
-                                <p:cTn id="25" presetID="10" presetClass="entr" presetSubtype="0" fill="hold" grpId="0" nodeType="clickEffect">
-                                  <p:stCondLst>
-                                    <p:cond delay="0"/>
-                                  </p:stCondLst>
-                                  <p:childTnLst>
-                                    <p:set>
-                                      <p:cBhvr>
-                                        <p:cTn id="26" dur="1" fill="hold">
-                                          <p:stCondLst>
-                                            <p:cond delay="0"/>
-                                          </p:stCondLst>
-                                        </p:cTn>
-                                        <p:tgtEl>
-                                          <p:spTgt spid="34"/>
-                                        </p:tgtEl>
-                                        <p:attrNameLst>
-                                          <p:attrName>style.visibility</p:attrName>
-                                        </p:attrNameLst>
-                                      </p:cBhvr>
-                                      <p:to>
-                                        <p:strVal val="visible"/>
-                                      </p:to>
-                                    </p:set>
-                                    <p:animEffect transition="in" filter="fade">
-                                      <p:cBhvr>
-                                        <p:cTn id="27" dur="300"/>
-                                        <p:tgtEl>
-                                          <p:spTgt spid="34"/>
-                                        </p:tgtEl>
-                                      </p:cBhvr>
-                                    </p:animEffect>
-                                  </p:childTnLst>
-                                </p:cTn>
-                              </p:par>
-                            </p:childTnLst>
-                          </p:cTn>
-                        </p:par>
-                      </p:childTnLst>
-                    </p:cTn>
-                  </p:par>
-                  <p:par>
-                    <p:cTn id="28" fill="hold">
-                      <p:stCondLst>
-                        <p:cond delay="indefinite"/>
-                      </p:stCondLst>
-                      <p:childTnLst>
-                        <p:par>
-                          <p:cTn id="29" fill="hold">
-                            <p:stCondLst>
-                              <p:cond delay="0"/>
-                            </p:stCondLst>
-                            <p:childTnLst>
-                              <p:par>
-                                <p:cTn id="30" presetID="10" presetClass="entr" presetSubtype="0" fill="hold" grpId="0" nodeType="clickEffect">
-                                  <p:stCondLst>
-                                    <p:cond delay="0"/>
-                                  </p:stCondLst>
-                                  <p:childTnLst>
-                                    <p:set>
-                                      <p:cBhvr>
-                                        <p:cTn id="31" dur="1" fill="hold">
-                                          <p:stCondLst>
-                                            <p:cond delay="0"/>
-                                          </p:stCondLst>
-                                        </p:cTn>
-                                        <p:tgtEl>
-                                          <p:spTgt spid="29"/>
-                                        </p:tgtEl>
-                                        <p:attrNameLst>
-                                          <p:attrName>style.visibility</p:attrName>
-                                        </p:attrNameLst>
-                                      </p:cBhvr>
-                                      <p:to>
-                                        <p:strVal val="visible"/>
-                                      </p:to>
-                                    </p:set>
-                                    <p:animEffect transition="in" filter="fade">
-                                      <p:cBhvr>
-                                        <p:cTn id="32" dur="300"/>
-                                        <p:tgtEl>
-                                          <p:spTgt spid="29"/>
-                                        </p:tgtEl>
-                                      </p:cBhvr>
-                                    </p:animEffect>
-                                  </p:childTnLst>
-                                </p:cTn>
-                              </p:par>
-                            </p:childTnLst>
-                          </p:cTn>
-                        </p:par>
-                      </p:childTnLst>
-                    </p:cTn>
-                  </p:par>
-                  <p:par>
-                    <p:cTn id="33" fill="hold">
-                      <p:stCondLst>
-                        <p:cond delay="indefinite"/>
-                      </p:stCondLst>
-                      <p:childTnLst>
-                        <p:par>
-                          <p:cTn id="34" fill="hold">
-                            <p:stCondLst>
-                              <p:cond delay="0"/>
-                            </p:stCondLst>
-                            <p:childTnLst>
-                              <p:par>
-                                <p:cTn id="35" presetID="10" presetClass="entr" presetSubtype="0" fill="hold" grpId="0" nodeType="clickEffect">
-                                  <p:stCondLst>
-                                    <p:cond delay="0"/>
-                                  </p:stCondLst>
-                                  <p:childTnLst>
-                                    <p:set>
-                                      <p:cBhvr>
-                                        <p:cTn id="36" dur="1" fill="hold">
-                                          <p:stCondLst>
-                                            <p:cond delay="0"/>
-                                          </p:stCondLst>
-                                        </p:cTn>
-                                        <p:tgtEl>
-                                          <p:spTgt spid="35"/>
-                                        </p:tgtEl>
-                                        <p:attrNameLst>
-                                          <p:attrName>style.visibility</p:attrName>
-                                        </p:attrNameLst>
-                                      </p:cBhvr>
-                                      <p:to>
-                                        <p:strVal val="visible"/>
-                                      </p:to>
-                                    </p:set>
-                                    <p:animEffect transition="in" filter="fade">
-                                      <p:cBhvr>
-                                        <p:cTn id="37" dur="300"/>
-                                        <p:tgtEl>
-                                          <p:spTgt spid="35"/>
-                                        </p:tgtEl>
-                                      </p:cBhvr>
-                                    </p:animEffect>
-                                  </p:childTnLst>
-                                </p:cTn>
-                              </p:par>
-                            </p:childTnLst>
-                          </p:cTn>
-                        </p:par>
-                      </p:childTnLst>
-                    </p:cTn>
-                  </p:par>
-                  <p:par>
-                    <p:cTn id="38" fill="hold">
-                      <p:stCondLst>
-                        <p:cond delay="indefinite"/>
-                      </p:stCondLst>
-                      <p:childTnLst>
-                        <p:par>
-                          <p:cTn id="39" fill="hold">
-                            <p:stCondLst>
-                              <p:cond delay="0"/>
-                            </p:stCondLst>
-                            <p:childTnLst>
-                              <p:par>
-                                <p:cTn id="40" presetID="10" presetClass="entr" presetSubtype="0" fill="hold" grpId="0" nodeType="clickEffect">
-                                  <p:stCondLst>
-                                    <p:cond delay="0"/>
-                                  </p:stCondLst>
-                                  <p:childTnLst>
-                                    <p:set>
-                                      <p:cBhvr>
-                                        <p:cTn id="41" dur="1" fill="hold">
-                                          <p:stCondLst>
-                                            <p:cond delay="0"/>
-                                          </p:stCondLst>
-                                        </p:cTn>
-                                        <p:tgtEl>
-                                          <p:spTgt spid="36"/>
-                                        </p:tgtEl>
-                                        <p:attrNameLst>
-                                          <p:attrName>style.visibility</p:attrName>
-                                        </p:attrNameLst>
-                                      </p:cBhvr>
-                                      <p:to>
-                                        <p:strVal val="visible"/>
-                                      </p:to>
-                                    </p:set>
-                                    <p:animEffect transition="in" filter="fade">
-                                      <p:cBhvr>
-                                        <p:cTn id="42" dur="300"/>
-                                        <p:tgtEl>
-                                          <p:spTgt spid="36"/>
-                                        </p:tgtEl>
-                                      </p:cBhvr>
-                                    </p:animEffect>
-                                  </p:childTnLst>
-                                </p:cTn>
-                              </p:par>
-                            </p:childTnLst>
-                          </p:cTn>
-                        </p:par>
-                      </p:childTnLst>
-                    </p:cTn>
-                  </p:par>
-                  <p:par>
-                    <p:cTn id="43" fill="hold">
-                      <p:stCondLst>
-                        <p:cond delay="indefinite"/>
-                      </p:stCondLst>
-                      <p:childTnLst>
-                        <p:par>
-                          <p:cTn id="44" fill="hold">
-                            <p:stCondLst>
-                              <p:cond delay="0"/>
-                            </p:stCondLst>
-                            <p:childTnLst>
-                              <p:par>
-                                <p:cTn id="45" presetID="10" presetClass="entr" presetSubtype="0" fill="hold" grpId="0" nodeType="clickEffect">
-                                  <p:stCondLst>
-                                    <p:cond delay="0"/>
-                                  </p:stCondLst>
-                                  <p:childTnLst>
-                                    <p:set>
-                                      <p:cBhvr>
-                                        <p:cTn id="46" dur="1" fill="hold">
-                                          <p:stCondLst>
-                                            <p:cond delay="0"/>
-                                          </p:stCondLst>
-                                        </p:cTn>
-                                        <p:tgtEl>
-                                          <p:spTgt spid="37"/>
-                                        </p:tgtEl>
-                                        <p:attrNameLst>
-                                          <p:attrName>style.visibility</p:attrName>
-                                        </p:attrNameLst>
-                                      </p:cBhvr>
-                                      <p:to>
-                                        <p:strVal val="visible"/>
-                                      </p:to>
-                                    </p:set>
-                                    <p:animEffect transition="in" filter="fade">
-                                      <p:cBhvr>
-                                        <p:cTn id="47" dur="300"/>
-                                        <p:tgtEl>
-                                          <p:spTgt spid="37"/>
-                                        </p:tgtEl>
-                                      </p:cBhvr>
-                                    </p:animEffect>
-                                  </p:childTnLst>
-                                </p:cTn>
-                              </p:par>
-                            </p:childTnLst>
-                          </p:cTn>
-                        </p:par>
-                      </p:childTnLst>
-                    </p:cTn>
-                  </p:par>
-                  <p:par>
-                    <p:cTn id="48" fill="hold">
-                      <p:stCondLst>
-                        <p:cond delay="indefinite"/>
-                      </p:stCondLst>
-                      <p:childTnLst>
-                        <p:par>
-                          <p:cTn id="49" fill="hold">
-                            <p:stCondLst>
-                              <p:cond delay="0"/>
-                            </p:stCondLst>
-                            <p:childTnLst>
-                              <p:par>
-                                <p:cTn id="50" presetID="10" presetClass="entr" presetSubtype="0" fill="hold" grpId="0" nodeType="clickEffect">
-                                  <p:stCondLst>
-                                    <p:cond delay="0"/>
-                                  </p:stCondLst>
-                                  <p:childTnLst>
-                                    <p:set>
-                                      <p:cBhvr>
-                                        <p:cTn id="51" dur="1" fill="hold">
-                                          <p:stCondLst>
-                                            <p:cond delay="0"/>
-                                          </p:stCondLst>
-                                        </p:cTn>
-                                        <p:tgtEl>
-                                          <p:spTgt spid="30"/>
-                                        </p:tgtEl>
-                                        <p:attrNameLst>
-                                          <p:attrName>style.visibility</p:attrName>
-                                        </p:attrNameLst>
-                                      </p:cBhvr>
-                                      <p:to>
-                                        <p:strVal val="visible"/>
-                                      </p:to>
-                                    </p:set>
-                                    <p:animEffect transition="in" filter="fade">
-                                      <p:cBhvr>
-                                        <p:cTn id="52" dur="300"/>
-                                        <p:tgtEl>
-                                          <p:spTgt spid="30"/>
-                                        </p:tgtEl>
-                                      </p:cBhvr>
-                                    </p:animEffect>
-                                  </p:childTnLst>
-                                </p:cTn>
-                              </p:par>
-                            </p:childTnLst>
-                          </p:cTn>
-                        </p:par>
-                      </p:childTnLst>
-                    </p:cTn>
-                  </p:par>
-                  <p:par>
-                    <p:cTn id="53" fill="hold">
-                      <p:stCondLst>
-                        <p:cond delay="indefinite"/>
-                      </p:stCondLst>
-                      <p:childTnLst>
-                        <p:par>
-                          <p:cTn id="54" fill="hold">
-                            <p:stCondLst>
-                              <p:cond delay="0"/>
-                            </p:stCondLst>
-                            <p:childTnLst>
-                              <p:par>
-                                <p:cTn id="55" presetID="10" presetClass="entr" presetSubtype="0" fill="hold" grpId="0" nodeType="clickEffect">
-                                  <p:stCondLst>
-                                    <p:cond delay="0"/>
-                                  </p:stCondLst>
-                                  <p:childTnLst>
-                                    <p:set>
-                                      <p:cBhvr>
-                                        <p:cTn id="56" dur="1" fill="hold">
-                                          <p:stCondLst>
-                                            <p:cond delay="0"/>
-                                          </p:stCondLst>
-                                        </p:cTn>
-                                        <p:tgtEl>
-                                          <p:spTgt spid="38"/>
-                                        </p:tgtEl>
-                                        <p:attrNameLst>
-                                          <p:attrName>style.visibility</p:attrName>
-                                        </p:attrNameLst>
-                                      </p:cBhvr>
-                                      <p:to>
-                                        <p:strVal val="visible"/>
-                                      </p:to>
-                                    </p:set>
-                                    <p:animEffect transition="in" filter="fade">
-                                      <p:cBhvr>
-                                        <p:cTn id="57" dur="300"/>
-                                        <p:tgtEl>
-                                          <p:spTgt spid="38"/>
-                                        </p:tgtEl>
-                                      </p:cBhvr>
-                                    </p:animEffect>
-                                  </p:childTnLst>
-                                </p:cTn>
-                              </p:par>
-                            </p:childTnLst>
-                          </p:cTn>
-                        </p:par>
-                      </p:childTnLst>
-                    </p:cTn>
-                  </p:par>
-                </p:childTnLst>
-              </p:cTn>
-              <p:prevCondLst>
-                <p:cond evt="onPrev" delay="0">
-                  <p:tgtEl>
-                    <p:sldTgt/>
-                  </p:tgtEl>
-                </p:cond>
-              </p:prevCondLst>
-              <p:nextCondLst>
-                <p:cond evt="onNext" delay="0">
-                  <p:tgtEl>
-                    <p:sldTgt/>
-                  </p:tgtEl>
-                </p:cond>
-              </p:nextCondLst>
-            </p:seq>
-          </p:childTnLst>
-        </p:cTn>
-      </p:par>
-    </p:tnLst>
-    <p:bldLst>
-      <p:bldP spid="31" grpId="0"/>
-      <p:bldP spid="32" grpId="0"/>
-      <p:bldP spid="28" grpId="0" animBg="1"/>
-      <p:bldP spid="33" grpId="0"/>
-      <p:bldP spid="34" grpId="0"/>
-      <p:bldP spid="29" grpId="0" animBg="1"/>
-      <p:bldP spid="35" grpId="0"/>
-      <p:bldP spid="36" grpId="0"/>
-      <p:bldP spid="37" grpId="0"/>
-      <p:bldP spid="30" grpId="0" animBg="1"/>
-      <p:bldP spid="38" grpId="0"/>
-    </p:bldLst>
-  </p:timing>
-</p:sld>
-</file>
-
-<file path=ppt/slides/slide15.xml><?xml version="1.0" encoding="utf-8"?>
-<p:sld xmlns:a="http://schemas.openxmlformats.org/drawingml/2006/main" xmlns:r="http://schemas.openxmlformats.org/officeDocument/2006/relationships" xmlns:p="http://schemas.openxmlformats.org/presentationml/2006/main">
-  <p:cSld name="Slide 15">
-    <p:bg>
-      <p:bgPr>
-        <a:solidFill>
-          <a:srgbClr val="1B2A5C"/>
-        </a:solidFill>
-      </p:bgPr>
-    </p:bg>
-    <p:spTree>
-      <p:nvGrpSpPr>
-        <p:cNvPr id="1" name=""/>
-        <p:cNvGrpSpPr/>
-        <p:nvPr/>
-      </p:nvGrpSpPr>
-      <p:grpSpPr>
-        <a:xfrm>
-          <a:off x="0" y="0"/>
-          <a:ext cx="0" cy="0"/>
-          <a:chOff x="0" y="0"/>
-          <a:chExt cx="0" cy="0"/>
-        </a:xfrm>
-      </p:grpSpPr>
-      <p:sp>
-        <p:nvSpPr>
-          <p:cNvPr id="2" name="Deco ground left"/>
-          <p:cNvSpPr/>
-          <p:nvPr/>
-        </p:nvSpPr>
-        <p:spPr>
-          <a:xfrm>
-            <a:off x="-1097280" y="4663440"/>
-            <a:ext cx="4754880" cy="1371600"/>
-          </a:xfrm>
-          <a:prstGeom prst="ellipse">
-            <a:avLst/>
-          </a:prstGeom>
-          <a:solidFill>
-            <a:srgbClr val="5B4B9A"/>
-          </a:solidFill>
-          <a:ln w="12700">
-            <a:solidFill>
-              <a:srgbClr val="5B4B9A"/>
-            </a:solidFill>
-            <a:prstDash val="solid"/>
-          </a:ln>
-        </p:spPr>
-      </p:sp>
-      <p:sp>
-        <p:nvSpPr>
-          <p:cNvPr id="3" name="Deco ground right"/>
-          <p:cNvSpPr/>
-          <p:nvPr/>
-        </p:nvSpPr>
-        <p:spPr>
-          <a:xfrm>
-            <a:off x="4206240" y="4754880"/>
-            <a:ext cx="5852160" cy="1371600"/>
-          </a:xfrm>
-          <a:prstGeom prst="ellipse">
-            <a:avLst/>
-          </a:prstGeom>
-          <a:solidFill>
-            <a:srgbClr val="7A63C4"/>
-          </a:solidFill>
-          <a:ln w="12700">
-            <a:solidFill>
-              <a:srgbClr val="7A63C4"/>
-            </a:solidFill>
-            <a:prstDash val="solid"/>
-          </a:ln>
-        </p:spPr>
-      </p:sp>
-      <p:sp>
-        <p:nvSpPr>
-          <p:cNvPr id="4" name="Deco star 1"/>
-          <p:cNvSpPr/>
-          <p:nvPr/>
-        </p:nvSpPr>
-        <p:spPr>
-          <a:xfrm>
-            <a:off x="457200" y="1143000"/>
-            <a:ext cx="182880" cy="182880"/>
-          </a:xfrm>
-          <a:prstGeom prst="star5">
-            <a:avLst/>
-          </a:prstGeom>
-          <a:solidFill>
-            <a:srgbClr val="FFD23F"/>
-          </a:solidFill>
-          <a:ln w="12700">
-            <a:solidFill>
-              <a:srgbClr val="FFD23F"/>
-            </a:solidFill>
-            <a:prstDash val="solid"/>
-          </a:ln>
-        </p:spPr>
-      </p:sp>
-      <p:sp>
-        <p:nvSpPr>
-          <p:cNvPr id="5" name="Deco star 2"/>
-          <p:cNvSpPr/>
-          <p:nvPr/>
-        </p:nvSpPr>
-        <p:spPr>
-          <a:xfrm>
-            <a:off x="1463040" y="777240"/>
-            <a:ext cx="228600" cy="228600"/>
-          </a:xfrm>
-          <a:prstGeom prst="star5">
-            <a:avLst/>
-          </a:prstGeom>
-          <a:solidFill>
-            <a:srgbClr val="FFFFFF"/>
-          </a:solidFill>
-          <a:ln w="12700">
-            <a:solidFill>
-              <a:srgbClr val="FFFFFF"/>
-            </a:solidFill>
-            <a:prstDash val="solid"/>
-          </a:ln>
-        </p:spPr>
-      </p:sp>
-      <p:sp>
-        <p:nvSpPr>
-          <p:cNvPr id="6" name="Deco star 3"/>
-          <p:cNvSpPr/>
-          <p:nvPr/>
-        </p:nvSpPr>
-        <p:spPr>
-          <a:xfrm>
-            <a:off x="2286000" y="274320"/>
-            <a:ext cx="274320" cy="274320"/>
-          </a:xfrm>
-          <a:prstGeom prst="star5">
-            <a:avLst/>
-          </a:prstGeom>
-          <a:solidFill>
-            <a:srgbClr val="FFD23F"/>
-          </a:solidFill>
-          <a:ln w="12700">
-            <a:solidFill>
-              <a:srgbClr val="FFD23F"/>
-            </a:solidFill>
-            <a:prstDash val="solid"/>
-          </a:ln>
-        </p:spPr>
-      </p:sp>
-      <p:sp>
-        <p:nvSpPr>
-          <p:cNvPr id="7" name="Deco star 4"/>
-          <p:cNvSpPr/>
-          <p:nvPr/>
-        </p:nvSpPr>
-        <p:spPr>
-          <a:xfrm>
-            <a:off x="3383280" y="640080"/>
-            <a:ext cx="182880" cy="182880"/>
-          </a:xfrm>
-          <a:prstGeom prst="star5">
-            <a:avLst/>
-          </a:prstGeom>
-          <a:solidFill>
-            <a:srgbClr val="FFFFFF"/>
-          </a:solidFill>
-          <a:ln w="12700">
-            <a:solidFill>
-              <a:srgbClr val="FFFFFF"/>
-            </a:solidFill>
-            <a:prstDash val="solid"/>
-          </a:ln>
-        </p:spPr>
-      </p:sp>
-      <p:sp>
-        <p:nvSpPr>
-          <p:cNvPr id="8" name="Deco star 5"/>
-          <p:cNvSpPr/>
-          <p:nvPr/>
-        </p:nvSpPr>
-        <p:spPr>
-          <a:xfrm>
-            <a:off x="4754880" y="228600"/>
-            <a:ext cx="228600" cy="228600"/>
-          </a:xfrm>
-          <a:prstGeom prst="star5">
-            <a:avLst/>
-          </a:prstGeom>
-          <a:solidFill>
-            <a:srgbClr val="FFD23F"/>
-          </a:solidFill>
-          <a:ln w="12700">
-            <a:solidFill>
-              <a:srgbClr val="FFD23F"/>
-            </a:solidFill>
-            <a:prstDash val="solid"/>
-          </a:ln>
-        </p:spPr>
-      </p:sp>
-      <p:sp>
-        <p:nvSpPr>
-          <p:cNvPr id="9" name="Deco star 6"/>
-          <p:cNvSpPr/>
-          <p:nvPr/>
-        </p:nvSpPr>
-        <p:spPr>
-          <a:xfrm>
-            <a:off x="5760720" y="731520"/>
-            <a:ext cx="201168" cy="201168"/>
-          </a:xfrm>
-          <a:prstGeom prst="star5">
-            <a:avLst/>
-          </a:prstGeom>
-          <a:solidFill>
-            <a:srgbClr val="FFFFFF"/>
-          </a:solidFill>
-          <a:ln w="12700">
-            <a:solidFill>
-              <a:srgbClr val="FFFFFF"/>
-            </a:solidFill>
-            <a:prstDash val="solid"/>
-          </a:ln>
-        </p:spPr>
-      </p:sp>
-      <p:sp>
-        <p:nvSpPr>
-          <p:cNvPr id="10" name="Deco star 7"/>
-          <p:cNvSpPr/>
-          <p:nvPr/>
-        </p:nvSpPr>
-        <p:spPr>
-          <a:xfrm>
-            <a:off x="6766560" y="320040"/>
-            <a:ext cx="256032" cy="256032"/>
-          </a:xfrm>
-          <a:prstGeom prst="star5">
-            <a:avLst/>
-          </a:prstGeom>
-          <a:solidFill>
-            <a:srgbClr val="FFD23F"/>
-          </a:solidFill>
-          <a:ln w="12700">
-            <a:solidFill>
-              <a:srgbClr val="FFD23F"/>
-            </a:solidFill>
-            <a:prstDash val="solid"/>
-          </a:ln>
-        </p:spPr>
-      </p:sp>
-      <p:sp>
-        <p:nvSpPr>
-          <p:cNvPr id="11" name="Deco star 8"/>
-          <p:cNvSpPr/>
-          <p:nvPr/>
-        </p:nvSpPr>
-        <p:spPr>
-          <a:xfrm>
-            <a:off x="8549640" y="1188720"/>
-            <a:ext cx="182880" cy="182880"/>
-          </a:xfrm>
-          <a:prstGeom prst="star5">
-            <a:avLst/>
-          </a:prstGeom>
-          <a:solidFill>
-            <a:srgbClr val="FFFFFF"/>
-          </a:solidFill>
-          <a:ln w="12700">
-            <a:solidFill>
-              <a:srgbClr val="FFFFFF"/>
-            </a:solidFill>
-            <a:prstDash val="solid"/>
-          </a:ln>
-        </p:spPr>
-      </p:sp>
-      <p:sp>
-        <p:nvSpPr>
-          <p:cNvPr id="12" name="Deco star 9"/>
-          <p:cNvSpPr/>
-          <p:nvPr/>
-        </p:nvSpPr>
-        <p:spPr>
-          <a:xfrm>
-            <a:off x="1737360" y="4206240"/>
-            <a:ext cx="201168" cy="201168"/>
-          </a:xfrm>
-          <a:prstGeom prst="star5">
-            <a:avLst/>
-          </a:prstGeom>
-          <a:solidFill>
-            <a:srgbClr val="FFD23F"/>
-          </a:solidFill>
-          <a:ln w="12700">
-            <a:solidFill>
-              <a:srgbClr val="FFD23F"/>
-            </a:solidFill>
-            <a:prstDash val="solid"/>
-          </a:ln>
-        </p:spPr>
-      </p:sp>
-      <p:sp>
-        <p:nvSpPr>
-          <p:cNvPr id="13" name="Deco star 10"/>
-          <p:cNvSpPr/>
-          <p:nvPr/>
-        </p:nvSpPr>
-        <p:spPr>
-          <a:xfrm>
-            <a:off x="2743200" y="4526280"/>
-            <a:ext cx="164592" cy="164592"/>
-          </a:xfrm>
-          <a:prstGeom prst="star5">
-            <a:avLst/>
-          </a:prstGeom>
-          <a:solidFill>
-            <a:srgbClr val="FFFFFF"/>
-          </a:solidFill>
-          <a:ln w="12700">
-            <a:solidFill>
-              <a:srgbClr val="FFFFFF"/>
-            </a:solidFill>
-            <a:prstDash val="solid"/>
-          </a:ln>
-        </p:spPr>
-      </p:sp>
-      <p:sp>
-        <p:nvSpPr>
-          <p:cNvPr id="14" name="Deco star 11"/>
-          <p:cNvSpPr/>
-          <p:nvPr/>
-        </p:nvSpPr>
-        <p:spPr>
-          <a:xfrm>
-            <a:off x="6400800" y="4480560"/>
-            <a:ext cx="182880" cy="182880"/>
-          </a:xfrm>
-          <a:prstGeom prst="star5">
-            <a:avLst/>
-          </a:prstGeom>
-          <a:solidFill>
-            <a:srgbClr val="FFD23F"/>
-          </a:solidFill>
-          <a:ln w="12700">
-            <a:solidFill>
-              <a:srgbClr val="FFD23F"/>
-            </a:solidFill>
-            <a:prstDash val="solid"/>
-          </a:ln>
-        </p:spPr>
-      </p:sp>
-      <p:sp>
-        <p:nvSpPr>
-          <p:cNvPr id="15" name="Deco star 12"/>
-          <p:cNvSpPr/>
-          <p:nvPr/>
-        </p:nvSpPr>
-        <p:spPr>
-          <a:xfrm>
-            <a:off x="7315200" y="4160520"/>
-            <a:ext cx="219456" cy="219456"/>
-          </a:xfrm>
-          <a:prstGeom prst="star5">
-            <a:avLst/>
-          </a:prstGeom>
-          <a:solidFill>
-            <a:srgbClr val="FFFFFF"/>
-          </a:solidFill>
-          <a:ln w="12700">
-            <a:solidFill>
-              <a:srgbClr val="FFFFFF"/>
-            </a:solidFill>
-            <a:prstDash val="solid"/>
-          </a:ln>
-        </p:spPr>
-      </p:sp>
-      <p:sp>
-        <p:nvSpPr>
-          <p:cNvPr id="16" name="Deco moon"/>
-          <p:cNvSpPr/>
-          <p:nvPr/>
-        </p:nvSpPr>
-        <p:spPr>
-          <a:xfrm>
-            <a:off x="320040" y="274320"/>
-            <a:ext cx="548640" cy="822960"/>
-          </a:xfrm>
-          <a:prstGeom prst="moon">
-            <a:avLst/>
-          </a:prstGeom>
-          <a:solidFill>
-            <a:srgbClr val="FFE48A"/>
-          </a:solidFill>
-          <a:ln w="12700">
-            <a:solidFill>
-              <a:srgbClr val="FFE48A"/>
-            </a:solidFill>
-            <a:prstDash val="solid"/>
-          </a:ln>
-        </p:spPr>
-      </p:sp>
-      <p:sp>
-        <p:nvSpPr>
-          <p:cNvPr id="17" name="Deco planet"/>
-          <p:cNvSpPr/>
-          <p:nvPr/>
-        </p:nvSpPr>
-        <p:spPr>
-          <a:xfrm>
-            <a:off x="7818120" y="274320"/>
-            <a:ext cx="777240" cy="777240"/>
-          </a:xfrm>
-          <a:prstGeom prst="ellipse">
-            <a:avLst/>
-          </a:prstGeom>
-          <a:solidFill>
-            <a:srgbClr val="FF8A5B"/>
-          </a:solidFill>
-          <a:ln w="12700">
-            <a:solidFill>
-              <a:srgbClr val="FF8A5B"/>
-            </a:solidFill>
-            <a:prstDash val="solid"/>
-          </a:ln>
-        </p:spPr>
-      </p:sp>
-      <p:sp>
-        <p:nvSpPr>
-          <p:cNvPr id="18" name="Deco planet ring"/>
-          <p:cNvSpPr/>
-          <p:nvPr/>
-        </p:nvSpPr>
-        <p:spPr>
-          <a:xfrm>
-            <a:off x="7543800" y="530352"/>
-            <a:ext cx="1325880" cy="274320"/>
-          </a:xfrm>
-          <a:prstGeom prst="ellipse">
-            <a:avLst/>
-          </a:prstGeom>
-          <a:solidFill>
-            <a:srgbClr val="FFD23F">
-              <a:alpha val="0"/>
-            </a:srgbClr>
-          </a:solidFill>
-          <a:ln w="38100">
-            <a:solidFill>
-              <a:srgbClr val="FFD23F"/>
-            </a:solidFill>
-            <a:prstDash val="solid"/>
-          </a:ln>
-        </p:spPr>
-      </p:sp>
-      <p:sp>
-        <p:nvSpPr>
-          <p:cNvPr id="19" name="Deco alien"/>
-          <p:cNvSpPr/>
-          <p:nvPr/>
-        </p:nvSpPr>
-        <p:spPr>
-          <a:xfrm>
-            <a:off x="365760" y="4069080"/>
-            <a:ext cx="731520" cy="731520"/>
-          </a:xfrm>
-          <a:prstGeom prst="smileyFace">
-            <a:avLst/>
-          </a:prstGeom>
-          <a:solidFill>
-            <a:srgbClr val="8ED98F"/>
-          </a:solidFill>
-          <a:ln w="12700">
-            <a:solidFill>
-              <a:srgbClr val="8ED98F"/>
-            </a:solidFill>
-            <a:prstDash val="solid"/>
-          </a:ln>
-        </p:spPr>
-      </p:sp>
-      <p:sp>
-        <p:nvSpPr>
-          <p:cNvPr id="20" name="Deco rocket nose"/>
-          <p:cNvSpPr/>
-          <p:nvPr/>
-        </p:nvSpPr>
-        <p:spPr>
-          <a:xfrm>
-            <a:off x="8229600" y="3611880"/>
-            <a:ext cx="411480" cy="320040"/>
-          </a:xfrm>
-          <a:prstGeom prst="triangle">
-            <a:avLst/>
-          </a:prstGeom>
-          <a:solidFill>
-            <a:srgbClr val="E8604C"/>
-          </a:solidFill>
-          <a:ln w="12700">
-            <a:solidFill>
-              <a:srgbClr val="E8604C"/>
-            </a:solidFill>
-            <a:prstDash val="solid"/>
-          </a:ln>
-        </p:spPr>
-      </p:sp>
-      <p:sp>
-        <p:nvSpPr>
-          <p:cNvPr id="21" name="Deco rocket body"/>
-          <p:cNvSpPr/>
-          <p:nvPr/>
-        </p:nvSpPr>
-        <p:spPr>
-          <a:xfrm>
-            <a:off x="8229600" y="3886200"/>
-            <a:ext cx="411480" cy="777240"/>
-          </a:xfrm>
-          <a:prstGeom prst="roundRect">
-            <a:avLst>
-              <a:gd name="adj" fmla="val 17778"/>
-            </a:avLst>
-          </a:prstGeom>
-          <a:solidFill>
-            <a:srgbClr val="FFFFFF"/>
-          </a:solidFill>
-          <a:ln w="12700">
-            <a:solidFill>
-              <a:srgbClr val="FFFFFF"/>
-            </a:solidFill>
-            <a:prstDash val="solid"/>
-          </a:ln>
-        </p:spPr>
-      </p:sp>
-      <p:sp>
-        <p:nvSpPr>
-          <p:cNvPr id="22" name="Deco rocket window"/>
-          <p:cNvSpPr/>
-          <p:nvPr/>
-        </p:nvSpPr>
-        <p:spPr>
-          <a:xfrm>
-            <a:off x="8321040" y="4069080"/>
-            <a:ext cx="228600" cy="228600"/>
-          </a:xfrm>
-          <a:prstGeom prst="ellipse">
-            <a:avLst/>
-          </a:prstGeom>
-          <a:solidFill>
-            <a:srgbClr val="3A8FD9"/>
-          </a:solidFill>
-          <a:ln w="12700">
-            <a:solidFill>
-              <a:srgbClr val="3A8FD9"/>
-            </a:solidFill>
-            <a:prstDash val="solid"/>
-          </a:ln>
-        </p:spPr>
-      </p:sp>
-      <p:sp>
-        <p:nvSpPr>
-          <p:cNvPr id="23" name="Deco rocket flame"/>
-          <p:cNvSpPr/>
-          <p:nvPr/>
-        </p:nvSpPr>
-        <p:spPr>
-          <a:xfrm rot="10800000">
-            <a:off x="8275320" y="4663440"/>
-            <a:ext cx="320040" cy="274320"/>
-          </a:xfrm>
-          <a:prstGeom prst="triangle">
-            <a:avLst/>
-          </a:prstGeom>
-          <a:solidFill>
-            <a:srgbClr val="FFB347"/>
-          </a:solidFill>
-          <a:ln w="12700">
-            <a:solidFill>
-              <a:srgbClr val="FFB347"/>
-            </a:solidFill>
-            <a:prstDash val="solid"/>
-          </a:ln>
-        </p:spPr>
-      </p:sp>
-      <p:sp>
-        <p:nvSpPr>
-          <p:cNvPr id="24" name="Circle 1"/>
-          <p:cNvSpPr/>
-          <p:nvPr/>
-        </p:nvSpPr>
-        <p:spPr>
-          <a:xfrm>
-            <a:off x="7269480" y="1920240"/>
-            <a:ext cx="1280160" cy="1280160"/>
-          </a:xfrm>
-          <a:prstGeom prst="ellipse">
-            <a:avLst/>
-          </a:prstGeom>
-          <a:solidFill>
-            <a:srgbClr val="FFFFFF"/>
-          </a:solidFill>
-          <a:ln w="101600">
-            <a:solidFill>
-              <a:srgbClr val="E8604C"/>
-            </a:solidFill>
-            <a:prstDash val="solid"/>
-          </a:ln>
-        </p:spPr>
-      </p:sp>
-      <p:sp>
-        <p:nvSpPr>
-          <p:cNvPr id="25" name="Circle 2"/>
-          <p:cNvSpPr/>
-          <p:nvPr/>
-        </p:nvSpPr>
-        <p:spPr>
-          <a:xfrm>
-            <a:off x="5486400" y="1920240"/>
-            <a:ext cx="1280160" cy="1280160"/>
-          </a:xfrm>
-          <a:prstGeom prst="ellipse">
-            <a:avLst/>
-          </a:prstGeom>
-          <a:solidFill>
-            <a:srgbClr val="FFFFFF"/>
-          </a:solidFill>
-          <a:ln w="101600">
-            <a:solidFill>
-              <a:srgbClr val="3A8FD9"/>
-            </a:solidFill>
-            <a:prstDash val="solid"/>
-          </a:ln>
-        </p:spPr>
-      </p:sp>
-      <p:sp>
-        <p:nvSpPr>
-          <p:cNvPr id="26" name="Circle 3"/>
-          <p:cNvSpPr/>
-          <p:nvPr/>
-        </p:nvSpPr>
-        <p:spPr>
-          <a:xfrm>
-            <a:off x="3703320" y="1920240"/>
-            <a:ext cx="1280160" cy="1280160"/>
-          </a:xfrm>
-          <a:prstGeom prst="ellipse">
-            <a:avLst/>
-          </a:prstGeom>
-          <a:solidFill>
-            <a:srgbClr val="FFFFFF"/>
-          </a:solidFill>
-          <a:ln w="101600">
-            <a:solidFill>
-              <a:srgbClr val="2FB57A"/>
-            </a:solidFill>
-            <a:prstDash val="solid"/>
-          </a:ln>
-        </p:spPr>
-      </p:sp>
-      <p:sp>
-        <p:nvSpPr>
-          <p:cNvPr id="27" name="Result panel"/>
-          <p:cNvSpPr/>
-          <p:nvPr/>
-        </p:nvSpPr>
-        <p:spPr>
-          <a:xfrm>
-            <a:off x="594360" y="1645920"/>
-            <a:ext cx="2331720" cy="1828800"/>
-          </a:xfrm>
-          <a:prstGeom prst="roundRect">
-            <a:avLst>
-              <a:gd name="adj" fmla="val 15000"/>
-            </a:avLst>
-          </a:prstGeom>
-          <a:solidFill>
-            <a:srgbClr val="FFFBE3"/>
-          </a:solidFill>
-          <a:ln w="76200">
-            <a:solidFill>
-              <a:srgbClr val="F2B134"/>
-            </a:solidFill>
-            <a:prstDash val="solid"/>
-          </a:ln>
-        </p:spPr>
-      </p:sp>
-      <p:sp>
-        <p:nvSpPr>
-          <p:cNvPr id="28" name="P1 plus"/>
-          <p:cNvSpPr/>
-          <p:nvPr/>
-        </p:nvSpPr>
-        <p:spPr>
-          <a:xfrm>
-            <a:off x="6844284" y="2386584"/>
-            <a:ext cx="347472" cy="347472"/>
-          </a:xfrm>
-          <a:prstGeom prst="mathPlus">
-            <a:avLst/>
-          </a:prstGeom>
-          <a:solidFill>
-            <a:srgbClr val="FFB347"/>
-          </a:solidFill>
-          <a:ln w="12700">
-            <a:solidFill>
-              <a:srgbClr val="FFB347"/>
-            </a:solidFill>
-            <a:prstDash val="solid"/>
-          </a:ln>
-        </p:spPr>
-      </p:sp>
-      <p:sp>
-        <p:nvSpPr>
-          <p:cNvPr id="29" name="P2 plus"/>
-          <p:cNvSpPr/>
-          <p:nvPr/>
-        </p:nvSpPr>
-        <p:spPr>
-          <a:xfrm>
-            <a:off x="5061204" y="2386584"/>
-            <a:ext cx="347472" cy="347472"/>
-          </a:xfrm>
-          <a:prstGeom prst="mathPlus">
-            <a:avLst/>
-          </a:prstGeom>
-          <a:solidFill>
-            <a:srgbClr val="FFB347"/>
-          </a:solidFill>
-          <a:ln w="12700">
-            <a:solidFill>
-              <a:srgbClr val="FFB347"/>
-            </a:solidFill>
-            <a:prstDash val="solid"/>
-          </a:ln>
-        </p:spPr>
-      </p:sp>
-      <p:sp>
-        <p:nvSpPr>
-          <p:cNvPr id="30" name="A arrow"/>
-          <p:cNvSpPr/>
-          <p:nvPr/>
-        </p:nvSpPr>
-        <p:spPr>
-          <a:xfrm>
-            <a:off x="3040380" y="2304288"/>
-            <a:ext cx="548640" cy="512064"/>
-          </a:xfrm>
-          <a:prstGeom prst="leftArrow">
-            <a:avLst/>
-          </a:prstGeom>
-          <a:solidFill>
-            <a:srgbClr val="FFD23F"/>
-          </a:solidFill>
-          <a:ln w="12700">
-            <a:solidFill>
-              <a:srgbClr val="FFD23F"/>
-            </a:solidFill>
-            <a:prstDash val="solid"/>
-          </a:ln>
-        </p:spPr>
-      </p:sp>
-      <p:sp>
-        <p:nvSpPr>
-          <p:cNvPr id="31" name="L1 letter"/>
-          <p:cNvSpPr txBox="1"/>
-          <p:nvPr/>
-        </p:nvSpPr>
-        <p:spPr>
-          <a:xfrm>
-            <a:off x="7269480" y="1920240"/>
-            <a:ext cx="1280160" cy="1280160"/>
-          </a:xfrm>
-          <a:prstGeom prst="rect">
-            <a:avLst/>
-          </a:prstGeom>
-          <a:noFill/>
-          <a:ln/>
-        </p:spPr>
-        <p:txBody>
-          <a:bodyPr wrap="square" lIns="0" tIns="0" rIns="0" bIns="0" rtlCol="0" anchor="ctr"/>
-          <a:lstStyle/>
-          <a:p>
-            <a:pPr rtl="1" algn="ctr" indent="0" marL="0">
-              <a:buNone/>
-            </a:pPr>
-            <a:r>
-              <a:rPr lang="ar-SA" altLang="en-US" sz="5400" dirty="0">
-                <a:solidFill>
-                  <a:srgbClr val="16213E"/>
-                </a:solidFill>
-                <a:latin typeface="Arial" pitchFamily="34" charset="0"/>
-                <a:ea typeface="Arial" pitchFamily="34" charset="-122"/>
-                <a:cs typeface="Arial" pitchFamily="34" charset="-120"/>
-              </a:rPr>
-              <a:t>ب</a:t>
-            </a:r>
-            <a:endParaRPr lang="ar-SA" sz="5400" dirty="0"/>
-          </a:p>
-        </p:txBody>
-      </p:sp>
-      <p:sp>
-        <p:nvSpPr>
-          <p:cNvPr id="32" name="F1 fathah"/>
-          <p:cNvSpPr txBox="1"/>
-          <p:nvPr/>
-        </p:nvSpPr>
-        <p:spPr>
-          <a:xfrm>
-            <a:off x="7269480" y="1920240"/>
-            <a:ext cx="1280160" cy="1280160"/>
-          </a:xfrm>
-          <a:prstGeom prst="rect">
-            <a:avLst/>
-          </a:prstGeom>
-          <a:noFill/>
-          <a:ln/>
-        </p:spPr>
-        <p:txBody>
-          <a:bodyPr wrap="square" lIns="0" tIns="0" rIns="0" bIns="0" rtlCol="0" anchor="ctr"/>
-          <a:lstStyle/>
-          <a:p>
-            <a:pPr rtl="1" algn="ctr" indent="0" marL="0">
-              <a:buNone/>
-            </a:pPr>
-            <a:r>
-              <a:rPr lang="ar-SA" altLang="en-US" sz="5400" dirty="0">
-                <a:solidFill>
-                  <a:srgbClr val="16213E"/>
-                </a:solidFill>
-                <a:latin typeface="Arial" pitchFamily="34" charset="0"/>
-                <a:ea typeface="Arial" pitchFamily="34" charset="-122"/>
-                <a:cs typeface="Arial" pitchFamily="34" charset="-120"/>
-              </a:rPr>
-              <a:t>بَ</a:t>
-            </a:r>
-            <a:endParaRPr lang="ar-SA" sz="5400" dirty="0"/>
-          </a:p>
-        </p:txBody>
-      </p:sp>
-      <p:sp>
-        <p:nvSpPr>
-          <p:cNvPr id="33" name="L2 letter"/>
-          <p:cNvSpPr txBox="1"/>
-          <p:nvPr/>
-        </p:nvSpPr>
-        <p:spPr>
-          <a:xfrm>
-            <a:off x="5486400" y="1920240"/>
-            <a:ext cx="1280160" cy="1280160"/>
-          </a:xfrm>
-          <a:prstGeom prst="rect">
-            <a:avLst/>
-          </a:prstGeom>
-          <a:noFill/>
-          <a:ln/>
-        </p:spPr>
-        <p:txBody>
-          <a:bodyPr wrap="square" lIns="0" tIns="0" rIns="0" bIns="0" rtlCol="0" anchor="ctr"/>
-          <a:lstStyle/>
-          <a:p>
-            <a:pPr rtl="1" algn="ctr" indent="0" marL="0">
-              <a:buNone/>
-            </a:pPr>
-            <a:r>
-              <a:rPr lang="ar-SA" altLang="en-US" sz="5400" dirty="0">
-                <a:solidFill>
-                  <a:srgbClr val="16213E"/>
-                </a:solidFill>
-                <a:latin typeface="Arial" pitchFamily="34" charset="0"/>
-                <a:ea typeface="Arial" pitchFamily="34" charset="-122"/>
-                <a:cs typeface="Arial" pitchFamily="34" charset="-120"/>
-              </a:rPr>
-              <a:t>أ</a:t>
-            </a:r>
-            <a:endParaRPr lang="ar-SA" sz="5400" dirty="0"/>
-          </a:p>
-        </p:txBody>
-      </p:sp>
-      <p:sp>
-        <p:nvSpPr>
-          <p:cNvPr id="34" name="F2 fathah"/>
-          <p:cNvSpPr txBox="1"/>
-          <p:nvPr/>
-        </p:nvSpPr>
-        <p:spPr>
-          <a:xfrm>
-            <a:off x="5486400" y="1920240"/>
-            <a:ext cx="1280160" cy="1280160"/>
-          </a:xfrm>
-          <a:prstGeom prst="rect">
-            <a:avLst/>
-          </a:prstGeom>
-          <a:noFill/>
-          <a:ln/>
-        </p:spPr>
-        <p:txBody>
-          <a:bodyPr wrap="square" lIns="0" tIns="0" rIns="0" bIns="0" rtlCol="0" anchor="ctr"/>
-          <a:lstStyle/>
-          <a:p>
-            <a:pPr rtl="1" algn="ctr" indent="0" marL="0">
-              <a:buNone/>
-            </a:pPr>
-            <a:r>
-              <a:rPr lang="ar-SA" altLang="en-US" sz="5400" dirty="0">
-                <a:solidFill>
-                  <a:srgbClr val="16213E"/>
-                </a:solidFill>
-                <a:latin typeface="Arial" pitchFamily="34" charset="0"/>
-                <a:ea typeface="Arial" pitchFamily="34" charset="-122"/>
-                <a:cs typeface="Arial" pitchFamily="34" charset="-120"/>
-              </a:rPr>
-              <a:t>أَ</a:t>
-            </a:r>
-            <a:endParaRPr lang="ar-SA" sz="5400" dirty="0"/>
-          </a:p>
-        </p:txBody>
-      </p:sp>
-      <p:sp>
-        <p:nvSpPr>
-          <p:cNvPr id="35" name="L3 letter"/>
-          <p:cNvSpPr txBox="1"/>
-          <p:nvPr/>
-        </p:nvSpPr>
-        <p:spPr>
-          <a:xfrm>
-            <a:off x="3930457" y="1920240"/>
-            <a:ext cx="1280160" cy="1280160"/>
-          </a:xfrm>
-          <a:prstGeom prst="rect">
-            <a:avLst/>
-          </a:prstGeom>
-          <a:noFill/>
-          <a:ln/>
-        </p:spPr>
-        <p:txBody>
-          <a:bodyPr wrap="square" lIns="0" tIns="0" rIns="0" bIns="0" rtlCol="0" anchor="ctr"/>
-          <a:lstStyle/>
-          <a:p>
-            <a:pPr rtl="1" algn="ctr" indent="0" marL="0">
-              <a:buNone/>
-            </a:pPr>
-            <a:r>
-              <a:rPr lang="ar-SA" altLang="en-US" sz="5400" dirty="0">
-                <a:solidFill>
-                  <a:srgbClr val="16213E"/>
-                </a:solidFill>
-                <a:latin typeface="Arial" pitchFamily="34" charset="0"/>
-                <a:ea typeface="Arial" pitchFamily="34" charset="-122"/>
-                <a:cs typeface="Arial" pitchFamily="34" charset="-120"/>
-              </a:rPr>
-              <a:t>ه</a:t>
-            </a:r>
-            <a:endParaRPr lang="ar-SA" sz="5400" dirty="0"/>
-          </a:p>
-        </p:txBody>
-      </p:sp>
-      <p:sp>
-        <p:nvSpPr>
-          <p:cNvPr id="36" name="F3 fathah"/>
-          <p:cNvSpPr txBox="1"/>
-          <p:nvPr/>
-        </p:nvSpPr>
-        <p:spPr>
-          <a:xfrm>
-            <a:off x="3930457" y="1920240"/>
-            <a:ext cx="1280160" cy="1280160"/>
-          </a:xfrm>
-          <a:prstGeom prst="rect">
-            <a:avLst/>
-          </a:prstGeom>
-          <a:noFill/>
-          <a:ln/>
-        </p:spPr>
-        <p:txBody>
-          <a:bodyPr wrap="square" lIns="0" tIns="0" rIns="0" bIns="0" rtlCol="0" anchor="ctr"/>
-          <a:lstStyle/>
-          <a:p>
-            <a:pPr rtl="1" algn="ctr" indent="0" marL="0">
-              <a:buNone/>
-            </a:pPr>
-            <a:r>
-              <a:rPr lang="ar-SA" altLang="en-US" sz="5400" dirty="0">
-                <a:solidFill>
-                  <a:srgbClr val="16213E"/>
-                </a:solidFill>
-                <a:latin typeface="Arial" pitchFamily="34" charset="0"/>
-                <a:ea typeface="Arial" pitchFamily="34" charset="-122"/>
-                <a:cs typeface="Arial" pitchFamily="34" charset="-120"/>
-              </a:rPr>
-              <a:t>هَ</a:t>
-            </a:r>
-            <a:endParaRPr lang="ar-SA" sz="5400" dirty="0"/>
-          </a:p>
-        </p:txBody>
-      </p:sp>
-      <p:sp>
-        <p:nvSpPr>
-          <p:cNvPr id="37" name="M3 alif"/>
-          <p:cNvSpPr txBox="1"/>
-          <p:nvPr/>
-        </p:nvSpPr>
-        <p:spPr>
-          <a:xfrm>
-            <a:off x="3318175" y="1920240"/>
-            <a:ext cx="1280160" cy="1280160"/>
-          </a:xfrm>
-          <a:prstGeom prst="rect">
-            <a:avLst/>
-          </a:prstGeom>
-          <a:noFill/>
-          <a:ln/>
-        </p:spPr>
-        <p:txBody>
-          <a:bodyPr wrap="square" lIns="0" tIns="0" rIns="0" bIns="0" rtlCol="0" anchor="ctr"/>
-          <a:lstStyle/>
-          <a:p>
-            <a:pPr rtl="1" algn="ctr" indent="0" marL="0">
-              <a:buNone/>
-            </a:pPr>
-            <a:r>
-              <a:rPr lang="ar-SA" altLang="en-US" sz="5400" dirty="0">
-                <a:solidFill>
-                  <a:srgbClr val="16213E"/>
-                </a:solidFill>
-                <a:latin typeface="Arial" pitchFamily="34" charset="0"/>
-                <a:ea typeface="Arial" pitchFamily="34" charset="-122"/>
-                <a:cs typeface="Arial" pitchFamily="34" charset="-120"/>
-              </a:rPr>
-              <a:t>ا</a:t>
-            </a:r>
-            <a:endParaRPr lang="ar-SA" sz="5400" dirty="0"/>
-          </a:p>
-        </p:txBody>
-      </p:sp>
-      <p:sp>
-        <p:nvSpPr>
-          <p:cNvPr id="38" name="R result"/>
-          <p:cNvSpPr txBox="1"/>
-          <p:nvPr/>
-        </p:nvSpPr>
-        <p:spPr>
-          <a:xfrm>
-            <a:off x="594360" y="1645920"/>
-            <a:ext cx="2331720" cy="1828800"/>
-          </a:xfrm>
-          <a:prstGeom prst="rect">
-            <a:avLst/>
-          </a:prstGeom>
-          <a:noFill/>
-          <a:ln/>
-        </p:spPr>
-        <p:txBody>
-          <a:bodyPr wrap="square" lIns="0" tIns="0" rIns="0" bIns="0" rtlCol="0" anchor="ctr"/>
-          <a:lstStyle/>
-          <a:p>
-            <a:pPr rtl="1" algn="ctr" indent="0" marL="0">
-              <a:buNone/>
-            </a:pPr>
-            <a:r>
-              <a:rPr lang="ar-SA" altLang="en-US" sz="6600" dirty="0">
-                <a:solidFill>
-                  <a:srgbClr val="16213E"/>
-                </a:solidFill>
-                <a:latin typeface="Arial" pitchFamily="34" charset="0"/>
-                <a:ea typeface="Arial" pitchFamily="34" charset="-122"/>
-                <a:cs typeface="Arial" pitchFamily="34" charset="-120"/>
-              </a:rPr>
-              <a:t>بَأَهَا</a:t>
-            </a:r>
-            <a:endParaRPr lang="ar-SA" sz="6600" dirty="0"/>
-          </a:p>
-        </p:txBody>
-      </p:sp>
-    </p:spTree>
-  </p:cSld>
-  <p:clrMapOvr>
-    <a:masterClrMapping/>
-  </p:clrMapOvr>
-  <p:timing>
-    <p:tnLst>
-      <p:par>
-        <p:cTn id="1" dur="indefinite" restart="never" nodeType="tmRoot">
-          <p:childTnLst>
-            <p:seq concurrent="1" nextAc="seek">
-              <p:cTn id="2" dur="indefinite" nodeType="mainSeq">
-                <p:childTnLst>
-                  <p:par>
-                    <p:cTn id="3" fill="hold">
-                      <p:stCondLst>
-                        <p:cond delay="indefinite"/>
-                      </p:stCondLst>
-                      <p:childTnLst>
-                        <p:par>
-                          <p:cTn id="4" fill="hold">
-                            <p:stCondLst>
-                              <p:cond delay="0"/>
-                            </p:stCondLst>
-                            <p:childTnLst>
-                              <p:par>
-                                <p:cTn id="5" presetID="10" presetClass="entr" presetSubtype="0" fill="hold" grpId="0" nodeType="clickEffect">
-                                  <p:stCondLst>
-                                    <p:cond delay="0"/>
-                                  </p:stCondLst>
-                                  <p:childTnLst>
-                                    <p:set>
-                                      <p:cBhvr>
-                                        <p:cTn id="6" dur="1" fill="hold">
-                                          <p:stCondLst>
-                                            <p:cond delay="0"/>
-                                          </p:stCondLst>
-                                        </p:cTn>
-                                        <p:tgtEl>
-                                          <p:spTgt spid="31"/>
-                                        </p:tgtEl>
-                                        <p:attrNameLst>
-                                          <p:attrName>style.visibility</p:attrName>
-                                        </p:attrNameLst>
-                                      </p:cBhvr>
-                                      <p:to>
-                                        <p:strVal val="visible"/>
-                                      </p:to>
-                                    </p:set>
-                                    <p:animEffect transition="in" filter="fade">
-                                      <p:cBhvr>
-                                        <p:cTn id="7" dur="300"/>
-                                        <p:tgtEl>
-                                          <p:spTgt spid="31"/>
-                                        </p:tgtEl>
-                                      </p:cBhvr>
-                                    </p:animEffect>
-                                  </p:childTnLst>
-                                </p:cTn>
-                              </p:par>
-                            </p:childTnLst>
-                          </p:cTn>
-                        </p:par>
-                      </p:childTnLst>
-                    </p:cTn>
-                  </p:par>
-                  <p:par>
-                    <p:cTn id="8" fill="hold">
-                      <p:stCondLst>
-                        <p:cond delay="indefinite"/>
-                      </p:stCondLst>
-                      <p:childTnLst>
-                        <p:par>
-                          <p:cTn id="9" fill="hold">
-                            <p:stCondLst>
-                              <p:cond delay="0"/>
-                            </p:stCondLst>
-                            <p:childTnLst>
-                              <p:par>
-                                <p:cTn id="10" presetID="10" presetClass="entr" presetSubtype="0" fill="hold" grpId="0" nodeType="clickEffect">
-                                  <p:stCondLst>
-                                    <p:cond delay="0"/>
-                                  </p:stCondLst>
-                                  <p:childTnLst>
-                                    <p:set>
-                                      <p:cBhvr>
-                                        <p:cTn id="11" dur="1" fill="hold">
-                                          <p:stCondLst>
-                                            <p:cond delay="0"/>
-                                          </p:stCondLst>
-                                        </p:cTn>
-                                        <p:tgtEl>
-                                          <p:spTgt spid="32"/>
-                                        </p:tgtEl>
-                                        <p:attrNameLst>
-                                          <p:attrName>style.visibility</p:attrName>
-                                        </p:attrNameLst>
-                                      </p:cBhvr>
-                                      <p:to>
-                                        <p:strVal val="visible"/>
-                                      </p:to>
-                                    </p:set>
-                                    <p:animEffect transition="in" filter="fade">
-                                      <p:cBhvr>
-                                        <p:cTn id="12" dur="300"/>
-                                        <p:tgtEl>
-                                          <p:spTgt spid="32"/>
-                                        </p:tgtEl>
-                                      </p:cBhvr>
-                                    </p:animEffect>
-                                  </p:childTnLst>
-                                </p:cTn>
-                              </p:par>
-                            </p:childTnLst>
-                          </p:cTn>
-                        </p:par>
-                      </p:childTnLst>
-                    </p:cTn>
-                  </p:par>
-                  <p:par>
-                    <p:cTn id="13" fill="hold">
-                      <p:stCondLst>
-                        <p:cond delay="indefinite"/>
-                      </p:stCondLst>
-                      <p:childTnLst>
-                        <p:par>
-                          <p:cTn id="14" fill="hold">
-                            <p:stCondLst>
-                              <p:cond delay="0"/>
-                            </p:stCondLst>
-                            <p:childTnLst>
-                              <p:par>
-                                <p:cTn id="15" presetID="10" presetClass="entr" presetSubtype="0" fill="hold" grpId="0" nodeType="clickEffect">
-                                  <p:stCondLst>
-                                    <p:cond delay="0"/>
-                                  </p:stCondLst>
-                                  <p:childTnLst>
-                                    <p:set>
-                                      <p:cBhvr>
-                                        <p:cTn id="16" dur="1" fill="hold">
-                                          <p:stCondLst>
-                                            <p:cond delay="0"/>
-                                          </p:stCondLst>
-                                        </p:cTn>
-                                        <p:tgtEl>
-                                          <p:spTgt spid="28"/>
-                                        </p:tgtEl>
-                                        <p:attrNameLst>
-                                          <p:attrName>style.visibility</p:attrName>
-                                        </p:attrNameLst>
-                                      </p:cBhvr>
-                                      <p:to>
-                                        <p:strVal val="visible"/>
-                                      </p:to>
-                                    </p:set>
-                                    <p:animEffect transition="in" filter="fade">
-                                      <p:cBhvr>
-                                        <p:cTn id="17" dur="300"/>
-                                        <p:tgtEl>
-                                          <p:spTgt spid="28"/>
-                                        </p:tgtEl>
-                                      </p:cBhvr>
-                                    </p:animEffect>
-                                  </p:childTnLst>
-                                </p:cTn>
-                              </p:par>
-                            </p:childTnLst>
-                          </p:cTn>
-                        </p:par>
-                      </p:childTnLst>
-                    </p:cTn>
-                  </p:par>
-                  <p:par>
-                    <p:cTn id="18" fill="hold">
-                      <p:stCondLst>
-                        <p:cond delay="indefinite"/>
-                      </p:stCondLst>
-                      <p:childTnLst>
-                        <p:par>
-                          <p:cTn id="19" fill="hold">
-                            <p:stCondLst>
-                              <p:cond delay="0"/>
-                            </p:stCondLst>
-                            <p:childTnLst>
-                              <p:par>
-                                <p:cTn id="20" presetID="10" presetClass="entr" presetSubtype="0" fill="hold" grpId="0" nodeType="clickEffect">
-                                  <p:stCondLst>
-                                    <p:cond delay="0"/>
-                                  </p:stCondLst>
-                                  <p:childTnLst>
-                                    <p:set>
-                                      <p:cBhvr>
-                                        <p:cTn id="21" dur="1" fill="hold">
-                                          <p:stCondLst>
-                                            <p:cond delay="0"/>
-                                          </p:stCondLst>
-                                        </p:cTn>
-                                        <p:tgtEl>
-                                          <p:spTgt spid="33"/>
-                                        </p:tgtEl>
-                                        <p:attrNameLst>
-                                          <p:attrName>style.visibility</p:attrName>
-                                        </p:attrNameLst>
-                                      </p:cBhvr>
-                                      <p:to>
-                                        <p:strVal val="visible"/>
-                                      </p:to>
-                                    </p:set>
-                                    <p:animEffect transition="in" filter="fade">
-                                      <p:cBhvr>
-                                        <p:cTn id="22" dur="300"/>
-                                        <p:tgtEl>
-                                          <p:spTgt spid="33"/>
-                                        </p:tgtEl>
-                                      </p:cBhvr>
-                                    </p:animEffect>
-                                  </p:childTnLst>
-                                </p:cTn>
-                              </p:par>
-                            </p:childTnLst>
-                          </p:cTn>
-                        </p:par>
-                      </p:childTnLst>
-                    </p:cTn>
-                  </p:par>
-                  <p:par>
-                    <p:cTn id="23" fill="hold">
-                      <p:stCondLst>
-                        <p:cond delay="indefinite"/>
-                      </p:stCondLst>
-                      <p:childTnLst>
-                        <p:par>
-                          <p:cTn id="24" fill="hold">
-                            <p:stCondLst>
-                              <p:cond delay="0"/>
-                            </p:stCondLst>
-                            <p:childTnLst>
-                              <p:par>
-                                <p:cTn id="25" presetID="10" presetClass="entr" presetSubtype="0" fill="hold" grpId="0" nodeType="clickEffect">
-                                  <p:stCondLst>
-                                    <p:cond delay="0"/>
-                                  </p:stCondLst>
-                                  <p:childTnLst>
-                                    <p:set>
-                                      <p:cBhvr>
-                                        <p:cTn id="26" dur="1" fill="hold">
-                                          <p:stCondLst>
-                                            <p:cond delay="0"/>
-                                          </p:stCondLst>
-                                        </p:cTn>
-                                        <p:tgtEl>
-                                          <p:spTgt spid="34"/>
-                                        </p:tgtEl>
-                                        <p:attrNameLst>
-                                          <p:attrName>style.visibility</p:attrName>
-                                        </p:attrNameLst>
-                                      </p:cBhvr>
-                                      <p:to>
-                                        <p:strVal val="visible"/>
-                                      </p:to>
-                                    </p:set>
-                                    <p:animEffect transition="in" filter="fade">
-                                      <p:cBhvr>
-                                        <p:cTn id="27" dur="300"/>
-                                        <p:tgtEl>
-                                          <p:spTgt spid="34"/>
-                                        </p:tgtEl>
-                                      </p:cBhvr>
-                                    </p:animEffect>
-                                  </p:childTnLst>
-                                </p:cTn>
-                              </p:par>
-                            </p:childTnLst>
-                          </p:cTn>
-                        </p:par>
-                      </p:childTnLst>
-                    </p:cTn>
-                  </p:par>
-                  <p:par>
-                    <p:cTn id="28" fill="hold">
-                      <p:stCondLst>
-                        <p:cond delay="indefinite"/>
-                      </p:stCondLst>
-                      <p:childTnLst>
-                        <p:par>
-                          <p:cTn id="29" fill="hold">
-                            <p:stCondLst>
-                              <p:cond delay="0"/>
-                            </p:stCondLst>
-                            <p:childTnLst>
-                              <p:par>
-                                <p:cTn id="30" presetID="10" presetClass="entr" presetSubtype="0" fill="hold" grpId="0" nodeType="clickEffect">
-                                  <p:stCondLst>
-                                    <p:cond delay="0"/>
-                                  </p:stCondLst>
-                                  <p:childTnLst>
-                                    <p:set>
-                                      <p:cBhvr>
-                                        <p:cTn id="31" dur="1" fill="hold">
-                                          <p:stCondLst>
-                                            <p:cond delay="0"/>
-                                          </p:stCondLst>
-                                        </p:cTn>
-                                        <p:tgtEl>
-                                          <p:spTgt spid="29"/>
-                                        </p:tgtEl>
-                                        <p:attrNameLst>
-                                          <p:attrName>style.visibility</p:attrName>
-                                        </p:attrNameLst>
-                                      </p:cBhvr>
-                                      <p:to>
-                                        <p:strVal val="visible"/>
-                                      </p:to>
-                                    </p:set>
-                                    <p:animEffect transition="in" filter="fade">
-                                      <p:cBhvr>
-                                        <p:cTn id="32" dur="300"/>
-                                        <p:tgtEl>
-                                          <p:spTgt spid="29"/>
-                                        </p:tgtEl>
-                                      </p:cBhvr>
-                                    </p:animEffect>
-                                  </p:childTnLst>
-                                </p:cTn>
-                              </p:par>
-                            </p:childTnLst>
-                          </p:cTn>
-                        </p:par>
-                      </p:childTnLst>
-                    </p:cTn>
-                  </p:par>
-                  <p:par>
-                    <p:cTn id="33" fill="hold">
-                      <p:stCondLst>
-                        <p:cond delay="indefinite"/>
-                      </p:stCondLst>
-                      <p:childTnLst>
-                        <p:par>
-                          <p:cTn id="34" fill="hold">
-                            <p:stCondLst>
-                              <p:cond delay="0"/>
-                            </p:stCondLst>
-                            <p:childTnLst>
-                              <p:par>
-                                <p:cTn id="35" presetID="10" presetClass="entr" presetSubtype="0" fill="hold" grpId="0" nodeType="clickEffect">
-                                  <p:stCondLst>
-                                    <p:cond delay="0"/>
-                                  </p:stCondLst>
-                                  <p:childTnLst>
-                                    <p:set>
-                                      <p:cBhvr>
-                                        <p:cTn id="36" dur="1" fill="hold">
-                                          <p:stCondLst>
-                                            <p:cond delay="0"/>
-                                          </p:stCondLst>
-                                        </p:cTn>
-                                        <p:tgtEl>
-                                          <p:spTgt spid="35"/>
-                                        </p:tgtEl>
-                                        <p:attrNameLst>
-                                          <p:attrName>style.visibility</p:attrName>
-                                        </p:attrNameLst>
-                                      </p:cBhvr>
-                                      <p:to>
-                                        <p:strVal val="visible"/>
-                                      </p:to>
-                                    </p:set>
-                                    <p:animEffect transition="in" filter="fade">
-                                      <p:cBhvr>
-                                        <p:cTn id="37" dur="300"/>
-                                        <p:tgtEl>
-                                          <p:spTgt spid="35"/>
-                                        </p:tgtEl>
-                                      </p:cBhvr>
-                                    </p:animEffect>
-                                  </p:childTnLst>
-                                </p:cTn>
-                              </p:par>
-                            </p:childTnLst>
-                          </p:cTn>
-                        </p:par>
-                      </p:childTnLst>
-                    </p:cTn>
-                  </p:par>
-                  <p:par>
-                    <p:cTn id="38" fill="hold">
-                      <p:stCondLst>
-                        <p:cond delay="indefinite"/>
-                      </p:stCondLst>
-                      <p:childTnLst>
-                        <p:par>
-                          <p:cTn id="39" fill="hold">
-                            <p:stCondLst>
-                              <p:cond delay="0"/>
-                            </p:stCondLst>
-                            <p:childTnLst>
-                              <p:par>
-                                <p:cTn id="40" presetID="10" presetClass="entr" presetSubtype="0" fill="hold" grpId="0" nodeType="clickEffect">
-                                  <p:stCondLst>
-                                    <p:cond delay="0"/>
-                                  </p:stCondLst>
-                                  <p:childTnLst>
-                                    <p:set>
-                                      <p:cBhvr>
-                                        <p:cTn id="41" dur="1" fill="hold">
-                                          <p:stCondLst>
-                                            <p:cond delay="0"/>
-                                          </p:stCondLst>
-                                        </p:cTn>
-                                        <p:tgtEl>
-                                          <p:spTgt spid="36"/>
-                                        </p:tgtEl>
-                                        <p:attrNameLst>
-                                          <p:attrName>style.visibility</p:attrName>
-                                        </p:attrNameLst>
-                                      </p:cBhvr>
-                                      <p:to>
-                                        <p:strVal val="visible"/>
-                                      </p:to>
-                                    </p:set>
-                                    <p:animEffect transition="in" filter="fade">
-                                      <p:cBhvr>
-                                        <p:cTn id="42" dur="300"/>
-                                        <p:tgtEl>
-                                          <p:spTgt spid="36"/>
-                                        </p:tgtEl>
-                                      </p:cBhvr>
-                                    </p:animEffect>
-                                  </p:childTnLst>
-                                </p:cTn>
-                              </p:par>
-                            </p:childTnLst>
-                          </p:cTn>
-                        </p:par>
-                      </p:childTnLst>
-                    </p:cTn>
-                  </p:par>
-                  <p:par>
-                    <p:cTn id="43" fill="hold">
-                      <p:stCondLst>
-                        <p:cond delay="indefinite"/>
-                      </p:stCondLst>
-                      <p:childTnLst>
-                        <p:par>
-                          <p:cTn id="44" fill="hold">
-                            <p:stCondLst>
-                              <p:cond delay="0"/>
-                            </p:stCondLst>
-                            <p:childTnLst>
-                              <p:par>
-                                <p:cTn id="45" presetID="10" presetClass="entr" presetSubtype="0" fill="hold" grpId="0" nodeType="clickEffect">
-                                  <p:stCondLst>
-                                    <p:cond delay="0"/>
-                                  </p:stCondLst>
-                                  <p:childTnLst>
-                                    <p:set>
-                                      <p:cBhvr>
-                                        <p:cTn id="46" dur="1" fill="hold">
-                                          <p:stCondLst>
-                                            <p:cond delay="0"/>
-                                          </p:stCondLst>
-                                        </p:cTn>
-                                        <p:tgtEl>
-                                          <p:spTgt spid="37"/>
-                                        </p:tgtEl>
-                                        <p:attrNameLst>
-                                          <p:attrName>style.visibility</p:attrName>
-                                        </p:attrNameLst>
-                                      </p:cBhvr>
-                                      <p:to>
-                                        <p:strVal val="visible"/>
-                                      </p:to>
-                                    </p:set>
-                                    <p:animEffect transition="in" filter="fade">
-                                      <p:cBhvr>
-                                        <p:cTn id="47" dur="300"/>
-                                        <p:tgtEl>
-                                          <p:spTgt spid="37"/>
-                                        </p:tgtEl>
-                                      </p:cBhvr>
-                                    </p:animEffect>
-                                  </p:childTnLst>
-                                </p:cTn>
-                              </p:par>
-                            </p:childTnLst>
-                          </p:cTn>
-                        </p:par>
-                      </p:childTnLst>
-                    </p:cTn>
-                  </p:par>
-                  <p:par>
-                    <p:cTn id="48" fill="hold">
-                      <p:stCondLst>
-                        <p:cond delay="indefinite"/>
-                      </p:stCondLst>
-                      <p:childTnLst>
-                        <p:par>
-                          <p:cTn id="49" fill="hold">
-                            <p:stCondLst>
-                              <p:cond delay="0"/>
-                            </p:stCondLst>
-                            <p:childTnLst>
-                              <p:par>
-                                <p:cTn id="50" presetID="10" presetClass="entr" presetSubtype="0" fill="hold" grpId="0" nodeType="clickEffect">
-                                  <p:stCondLst>
-                                    <p:cond delay="0"/>
-                                  </p:stCondLst>
-                                  <p:childTnLst>
-                                    <p:set>
-                                      <p:cBhvr>
-                                        <p:cTn id="51" dur="1" fill="hold">
-                                          <p:stCondLst>
-                                            <p:cond delay="0"/>
-                                          </p:stCondLst>
-                                        </p:cTn>
-                                        <p:tgtEl>
-                                          <p:spTgt spid="30"/>
-                                        </p:tgtEl>
-                                        <p:attrNameLst>
-                                          <p:attrName>style.visibility</p:attrName>
-                                        </p:attrNameLst>
-                                      </p:cBhvr>
-                                      <p:to>
-                                        <p:strVal val="visible"/>
-                                      </p:to>
-                                    </p:set>
-                                    <p:animEffect transition="in" filter="fade">
-                                      <p:cBhvr>
-                                        <p:cTn id="52" dur="300"/>
-                                        <p:tgtEl>
-                                          <p:spTgt spid="30"/>
-                                        </p:tgtEl>
-                                      </p:cBhvr>
-                                    </p:animEffect>
-                                  </p:childTnLst>
-                                </p:cTn>
-                              </p:par>
-                            </p:childTnLst>
-                          </p:cTn>
-                        </p:par>
-                      </p:childTnLst>
-                    </p:cTn>
-                  </p:par>
-                  <p:par>
-                    <p:cTn id="53" fill="hold">
-                      <p:stCondLst>
-                        <p:cond delay="indefinite"/>
-                      </p:stCondLst>
-                      <p:childTnLst>
-                        <p:par>
-                          <p:cTn id="54" fill="hold">
-                            <p:stCondLst>
-                              <p:cond delay="0"/>
-                            </p:stCondLst>
-                            <p:childTnLst>
-                              <p:par>
-                                <p:cTn id="55" presetID="10" presetClass="entr" presetSubtype="0" fill="hold" grpId="0" nodeType="clickEffect">
-                                  <p:stCondLst>
-                                    <p:cond delay="0"/>
-                                  </p:stCondLst>
-                                  <p:childTnLst>
-                                    <p:set>
-                                      <p:cBhvr>
-                                        <p:cTn id="56" dur="1" fill="hold">
-                                          <p:stCondLst>
-                                            <p:cond delay="0"/>
-                                          </p:stCondLst>
-                                        </p:cTn>
-                                        <p:tgtEl>
-                                          <p:spTgt spid="38"/>
-                                        </p:tgtEl>
-                                        <p:attrNameLst>
-                                          <p:attrName>style.visibility</p:attrName>
-                                        </p:attrNameLst>
-                                      </p:cBhvr>
-                                      <p:to>
-                                        <p:strVal val="visible"/>
-                                      </p:to>
-                                    </p:set>
-                                    <p:animEffect transition="in" filter="fade">
-                                      <p:cBhvr>
-                                        <p:cTn id="57" dur="300"/>
-                                        <p:tgtEl>
-                                          <p:spTgt spid="38"/>
-                                        </p:tgtEl>
-                                      </p:cBhvr>
-                                    </p:animEffect>
-                                  </p:childTnLst>
-                                </p:cTn>
-                              </p:par>
-                            </p:childTnLst>
-                          </p:cTn>
-                        </p:par>
-                      </p:childTnLst>
-                    </p:cTn>
-                  </p:par>
-                </p:childTnLst>
-              </p:cTn>
-              <p:prevCondLst>
-                <p:cond evt="onPrev" delay="0">
-                  <p:tgtEl>
-                    <p:sldTgt/>
-                  </p:tgtEl>
-                </p:cond>
-              </p:prevCondLst>
-              <p:nextCondLst>
-                <p:cond evt="onNext" delay="0">
-                  <p:tgtEl>
-                    <p:sldTgt/>
-                  </p:tgtEl>
-                </p:cond>
-              </p:nextCondLst>
-            </p:seq>
-          </p:childTnLst>
-        </p:cTn>
-      </p:par>
-    </p:tnLst>
-    <p:bldLst>
-      <p:bldP spid="31" grpId="0"/>
-      <p:bldP spid="32" grpId="0"/>
-      <p:bldP spid="28" grpId="0" animBg="1"/>
-      <p:bldP spid="33" grpId="0"/>
-      <p:bldP spid="34" grpId="0"/>
-      <p:bldP spid="29" grpId="0" animBg="1"/>
-      <p:bldP spid="35" grpId="0"/>
       <p:bldP spid="36" grpId="0"/>
       <p:bldP spid="37" grpId="0"/>
       <p:bldP spid="30" grpId="0" animBg="1"/>
@@ -13963,7 +10383,7 @@
                 <a:ea typeface="Arial" pitchFamily="34" charset="-122"/>
                 <a:cs typeface="Arial" pitchFamily="34" charset="-120"/>
               </a:rPr>
-              <a:t>أ</a:t>
+              <a:t>ل</a:t>
             </a:r>
             <a:endParaRPr lang="ar-SA" sz="7800" dirty="0"/>
           </a:p>
@@ -14002,7 +10422,7 @@
                 <a:ea typeface="Arial" pitchFamily="34" charset="-122"/>
                 <a:cs typeface="Arial" pitchFamily="34" charset="-120"/>
               </a:rPr>
-              <a:t>أَ</a:t>
+              <a:t>لَ</a:t>
             </a:r>
             <a:endParaRPr lang="ar-SA" sz="7800" dirty="0"/>
           </a:p>
@@ -14158,7 +10578,7 @@
                 <a:ea typeface="Arial" pitchFamily="34" charset="-122"/>
                 <a:cs typeface="Arial" pitchFamily="34" charset="-120"/>
               </a:rPr>
-              <a:t>أَهَا</a:t>
+              <a:t>لَهَا</a:t>
             </a:r>
             <a:endParaRPr lang="ar-SA" sz="9000" dirty="0"/>
           </a:p>
@@ -15374,7 +11794,7 @@
                 <a:ea typeface="Arial" pitchFamily="34" charset="-122"/>
                 <a:cs typeface="Arial" pitchFamily="34" charset="-120"/>
               </a:rPr>
-              <a:t>ب</a:t>
+              <a:t>س</a:t>
             </a:r>
             <a:endParaRPr lang="ar-SA" sz="7800" dirty="0"/>
           </a:p>
@@ -15413,7 +11833,7 @@
                 <a:ea typeface="Arial" pitchFamily="34" charset="-122"/>
                 <a:cs typeface="Arial" pitchFamily="34" charset="-120"/>
               </a:rPr>
-              <a:t>بَ</a:t>
+              <a:t>سَ</a:t>
             </a:r>
             <a:endParaRPr lang="ar-SA" sz="7800" dirty="0"/>
           </a:p>
@@ -15569,7 +11989,7 @@
                 <a:ea typeface="Arial" pitchFamily="34" charset="-122"/>
                 <a:cs typeface="Arial" pitchFamily="34" charset="-120"/>
               </a:rPr>
-              <a:t>بَهَا</a:t>
+              <a:t>سَهَا</a:t>
             </a:r>
             <a:endParaRPr lang="ar-SA" sz="9000" dirty="0"/>
           </a:p>
@@ -16760,85 +13180,7 @@
         </p:nvSpPr>
         <p:spPr>
           <a:xfrm>
-            <a:off x="6720840" y="1691640"/>
-            <a:ext cx="1737360" cy="1737360"/>
-          </a:xfrm>
-          <a:prstGeom prst="rect">
-            <a:avLst/>
-          </a:prstGeom>
-          <a:noFill/>
-          <a:ln/>
-        </p:spPr>
-        <p:txBody>
-          <a:bodyPr wrap="square" lIns="0" tIns="0" rIns="0" bIns="0" rtlCol="0" anchor="ctr"/>
-          <a:lstStyle/>
-          <a:p>
-            <a:pPr rtl="1" algn="ctr" indent="0" marL="0">
-              <a:buNone/>
-            </a:pPr>
-            <a:r>
-              <a:rPr lang="ar-SA" altLang="en-US" sz="7800" dirty="0">
-                <a:solidFill>
-                  <a:srgbClr val="16213E"/>
-                </a:solidFill>
-                <a:latin typeface="Arial" pitchFamily="34" charset="0"/>
-                <a:ea typeface="Arial" pitchFamily="34" charset="-122"/>
-                <a:cs typeface="Arial" pitchFamily="34" charset="-120"/>
-              </a:rPr>
-              <a:t>ت</a:t>
-            </a:r>
-            <a:endParaRPr lang="ar-SA" sz="7800" dirty="0"/>
-          </a:p>
-        </p:txBody>
-      </p:sp>
-      <p:sp>
-        <p:nvSpPr>
-          <p:cNvPr id="30" name="F1 fathah"/>
-          <p:cNvSpPr txBox="1"/>
-          <p:nvPr/>
-        </p:nvSpPr>
-        <p:spPr>
-          <a:xfrm>
-            <a:off x="6720840" y="1691640"/>
-            <a:ext cx="1737360" cy="1737360"/>
-          </a:xfrm>
-          <a:prstGeom prst="rect">
-            <a:avLst/>
-          </a:prstGeom>
-          <a:noFill/>
-          <a:ln/>
-        </p:spPr>
-        <p:txBody>
-          <a:bodyPr wrap="square" lIns="0" tIns="0" rIns="0" bIns="0" rtlCol="0" anchor="ctr"/>
-          <a:lstStyle/>
-          <a:p>
-            <a:pPr rtl="1" algn="ctr" indent="0" marL="0">
-              <a:buNone/>
-            </a:pPr>
-            <a:r>
-              <a:rPr lang="ar-SA" altLang="en-US" sz="7800" dirty="0">
-                <a:solidFill>
-                  <a:srgbClr val="16213E"/>
-                </a:solidFill>
-                <a:latin typeface="Arial" pitchFamily="34" charset="0"/>
-                <a:ea typeface="Arial" pitchFamily="34" charset="-122"/>
-                <a:cs typeface="Arial" pitchFamily="34" charset="-120"/>
-              </a:rPr>
-              <a:t>تَ</a:t>
-            </a:r>
-            <a:endParaRPr lang="ar-SA" sz="7800" dirty="0"/>
-          </a:p>
-        </p:txBody>
-      </p:sp>
-      <p:sp>
-        <p:nvSpPr>
-          <p:cNvPr id="31" name="L2 letter"/>
-          <p:cNvSpPr txBox="1"/>
-          <p:nvPr/>
-        </p:nvSpPr>
-        <p:spPr>
-          <a:xfrm>
-            <a:off x="4671487" y="1691640"/>
+            <a:off x="7048927" y="1691640"/>
             <a:ext cx="1737360" cy="1737360"/>
           </a:xfrm>
           <a:prstGeom prst="rect">
@@ -16871,13 +13213,13 @@
       </p:sp>
       <p:sp>
         <p:nvSpPr>
-          <p:cNvPr id="32" name="F2 fathah"/>
+          <p:cNvPr id="30" name="F1 fathah"/>
           <p:cNvSpPr txBox="1"/>
           <p:nvPr/>
         </p:nvSpPr>
         <p:spPr>
           <a:xfrm>
-            <a:off x="4671487" y="1691640"/>
+            <a:off x="7048927" y="1691640"/>
             <a:ext cx="1737360" cy="1737360"/>
           </a:xfrm>
           <a:prstGeom prst="rect">
@@ -16910,13 +13252,13 @@
       </p:sp>
       <p:sp>
         <p:nvSpPr>
-          <p:cNvPr id="33" name="M2 alif"/>
+          <p:cNvPr id="31" name="M1 alif"/>
           <p:cNvSpPr txBox="1"/>
           <p:nvPr/>
         </p:nvSpPr>
         <p:spPr>
           <a:xfrm>
-            <a:off x="3787079" y="1691640"/>
+            <a:off x="6164519" y="1691640"/>
             <a:ext cx="1737360" cy="1737360"/>
           </a:xfrm>
           <a:prstGeom prst="rect">
@@ -16949,6 +13291,84 @@
       </p:sp>
       <p:sp>
         <p:nvSpPr>
+          <p:cNvPr id="32" name="L2 letter"/>
+          <p:cNvSpPr txBox="1"/>
+          <p:nvPr/>
+        </p:nvSpPr>
+        <p:spPr>
+          <a:xfrm>
+            <a:off x="4343400" y="1691640"/>
+            <a:ext cx="1737360" cy="1737360"/>
+          </a:xfrm>
+          <a:prstGeom prst="rect">
+            <a:avLst/>
+          </a:prstGeom>
+          <a:noFill/>
+          <a:ln/>
+        </p:spPr>
+        <p:txBody>
+          <a:bodyPr wrap="square" lIns="0" tIns="0" rIns="0" bIns="0" rtlCol="0" anchor="ctr"/>
+          <a:lstStyle/>
+          <a:p>
+            <a:pPr rtl="1" algn="ctr" indent="0" marL="0">
+              <a:buNone/>
+            </a:pPr>
+            <a:r>
+              <a:rPr lang="ar-SA" altLang="en-US" sz="7800" dirty="0">
+                <a:solidFill>
+                  <a:srgbClr val="16213E"/>
+                </a:solidFill>
+                <a:latin typeface="Arial" pitchFamily="34" charset="0"/>
+                <a:ea typeface="Arial" pitchFamily="34" charset="-122"/>
+                <a:cs typeface="Arial" pitchFamily="34" charset="-120"/>
+              </a:rPr>
+              <a:t>ر</a:t>
+            </a:r>
+            <a:endParaRPr lang="ar-SA" sz="7800" dirty="0"/>
+          </a:p>
+        </p:txBody>
+      </p:sp>
+      <p:sp>
+        <p:nvSpPr>
+          <p:cNvPr id="33" name="F2 fathah"/>
+          <p:cNvSpPr txBox="1"/>
+          <p:nvPr/>
+        </p:nvSpPr>
+        <p:spPr>
+          <a:xfrm>
+            <a:off x="4343400" y="1691640"/>
+            <a:ext cx="1737360" cy="1737360"/>
+          </a:xfrm>
+          <a:prstGeom prst="rect">
+            <a:avLst/>
+          </a:prstGeom>
+          <a:noFill/>
+          <a:ln/>
+        </p:spPr>
+        <p:txBody>
+          <a:bodyPr wrap="square" lIns="0" tIns="0" rIns="0" bIns="0" rtlCol="0" anchor="ctr"/>
+          <a:lstStyle/>
+          <a:p>
+            <a:pPr rtl="1" algn="ctr" indent="0" marL="0">
+              <a:buNone/>
+            </a:pPr>
+            <a:r>
+              <a:rPr lang="ar-SA" altLang="en-US" sz="7800" dirty="0">
+                <a:solidFill>
+                  <a:srgbClr val="16213E"/>
+                </a:solidFill>
+                <a:latin typeface="Arial" pitchFamily="34" charset="0"/>
+                <a:ea typeface="Arial" pitchFamily="34" charset="-122"/>
+                <a:cs typeface="Arial" pitchFamily="34" charset="-120"/>
+              </a:rPr>
+              <a:t>رَ</a:t>
+            </a:r>
+            <a:endParaRPr lang="ar-SA" sz="7800" dirty="0"/>
+          </a:p>
+        </p:txBody>
+      </p:sp>
+      <p:sp>
+        <p:nvSpPr>
           <p:cNvPr id="34" name="R result"/>
           <p:cNvSpPr txBox="1"/>
           <p:nvPr/>
@@ -16980,7 +13400,7 @@
                 <a:ea typeface="Arial" pitchFamily="34" charset="-122"/>
                 <a:cs typeface="Arial" pitchFamily="34" charset="-120"/>
               </a:rPr>
-              <a:t>تَهَا</a:t>
+              <a:t>هَارَ</a:t>
             </a:r>
             <a:endParaRPr lang="ar-SA" sz="9000" dirty="0"/>
           </a:p>
@@ -17131,7 +13551,7 @@
                                           </p:stCondLst>
                                         </p:cTn>
                                         <p:tgtEl>
-                                          <p:spTgt spid="27"/>
+                                          <p:spTgt spid="31"/>
                                         </p:tgtEl>
                                         <p:attrNameLst>
                                           <p:attrName>style.visibility</p:attrName>
@@ -17145,7 +13565,7 @@
                                       <p:cBhvr>
                                         <p:cTn id="17" dur="300"/>
                                         <p:tgtEl>
-                                          <p:spTgt spid="27"/>
+                                          <p:spTgt spid="31"/>
                                         </p:tgtEl>
                                       </p:cBhvr>
                                     </p:animEffect>
@@ -17184,7 +13604,7 @@
                                           </p:stCondLst>
                                         </p:cTn>
                                         <p:tgtEl>
-                                          <p:spTgt spid="31"/>
+                                          <p:spTgt spid="27"/>
                                         </p:tgtEl>
                                         <p:attrNameLst>
                                           <p:attrName>style.visibility</p:attrName>
@@ -17198,7 +13618,7 @@
                                       <p:cBhvr>
                                         <p:cTn id="22" dur="300"/>
                                         <p:tgtEl>
-                                          <p:spTgt spid="31"/>
+                                          <p:spTgt spid="27"/>
                                         </p:tgtEl>
                                       </p:cBhvr>
                                     </p:animEffect>
@@ -17447,8 +13867,8 @@
     <p:bldLst>
       <p:bldP spid="29" grpId="0"/>
       <p:bldP spid="30" grpId="0"/>
+      <p:bldP spid="31" grpId="0"/>
       <p:bldP spid="27" grpId="0" animBg="1"/>
-      <p:bldP spid="31" grpId="0"/>
       <p:bldP spid="32" grpId="0"/>
       <p:bldP spid="33" grpId="0"/>
       <p:bldP spid="28" grpId="0" animBg="1"/>
@@ -18171,85 +14591,7 @@
         </p:nvSpPr>
         <p:spPr>
           <a:xfrm>
-            <a:off x="6720840" y="1691640"/>
-            <a:ext cx="1737360" cy="1737360"/>
-          </a:xfrm>
-          <a:prstGeom prst="rect">
-            <a:avLst/>
-          </a:prstGeom>
-          <a:noFill/>
-          <a:ln/>
-        </p:spPr>
-        <p:txBody>
-          <a:bodyPr wrap="square" lIns="0" tIns="0" rIns="0" bIns="0" rtlCol="0" anchor="ctr"/>
-          <a:lstStyle/>
-          <a:p>
-            <a:pPr rtl="1" algn="ctr" indent="0" marL="0">
-              <a:buNone/>
-            </a:pPr>
-            <a:r>
-              <a:rPr lang="ar-SA" altLang="en-US" sz="7800" dirty="0">
-                <a:solidFill>
-                  <a:srgbClr val="16213E"/>
-                </a:solidFill>
-                <a:latin typeface="Arial" pitchFamily="34" charset="0"/>
-                <a:ea typeface="Arial" pitchFamily="34" charset="-122"/>
-                <a:cs typeface="Arial" pitchFamily="34" charset="-120"/>
-              </a:rPr>
-              <a:t>ث</a:t>
-            </a:r>
-            <a:endParaRPr lang="ar-SA" sz="7800" dirty="0"/>
-          </a:p>
-        </p:txBody>
-      </p:sp>
-      <p:sp>
-        <p:nvSpPr>
-          <p:cNvPr id="30" name="F1 fathah"/>
-          <p:cNvSpPr txBox="1"/>
-          <p:nvPr/>
-        </p:nvSpPr>
-        <p:spPr>
-          <a:xfrm>
-            <a:off x="6720840" y="1691640"/>
-            <a:ext cx="1737360" cy="1737360"/>
-          </a:xfrm>
-          <a:prstGeom prst="rect">
-            <a:avLst/>
-          </a:prstGeom>
-          <a:noFill/>
-          <a:ln/>
-        </p:spPr>
-        <p:txBody>
-          <a:bodyPr wrap="square" lIns="0" tIns="0" rIns="0" bIns="0" rtlCol="0" anchor="ctr"/>
-          <a:lstStyle/>
-          <a:p>
-            <a:pPr rtl="1" algn="ctr" indent="0" marL="0">
-              <a:buNone/>
-            </a:pPr>
-            <a:r>
-              <a:rPr lang="ar-SA" altLang="en-US" sz="7800" dirty="0">
-                <a:solidFill>
-                  <a:srgbClr val="16213E"/>
-                </a:solidFill>
-                <a:latin typeface="Arial" pitchFamily="34" charset="0"/>
-                <a:ea typeface="Arial" pitchFamily="34" charset="-122"/>
-                <a:cs typeface="Arial" pitchFamily="34" charset="-120"/>
-              </a:rPr>
-              <a:t>ثَ</a:t>
-            </a:r>
-            <a:endParaRPr lang="ar-SA" sz="7800" dirty="0"/>
-          </a:p>
-        </p:txBody>
-      </p:sp>
-      <p:sp>
-        <p:nvSpPr>
-          <p:cNvPr id="31" name="L2 letter"/>
-          <p:cNvSpPr txBox="1"/>
-          <p:nvPr/>
-        </p:nvSpPr>
-        <p:spPr>
-          <a:xfrm>
-            <a:off x="4671487" y="1691640"/>
+            <a:off x="7048927" y="1691640"/>
             <a:ext cx="1737360" cy="1737360"/>
           </a:xfrm>
           <a:prstGeom prst="rect">
@@ -18282,13 +14624,13 @@
       </p:sp>
       <p:sp>
         <p:nvSpPr>
-          <p:cNvPr id="32" name="F2 fathah"/>
+          <p:cNvPr id="30" name="F1 fathah"/>
           <p:cNvSpPr txBox="1"/>
           <p:nvPr/>
         </p:nvSpPr>
         <p:spPr>
           <a:xfrm>
-            <a:off x="4671487" y="1691640"/>
+            <a:off x="7048927" y="1691640"/>
             <a:ext cx="1737360" cy="1737360"/>
           </a:xfrm>
           <a:prstGeom prst="rect">
@@ -18321,13 +14663,13 @@
       </p:sp>
       <p:sp>
         <p:nvSpPr>
-          <p:cNvPr id="33" name="M2 alif"/>
+          <p:cNvPr id="31" name="M1 alif"/>
           <p:cNvSpPr txBox="1"/>
           <p:nvPr/>
         </p:nvSpPr>
         <p:spPr>
           <a:xfrm>
-            <a:off x="3787079" y="1691640"/>
+            <a:off x="6164519" y="1691640"/>
             <a:ext cx="1737360" cy="1737360"/>
           </a:xfrm>
           <a:prstGeom prst="rect">
@@ -18360,6 +14702,84 @@
       </p:sp>
       <p:sp>
         <p:nvSpPr>
+          <p:cNvPr id="32" name="L2 letter"/>
+          <p:cNvSpPr txBox="1"/>
+          <p:nvPr/>
+        </p:nvSpPr>
+        <p:spPr>
+          <a:xfrm>
+            <a:off x="4343400" y="1691640"/>
+            <a:ext cx="1737360" cy="1737360"/>
+          </a:xfrm>
+          <a:prstGeom prst="rect">
+            <a:avLst/>
+          </a:prstGeom>
+          <a:noFill/>
+          <a:ln/>
+        </p:spPr>
+        <p:txBody>
+          <a:bodyPr wrap="square" lIns="0" tIns="0" rIns="0" bIns="0" rtlCol="0" anchor="ctr"/>
+          <a:lstStyle/>
+          <a:p>
+            <a:pPr rtl="1" algn="ctr" indent="0" marL="0">
+              <a:buNone/>
+            </a:pPr>
+            <a:r>
+              <a:rPr lang="ar-SA" altLang="en-US" sz="7800" dirty="0">
+                <a:solidFill>
+                  <a:srgbClr val="16213E"/>
+                </a:solidFill>
+                <a:latin typeface="Arial" pitchFamily="34" charset="0"/>
+                <a:ea typeface="Arial" pitchFamily="34" charset="-122"/>
+                <a:cs typeface="Arial" pitchFamily="34" charset="-120"/>
+              </a:rPr>
+              <a:t>ل</a:t>
+            </a:r>
+            <a:endParaRPr lang="ar-SA" sz="7800" dirty="0"/>
+          </a:p>
+        </p:txBody>
+      </p:sp>
+      <p:sp>
+        <p:nvSpPr>
+          <p:cNvPr id="33" name="F2 fathah"/>
+          <p:cNvSpPr txBox="1"/>
+          <p:nvPr/>
+        </p:nvSpPr>
+        <p:spPr>
+          <a:xfrm>
+            <a:off x="4343400" y="1691640"/>
+            <a:ext cx="1737360" cy="1737360"/>
+          </a:xfrm>
+          <a:prstGeom prst="rect">
+            <a:avLst/>
+          </a:prstGeom>
+          <a:noFill/>
+          <a:ln/>
+        </p:spPr>
+        <p:txBody>
+          <a:bodyPr wrap="square" lIns="0" tIns="0" rIns="0" bIns="0" rtlCol="0" anchor="ctr"/>
+          <a:lstStyle/>
+          <a:p>
+            <a:pPr rtl="1" algn="ctr" indent="0" marL="0">
+              <a:buNone/>
+            </a:pPr>
+            <a:r>
+              <a:rPr lang="ar-SA" altLang="en-US" sz="7800" dirty="0">
+                <a:solidFill>
+                  <a:srgbClr val="16213E"/>
+                </a:solidFill>
+                <a:latin typeface="Arial" pitchFamily="34" charset="0"/>
+                <a:ea typeface="Arial" pitchFamily="34" charset="-122"/>
+                <a:cs typeface="Arial" pitchFamily="34" charset="-120"/>
+              </a:rPr>
+              <a:t>لَ</a:t>
+            </a:r>
+            <a:endParaRPr lang="ar-SA" sz="7800" dirty="0"/>
+          </a:p>
+        </p:txBody>
+      </p:sp>
+      <p:sp>
+        <p:nvSpPr>
           <p:cNvPr id="34" name="R result"/>
           <p:cNvSpPr txBox="1"/>
           <p:nvPr/>
@@ -18391,7 +14811,7 @@
                 <a:ea typeface="Arial" pitchFamily="34" charset="-122"/>
                 <a:cs typeface="Arial" pitchFamily="34" charset="-120"/>
               </a:rPr>
-              <a:t>ثَهَا</a:t>
+              <a:t>هَالَ</a:t>
             </a:r>
             <a:endParaRPr lang="ar-SA" sz="9000" dirty="0"/>
           </a:p>
@@ -18542,7 +14962,7 @@
                                           </p:stCondLst>
                                         </p:cTn>
                                         <p:tgtEl>
-                                          <p:spTgt spid="27"/>
+                                          <p:spTgt spid="31"/>
                                         </p:tgtEl>
                                         <p:attrNameLst>
                                           <p:attrName>style.visibility</p:attrName>
@@ -18556,7 +14976,7 @@
                                       <p:cBhvr>
                                         <p:cTn id="17" dur="300"/>
                                         <p:tgtEl>
-                                          <p:spTgt spid="27"/>
+                                          <p:spTgt spid="31"/>
                                         </p:tgtEl>
                                       </p:cBhvr>
                                     </p:animEffect>
@@ -18595,7 +15015,7 @@
                                           </p:stCondLst>
                                         </p:cTn>
                                         <p:tgtEl>
-                                          <p:spTgt spid="31"/>
+                                          <p:spTgt spid="27"/>
                                         </p:tgtEl>
                                         <p:attrNameLst>
                                           <p:attrName>style.visibility</p:attrName>
@@ -18609,7 +15029,7 @@
                                       <p:cBhvr>
                                         <p:cTn id="22" dur="300"/>
                                         <p:tgtEl>
-                                          <p:spTgt spid="31"/>
+                                          <p:spTgt spid="27"/>
                                         </p:tgtEl>
                                       </p:cBhvr>
                                     </p:animEffect>
@@ -18858,8 +15278,8 @@
     <p:bldLst>
       <p:bldP spid="29" grpId="0"/>
       <p:bldP spid="30" grpId="0"/>
+      <p:bldP spid="31" grpId="0"/>
       <p:bldP spid="27" grpId="0" animBg="1"/>
-      <p:bldP spid="31" grpId="0"/>
       <p:bldP spid="32" grpId="0"/>
       <p:bldP spid="33" grpId="0"/>
       <p:bldP spid="28" grpId="0" animBg="1"/>
@@ -19582,85 +16002,7 @@
         </p:nvSpPr>
         <p:spPr>
           <a:xfrm>
-            <a:off x="6720840" y="1691640"/>
-            <a:ext cx="1737360" cy="1737360"/>
-          </a:xfrm>
-          <a:prstGeom prst="rect">
-            <a:avLst/>
-          </a:prstGeom>
-          <a:noFill/>
-          <a:ln/>
-        </p:spPr>
-        <p:txBody>
-          <a:bodyPr wrap="square" lIns="0" tIns="0" rIns="0" bIns="0" rtlCol="0" anchor="ctr"/>
-          <a:lstStyle/>
-          <a:p>
-            <a:pPr rtl="1" algn="ctr" indent="0" marL="0">
-              <a:buNone/>
-            </a:pPr>
-            <a:r>
-              <a:rPr lang="ar-SA" altLang="en-US" sz="7800" dirty="0">
-                <a:solidFill>
-                  <a:srgbClr val="16213E"/>
-                </a:solidFill>
-                <a:latin typeface="Arial" pitchFamily="34" charset="0"/>
-                <a:ea typeface="Arial" pitchFamily="34" charset="-122"/>
-                <a:cs typeface="Arial" pitchFamily="34" charset="-120"/>
-              </a:rPr>
-              <a:t>ج</a:t>
-            </a:r>
-            <a:endParaRPr lang="ar-SA" sz="7800" dirty="0"/>
-          </a:p>
-        </p:txBody>
-      </p:sp>
-      <p:sp>
-        <p:nvSpPr>
-          <p:cNvPr id="30" name="F1 fathah"/>
-          <p:cNvSpPr txBox="1"/>
-          <p:nvPr/>
-        </p:nvSpPr>
-        <p:spPr>
-          <a:xfrm>
-            <a:off x="6720840" y="1691640"/>
-            <a:ext cx="1737360" cy="1737360"/>
-          </a:xfrm>
-          <a:prstGeom prst="rect">
-            <a:avLst/>
-          </a:prstGeom>
-          <a:noFill/>
-          <a:ln/>
-        </p:spPr>
-        <p:txBody>
-          <a:bodyPr wrap="square" lIns="0" tIns="0" rIns="0" bIns="0" rtlCol="0" anchor="ctr"/>
-          <a:lstStyle/>
-          <a:p>
-            <a:pPr rtl="1" algn="ctr" indent="0" marL="0">
-              <a:buNone/>
-            </a:pPr>
-            <a:r>
-              <a:rPr lang="ar-SA" altLang="en-US" sz="7800" dirty="0">
-                <a:solidFill>
-                  <a:srgbClr val="16213E"/>
-                </a:solidFill>
-                <a:latin typeface="Arial" pitchFamily="34" charset="0"/>
-                <a:ea typeface="Arial" pitchFamily="34" charset="-122"/>
-                <a:cs typeface="Arial" pitchFamily="34" charset="-120"/>
-              </a:rPr>
-              <a:t>جَ</a:t>
-            </a:r>
-            <a:endParaRPr lang="ar-SA" sz="7800" dirty="0"/>
-          </a:p>
-        </p:txBody>
-      </p:sp>
-      <p:sp>
-        <p:nvSpPr>
-          <p:cNvPr id="31" name="L2 letter"/>
-          <p:cNvSpPr txBox="1"/>
-          <p:nvPr/>
-        </p:nvSpPr>
-        <p:spPr>
-          <a:xfrm>
-            <a:off x="4671487" y="1691640"/>
+            <a:off x="7048927" y="1691640"/>
             <a:ext cx="1737360" cy="1737360"/>
           </a:xfrm>
           <a:prstGeom prst="rect">
@@ -19693,13 +16035,13 @@
       </p:sp>
       <p:sp>
         <p:nvSpPr>
-          <p:cNvPr id="32" name="F2 fathah"/>
+          <p:cNvPr id="30" name="F1 fathah"/>
           <p:cNvSpPr txBox="1"/>
           <p:nvPr/>
         </p:nvSpPr>
         <p:spPr>
           <a:xfrm>
-            <a:off x="4671487" y="1691640"/>
+            <a:off x="7048927" y="1691640"/>
             <a:ext cx="1737360" cy="1737360"/>
           </a:xfrm>
           <a:prstGeom prst="rect">
@@ -19732,13 +16074,13 @@
       </p:sp>
       <p:sp>
         <p:nvSpPr>
-          <p:cNvPr id="33" name="M2 alif"/>
+          <p:cNvPr id="31" name="M1 alif"/>
           <p:cNvSpPr txBox="1"/>
           <p:nvPr/>
         </p:nvSpPr>
         <p:spPr>
           <a:xfrm>
-            <a:off x="3787079" y="1691640"/>
+            <a:off x="6164519" y="1691640"/>
             <a:ext cx="1737360" cy="1737360"/>
           </a:xfrm>
           <a:prstGeom prst="rect">
@@ -19771,6 +16113,84 @@
       </p:sp>
       <p:sp>
         <p:nvSpPr>
+          <p:cNvPr id="32" name="L2 letter"/>
+          <p:cNvSpPr txBox="1"/>
+          <p:nvPr/>
+        </p:nvSpPr>
+        <p:spPr>
+          <a:xfrm>
+            <a:off x="4343400" y="1691640"/>
+            <a:ext cx="1737360" cy="1737360"/>
+          </a:xfrm>
+          <a:prstGeom prst="rect">
+            <a:avLst/>
+          </a:prstGeom>
+          <a:noFill/>
+          <a:ln/>
+        </p:spPr>
+        <p:txBody>
+          <a:bodyPr wrap="square" lIns="0" tIns="0" rIns="0" bIns="0" rtlCol="0" anchor="ctr"/>
+          <a:lstStyle/>
+          <a:p>
+            <a:pPr rtl="1" algn="ctr" indent="0" marL="0">
+              <a:buNone/>
+            </a:pPr>
+            <a:r>
+              <a:rPr lang="ar-SA" altLang="en-US" sz="7800" dirty="0">
+                <a:solidFill>
+                  <a:srgbClr val="16213E"/>
+                </a:solidFill>
+                <a:latin typeface="Arial" pitchFamily="34" charset="0"/>
+                <a:ea typeface="Arial" pitchFamily="34" charset="-122"/>
+                <a:cs typeface="Arial" pitchFamily="34" charset="-120"/>
+              </a:rPr>
+              <a:t>ب</a:t>
+            </a:r>
+            <a:endParaRPr lang="ar-SA" sz="7800" dirty="0"/>
+          </a:p>
+        </p:txBody>
+      </p:sp>
+      <p:sp>
+        <p:nvSpPr>
+          <p:cNvPr id="33" name="F2 fathah"/>
+          <p:cNvSpPr txBox="1"/>
+          <p:nvPr/>
+        </p:nvSpPr>
+        <p:spPr>
+          <a:xfrm>
+            <a:off x="4343400" y="1691640"/>
+            <a:ext cx="1737360" cy="1737360"/>
+          </a:xfrm>
+          <a:prstGeom prst="rect">
+            <a:avLst/>
+          </a:prstGeom>
+          <a:noFill/>
+          <a:ln/>
+        </p:spPr>
+        <p:txBody>
+          <a:bodyPr wrap="square" lIns="0" tIns="0" rIns="0" bIns="0" rtlCol="0" anchor="ctr"/>
+          <a:lstStyle/>
+          <a:p>
+            <a:pPr rtl="1" algn="ctr" indent="0" marL="0">
+              <a:buNone/>
+            </a:pPr>
+            <a:r>
+              <a:rPr lang="ar-SA" altLang="en-US" sz="7800" dirty="0">
+                <a:solidFill>
+                  <a:srgbClr val="16213E"/>
+                </a:solidFill>
+                <a:latin typeface="Arial" pitchFamily="34" charset="0"/>
+                <a:ea typeface="Arial" pitchFamily="34" charset="-122"/>
+                <a:cs typeface="Arial" pitchFamily="34" charset="-120"/>
+              </a:rPr>
+              <a:t>بَ</a:t>
+            </a:r>
+            <a:endParaRPr lang="ar-SA" sz="7800" dirty="0"/>
+          </a:p>
+        </p:txBody>
+      </p:sp>
+      <p:sp>
+        <p:nvSpPr>
           <p:cNvPr id="34" name="R result"/>
           <p:cNvSpPr txBox="1"/>
           <p:nvPr/>
@@ -19802,7 +16222,7 @@
                 <a:ea typeface="Arial" pitchFamily="34" charset="-122"/>
                 <a:cs typeface="Arial" pitchFamily="34" charset="-120"/>
               </a:rPr>
-              <a:t>جَهَا</a:t>
+              <a:t>هَابَ</a:t>
             </a:r>
             <a:endParaRPr lang="ar-SA" sz="9000" dirty="0"/>
           </a:p>
@@ -19953,7 +16373,7 @@
                                           </p:stCondLst>
                                         </p:cTn>
                                         <p:tgtEl>
-                                          <p:spTgt spid="27"/>
+                                          <p:spTgt spid="31"/>
                                         </p:tgtEl>
                                         <p:attrNameLst>
                                           <p:attrName>style.visibility</p:attrName>
@@ -19967,7 +16387,7 @@
                                       <p:cBhvr>
                                         <p:cTn id="17" dur="300"/>
                                         <p:tgtEl>
-                                          <p:spTgt spid="27"/>
+                                          <p:spTgt spid="31"/>
                                         </p:tgtEl>
                                       </p:cBhvr>
                                     </p:animEffect>
@@ -20006,7 +16426,7 @@
                                           </p:stCondLst>
                                         </p:cTn>
                                         <p:tgtEl>
-                                          <p:spTgt spid="31"/>
+                                          <p:spTgt spid="27"/>
                                         </p:tgtEl>
                                         <p:attrNameLst>
                                           <p:attrName>style.visibility</p:attrName>
@@ -20020,7 +16440,7 @@
                                       <p:cBhvr>
                                         <p:cTn id="22" dur="300"/>
                                         <p:tgtEl>
-                                          <p:spTgt spid="31"/>
+                                          <p:spTgt spid="27"/>
                                         </p:tgtEl>
                                       </p:cBhvr>
                                     </p:animEffect>
@@ -20269,8 +16689,8 @@
     <p:bldLst>
       <p:bldP spid="29" grpId="0"/>
       <p:bldP spid="30" grpId="0"/>
+      <p:bldP spid="31" grpId="0"/>
       <p:bldP spid="27" grpId="0" animBg="1"/>
-      <p:bldP spid="31" grpId="0"/>
       <p:bldP spid="32" grpId="0"/>
       <p:bldP spid="33" grpId="0"/>
       <p:bldP spid="28" grpId="0" animBg="1"/>
@@ -20993,85 +17413,7 @@
         </p:nvSpPr>
         <p:spPr>
           <a:xfrm>
-            <a:off x="6720840" y="1691640"/>
-            <a:ext cx="1737360" cy="1737360"/>
-          </a:xfrm>
-          <a:prstGeom prst="rect">
-            <a:avLst/>
-          </a:prstGeom>
-          <a:noFill/>
-          <a:ln/>
-        </p:spPr>
-        <p:txBody>
-          <a:bodyPr wrap="square" lIns="0" tIns="0" rIns="0" bIns="0" rtlCol="0" anchor="ctr"/>
-          <a:lstStyle/>
-          <a:p>
-            <a:pPr rtl="1" algn="ctr" indent="0" marL="0">
-              <a:buNone/>
-            </a:pPr>
-            <a:r>
-              <a:rPr lang="ar-SA" altLang="en-US" sz="7800" dirty="0">
-                <a:solidFill>
-                  <a:srgbClr val="16213E"/>
-                </a:solidFill>
-                <a:latin typeface="Arial" pitchFamily="34" charset="0"/>
-                <a:ea typeface="Arial" pitchFamily="34" charset="-122"/>
-                <a:cs typeface="Arial" pitchFamily="34" charset="-120"/>
-              </a:rPr>
-              <a:t>ح</a:t>
-            </a:r>
-            <a:endParaRPr lang="ar-SA" sz="7800" dirty="0"/>
-          </a:p>
-        </p:txBody>
-      </p:sp>
-      <p:sp>
-        <p:nvSpPr>
-          <p:cNvPr id="30" name="F1 fathah"/>
-          <p:cNvSpPr txBox="1"/>
-          <p:nvPr/>
-        </p:nvSpPr>
-        <p:spPr>
-          <a:xfrm>
-            <a:off x="6720840" y="1691640"/>
-            <a:ext cx="1737360" cy="1737360"/>
-          </a:xfrm>
-          <a:prstGeom prst="rect">
-            <a:avLst/>
-          </a:prstGeom>
-          <a:noFill/>
-          <a:ln/>
-        </p:spPr>
-        <p:txBody>
-          <a:bodyPr wrap="square" lIns="0" tIns="0" rIns="0" bIns="0" rtlCol="0" anchor="ctr"/>
-          <a:lstStyle/>
-          <a:p>
-            <a:pPr rtl="1" algn="ctr" indent="0" marL="0">
-              <a:buNone/>
-            </a:pPr>
-            <a:r>
-              <a:rPr lang="ar-SA" altLang="en-US" sz="7800" dirty="0">
-                <a:solidFill>
-                  <a:srgbClr val="16213E"/>
-                </a:solidFill>
-                <a:latin typeface="Arial" pitchFamily="34" charset="0"/>
-                <a:ea typeface="Arial" pitchFamily="34" charset="-122"/>
-                <a:cs typeface="Arial" pitchFamily="34" charset="-120"/>
-              </a:rPr>
-              <a:t>حَ</a:t>
-            </a:r>
-            <a:endParaRPr lang="ar-SA" sz="7800" dirty="0"/>
-          </a:p>
-        </p:txBody>
-      </p:sp>
-      <p:sp>
-        <p:nvSpPr>
-          <p:cNvPr id="31" name="L2 letter"/>
-          <p:cNvSpPr txBox="1"/>
-          <p:nvPr/>
-        </p:nvSpPr>
-        <p:spPr>
-          <a:xfrm>
-            <a:off x="4671487" y="1691640"/>
+            <a:off x="7048927" y="1691640"/>
             <a:ext cx="1737360" cy="1737360"/>
           </a:xfrm>
           <a:prstGeom prst="rect">
@@ -21104,13 +17446,13 @@
       </p:sp>
       <p:sp>
         <p:nvSpPr>
-          <p:cNvPr id="32" name="F2 fathah"/>
+          <p:cNvPr id="30" name="F1 fathah"/>
           <p:cNvSpPr txBox="1"/>
           <p:nvPr/>
         </p:nvSpPr>
         <p:spPr>
           <a:xfrm>
-            <a:off x="4671487" y="1691640"/>
+            <a:off x="7048927" y="1691640"/>
             <a:ext cx="1737360" cy="1737360"/>
           </a:xfrm>
           <a:prstGeom prst="rect">
@@ -21143,13 +17485,13 @@
       </p:sp>
       <p:sp>
         <p:nvSpPr>
-          <p:cNvPr id="33" name="M2 alif"/>
+          <p:cNvPr id="31" name="M1 alif"/>
           <p:cNvSpPr txBox="1"/>
           <p:nvPr/>
         </p:nvSpPr>
         <p:spPr>
           <a:xfrm>
-            <a:off x="3787079" y="1691640"/>
+            <a:off x="6164519" y="1691640"/>
             <a:ext cx="1737360" cy="1737360"/>
           </a:xfrm>
           <a:prstGeom prst="rect">
@@ -21182,6 +17524,84 @@
       </p:sp>
       <p:sp>
         <p:nvSpPr>
+          <p:cNvPr id="32" name="L2 letter"/>
+          <p:cNvSpPr txBox="1"/>
+          <p:nvPr/>
+        </p:nvSpPr>
+        <p:spPr>
+          <a:xfrm>
+            <a:off x="4343400" y="1691640"/>
+            <a:ext cx="1737360" cy="1737360"/>
+          </a:xfrm>
+          <a:prstGeom prst="rect">
+            <a:avLst/>
+          </a:prstGeom>
+          <a:noFill/>
+          <a:ln/>
+        </p:spPr>
+        <p:txBody>
+          <a:bodyPr wrap="square" lIns="0" tIns="0" rIns="0" bIns="0" rtlCol="0" anchor="ctr"/>
+          <a:lstStyle/>
+          <a:p>
+            <a:pPr rtl="1" algn="ctr" indent="0" marL="0">
+              <a:buNone/>
+            </a:pPr>
+            <a:r>
+              <a:rPr lang="ar-SA" altLang="en-US" sz="7800" dirty="0">
+                <a:solidFill>
+                  <a:srgbClr val="16213E"/>
+                </a:solidFill>
+                <a:latin typeface="Arial" pitchFamily="34" charset="0"/>
+                <a:ea typeface="Arial" pitchFamily="34" charset="-122"/>
+                <a:cs typeface="Arial" pitchFamily="34" charset="-120"/>
+              </a:rPr>
+              <a:t>م</a:t>
+            </a:r>
+            <a:endParaRPr lang="ar-SA" sz="7800" dirty="0"/>
+          </a:p>
+        </p:txBody>
+      </p:sp>
+      <p:sp>
+        <p:nvSpPr>
+          <p:cNvPr id="33" name="F2 fathah"/>
+          <p:cNvSpPr txBox="1"/>
+          <p:nvPr/>
+        </p:nvSpPr>
+        <p:spPr>
+          <a:xfrm>
+            <a:off x="4343400" y="1691640"/>
+            <a:ext cx="1737360" cy="1737360"/>
+          </a:xfrm>
+          <a:prstGeom prst="rect">
+            <a:avLst/>
+          </a:prstGeom>
+          <a:noFill/>
+          <a:ln/>
+        </p:spPr>
+        <p:txBody>
+          <a:bodyPr wrap="square" lIns="0" tIns="0" rIns="0" bIns="0" rtlCol="0" anchor="ctr"/>
+          <a:lstStyle/>
+          <a:p>
+            <a:pPr rtl="1" algn="ctr" indent="0" marL="0">
+              <a:buNone/>
+            </a:pPr>
+            <a:r>
+              <a:rPr lang="ar-SA" altLang="en-US" sz="7800" dirty="0">
+                <a:solidFill>
+                  <a:srgbClr val="16213E"/>
+                </a:solidFill>
+                <a:latin typeface="Arial" pitchFamily="34" charset="0"/>
+                <a:ea typeface="Arial" pitchFamily="34" charset="-122"/>
+                <a:cs typeface="Arial" pitchFamily="34" charset="-120"/>
+              </a:rPr>
+              <a:t>مَ</a:t>
+            </a:r>
+            <a:endParaRPr lang="ar-SA" sz="7800" dirty="0"/>
+          </a:p>
+        </p:txBody>
+      </p:sp>
+      <p:sp>
+        <p:nvSpPr>
           <p:cNvPr id="34" name="R result"/>
           <p:cNvSpPr txBox="1"/>
           <p:nvPr/>
@@ -21213,7 +17633,7 @@
                 <a:ea typeface="Arial" pitchFamily="34" charset="-122"/>
                 <a:cs typeface="Arial" pitchFamily="34" charset="-120"/>
               </a:rPr>
-              <a:t>حَهَا</a:t>
+              <a:t>هَامَ</a:t>
             </a:r>
             <a:endParaRPr lang="ar-SA" sz="9000" dirty="0"/>
           </a:p>
@@ -21364,7 +17784,7 @@
                                           </p:stCondLst>
                                         </p:cTn>
                                         <p:tgtEl>
-                                          <p:spTgt spid="27"/>
+                                          <p:spTgt spid="31"/>
                                         </p:tgtEl>
                                         <p:attrNameLst>
                                           <p:attrName>style.visibility</p:attrName>
@@ -21378,7 +17798,7 @@
                                       <p:cBhvr>
                                         <p:cTn id="17" dur="300"/>
                                         <p:tgtEl>
-                                          <p:spTgt spid="27"/>
+                                          <p:spTgt spid="31"/>
                                         </p:tgtEl>
                                       </p:cBhvr>
                                     </p:animEffect>
@@ -21417,7 +17837,7 @@
                                           </p:stCondLst>
                                         </p:cTn>
                                         <p:tgtEl>
-                                          <p:spTgt spid="31"/>
+                                          <p:spTgt spid="27"/>
                                         </p:tgtEl>
                                         <p:attrNameLst>
                                           <p:attrName>style.visibility</p:attrName>
@@ -21431,7 +17851,7 @@
                                       <p:cBhvr>
                                         <p:cTn id="22" dur="300"/>
                                         <p:tgtEl>
-                                          <p:spTgt spid="31"/>
+                                          <p:spTgt spid="27"/>
                                         </p:tgtEl>
                                       </p:cBhvr>
                                     </p:animEffect>
@@ -21680,8 +18100,8 @@
     <p:bldLst>
       <p:bldP spid="29" grpId="0"/>
       <p:bldP spid="30" grpId="0"/>
+      <p:bldP spid="31" grpId="0"/>
       <p:bldP spid="27" grpId="0" animBg="1"/>
-      <p:bldP spid="31" grpId="0"/>
       <p:bldP spid="32" grpId="0"/>
       <p:bldP spid="33" grpId="0"/>
       <p:bldP spid="28" grpId="0" animBg="1"/>
@@ -22277,8 +18697,8 @@
         </p:nvSpPr>
         <p:spPr>
           <a:xfrm>
-            <a:off x="6720840" y="1691640"/>
-            <a:ext cx="1737360" cy="1737360"/>
+            <a:off x="7269480" y="1920240"/>
+            <a:ext cx="1280160" cy="1280160"/>
           </a:xfrm>
           <a:prstGeom prst="ellipse">
             <a:avLst/>
@@ -22302,8 +18722,8 @@
         </p:nvSpPr>
         <p:spPr>
           <a:xfrm>
-            <a:off x="4343400" y="1691640"/>
-            <a:ext cx="1737360" cy="1737360"/>
+            <a:off x="5486400" y="1920240"/>
+            <a:ext cx="1280160" cy="1280160"/>
           </a:xfrm>
           <a:prstGeom prst="ellipse">
             <a:avLst/>
@@ -22313,6 +18733,31 @@
           </a:solidFill>
           <a:ln w="101600">
             <a:solidFill>
+              <a:srgbClr val="3A8FD9"/>
+            </a:solidFill>
+            <a:prstDash val="solid"/>
+          </a:ln>
+        </p:spPr>
+      </p:sp>
+      <p:sp>
+        <p:nvSpPr>
+          <p:cNvPr id="26" name="Circle 3"/>
+          <p:cNvSpPr/>
+          <p:nvPr/>
+        </p:nvSpPr>
+        <p:spPr>
+          <a:xfrm>
+            <a:off x="3703320" y="1920240"/>
+            <a:ext cx="1280160" cy="1280160"/>
+          </a:xfrm>
+          <a:prstGeom prst="ellipse">
+            <a:avLst/>
+          </a:prstGeom>
+          <a:solidFill>
+            <a:srgbClr val="FFFFFF"/>
+          </a:solidFill>
+          <a:ln w="101600">
+            <a:solidFill>
               <a:srgbClr val="2FB57A"/>
             </a:solidFill>
             <a:prstDash val="solid"/>
@@ -22321,18 +18766,18 @@
       </p:sp>
       <p:sp>
         <p:nvSpPr>
-          <p:cNvPr id="26" name="Result panel"/>
-          <p:cNvSpPr/>
-          <p:nvPr/>
-        </p:nvSpPr>
-        <p:spPr>
-          <a:xfrm>
-            <a:off x="685800" y="1554480"/>
-            <a:ext cx="2743200" cy="2011680"/>
+          <p:cNvPr id="27" name="Result panel"/>
+          <p:cNvSpPr/>
+          <p:nvPr/>
+        </p:nvSpPr>
+        <p:spPr>
+          <a:xfrm>
+            <a:off x="594360" y="1645920"/>
+            <a:ext cx="2331720" cy="1828800"/>
           </a:xfrm>
           <a:prstGeom prst="roundRect">
             <a:avLst>
-              <a:gd name="adj" fmla="val 13636"/>
+              <a:gd name="adj" fmla="val 15000"/>
             </a:avLst>
           </a:prstGeom>
           <a:solidFill>
@@ -22348,14 +18793,14 @@
       </p:sp>
       <p:sp>
         <p:nvSpPr>
-          <p:cNvPr id="27" name="P1 plus"/>
-          <p:cNvSpPr/>
-          <p:nvPr/>
-        </p:nvSpPr>
-        <p:spPr>
-          <a:xfrm>
-            <a:off x="6195060" y="2354580"/>
-            <a:ext cx="411480" cy="411480"/>
+          <p:cNvPr id="28" name="P1 plus"/>
+          <p:cNvSpPr/>
+          <p:nvPr/>
+        </p:nvSpPr>
+        <p:spPr>
+          <a:xfrm>
+            <a:off x="6844284" y="2386584"/>
+            <a:ext cx="347472" cy="347472"/>
           </a:xfrm>
           <a:prstGeom prst="mathPlus">
             <a:avLst/>
@@ -22373,14 +18818,39 @@
       </p:sp>
       <p:sp>
         <p:nvSpPr>
-          <p:cNvPr id="28" name="A arrow"/>
-          <p:cNvSpPr/>
-          <p:nvPr/>
-        </p:nvSpPr>
-        <p:spPr>
-          <a:xfrm>
-            <a:off x="3566160" y="2304288"/>
-            <a:ext cx="640080" cy="512064"/>
+          <p:cNvPr id="29" name="P2 plus"/>
+          <p:cNvSpPr/>
+          <p:nvPr/>
+        </p:nvSpPr>
+        <p:spPr>
+          <a:xfrm>
+            <a:off x="5061204" y="2386584"/>
+            <a:ext cx="347472" cy="347472"/>
+          </a:xfrm>
+          <a:prstGeom prst="mathPlus">
+            <a:avLst/>
+          </a:prstGeom>
+          <a:solidFill>
+            <a:srgbClr val="FFB347"/>
+          </a:solidFill>
+          <a:ln w="12700">
+            <a:solidFill>
+              <a:srgbClr val="FFB347"/>
+            </a:solidFill>
+            <a:prstDash val="solid"/>
+          </a:ln>
+        </p:spPr>
+      </p:sp>
+      <p:sp>
+        <p:nvSpPr>
+          <p:cNvPr id="30" name="A arrow"/>
+          <p:cNvSpPr/>
+          <p:nvPr/>
+        </p:nvSpPr>
+        <p:spPr>
+          <a:xfrm>
+            <a:off x="3040380" y="2304288"/>
+            <a:ext cx="548640" cy="512064"/>
           </a:xfrm>
           <a:prstGeom prst="leftArrow">
             <a:avLst/>
@@ -22398,14 +18868,14 @@
       </p:sp>
       <p:sp>
         <p:nvSpPr>
-          <p:cNvPr id="29" name="L1 letter"/>
+          <p:cNvPr id="31" name="L1 letter"/>
           <p:cNvSpPr txBox="1"/>
           <p:nvPr/>
         </p:nvSpPr>
         <p:spPr>
           <a:xfrm>
-            <a:off x="6720840" y="1691640"/>
-            <a:ext cx="1737360" cy="1737360"/>
+            <a:off x="7269480" y="1920240"/>
+            <a:ext cx="1280160" cy="1280160"/>
           </a:xfrm>
           <a:prstGeom prst="rect">
             <a:avLst/>
@@ -22421,7 +18891,7 @@
               <a:buNone/>
             </a:pPr>
             <a:r>
-              <a:rPr lang="ar-SA" altLang="en-US" sz="7800" dirty="0">
+              <a:rPr lang="ar-SA" altLang="en-US" sz="5400" dirty="0">
                 <a:solidFill>
                   <a:srgbClr val="16213E"/>
                 </a:solidFill>
@@ -22429,22 +18899,22 @@
                 <a:ea typeface="Arial" pitchFamily="34" charset="-122"/>
                 <a:cs typeface="Arial" pitchFamily="34" charset="-120"/>
               </a:rPr>
-              <a:t>خ</a:t>
+              <a:t>ك</a:t>
             </a:r>
-            <a:endParaRPr lang="ar-SA" sz="7800" dirty="0"/>
+            <a:endParaRPr lang="ar-SA" sz="5400" dirty="0"/>
           </a:p>
         </p:txBody>
       </p:sp>
       <p:sp>
         <p:nvSpPr>
-          <p:cNvPr id="30" name="F1 fathah"/>
+          <p:cNvPr id="32" name="F1 fathah"/>
           <p:cNvSpPr txBox="1"/>
           <p:nvPr/>
         </p:nvSpPr>
         <p:spPr>
           <a:xfrm>
-            <a:off x="6720840" y="1691640"/>
-            <a:ext cx="1737360" cy="1737360"/>
+            <a:off x="7269480" y="1920240"/>
+            <a:ext cx="1280160" cy="1280160"/>
           </a:xfrm>
           <a:prstGeom prst="rect">
             <a:avLst/>
@@ -22460,7 +18930,7 @@
               <a:buNone/>
             </a:pPr>
             <a:r>
-              <a:rPr lang="ar-SA" altLang="en-US" sz="7800" dirty="0">
+              <a:rPr lang="ar-SA" altLang="en-US" sz="5400" dirty="0">
                 <a:solidFill>
                   <a:srgbClr val="16213E"/>
                 </a:solidFill>
@@ -22468,22 +18938,22 @@
                 <a:ea typeface="Arial" pitchFamily="34" charset="-122"/>
                 <a:cs typeface="Arial" pitchFamily="34" charset="-120"/>
               </a:rPr>
-              <a:t>خَ</a:t>
+              <a:t>كَ</a:t>
             </a:r>
-            <a:endParaRPr lang="ar-SA" sz="7800" dirty="0"/>
+            <a:endParaRPr lang="ar-SA" sz="5400" dirty="0"/>
           </a:p>
         </p:txBody>
       </p:sp>
       <p:sp>
         <p:nvSpPr>
-          <p:cNvPr id="31" name="L2 letter"/>
+          <p:cNvPr id="33" name="L2 letter"/>
           <p:cNvSpPr txBox="1"/>
           <p:nvPr/>
         </p:nvSpPr>
         <p:spPr>
           <a:xfrm>
-            <a:off x="4671487" y="1691640"/>
-            <a:ext cx="1737360" cy="1737360"/>
+            <a:off x="5486400" y="1920240"/>
+            <a:ext cx="1280160" cy="1280160"/>
           </a:xfrm>
           <a:prstGeom prst="rect">
             <a:avLst/>
@@ -22499,7 +18969,85 @@
               <a:buNone/>
             </a:pPr>
             <a:r>
-              <a:rPr lang="ar-SA" altLang="en-US" sz="7800" dirty="0">
+              <a:rPr lang="ar-SA" altLang="en-US" sz="5400" dirty="0">
+                <a:solidFill>
+                  <a:srgbClr val="16213E"/>
+                </a:solidFill>
+                <a:latin typeface="Arial" pitchFamily="34" charset="0"/>
+                <a:ea typeface="Arial" pitchFamily="34" charset="-122"/>
+                <a:cs typeface="Arial" pitchFamily="34" charset="-120"/>
+              </a:rPr>
+              <a:t>ر</a:t>
+            </a:r>
+            <a:endParaRPr lang="ar-SA" sz="5400" dirty="0"/>
+          </a:p>
+        </p:txBody>
+      </p:sp>
+      <p:sp>
+        <p:nvSpPr>
+          <p:cNvPr id="34" name="F2 fathah"/>
+          <p:cNvSpPr txBox="1"/>
+          <p:nvPr/>
+        </p:nvSpPr>
+        <p:spPr>
+          <a:xfrm>
+            <a:off x="5486400" y="1920240"/>
+            <a:ext cx="1280160" cy="1280160"/>
+          </a:xfrm>
+          <a:prstGeom prst="rect">
+            <a:avLst/>
+          </a:prstGeom>
+          <a:noFill/>
+          <a:ln/>
+        </p:spPr>
+        <p:txBody>
+          <a:bodyPr wrap="square" lIns="0" tIns="0" rIns="0" bIns="0" rtlCol="0" anchor="ctr"/>
+          <a:lstStyle/>
+          <a:p>
+            <a:pPr rtl="1" algn="ctr" indent="0" marL="0">
+              <a:buNone/>
+            </a:pPr>
+            <a:r>
+              <a:rPr lang="ar-SA" altLang="en-US" sz="5400" dirty="0">
+                <a:solidFill>
+                  <a:srgbClr val="16213E"/>
+                </a:solidFill>
+                <a:latin typeface="Arial" pitchFamily="34" charset="0"/>
+                <a:ea typeface="Arial" pitchFamily="34" charset="-122"/>
+                <a:cs typeface="Arial" pitchFamily="34" charset="-120"/>
+              </a:rPr>
+              <a:t>رَ</a:t>
+            </a:r>
+            <a:endParaRPr lang="ar-SA" sz="5400" dirty="0"/>
+          </a:p>
+        </p:txBody>
+      </p:sp>
+      <p:sp>
+        <p:nvSpPr>
+          <p:cNvPr id="35" name="L3 letter"/>
+          <p:cNvSpPr txBox="1"/>
+          <p:nvPr/>
+        </p:nvSpPr>
+        <p:spPr>
+          <a:xfrm>
+            <a:off x="3930457" y="1920240"/>
+            <a:ext cx="1280160" cy="1280160"/>
+          </a:xfrm>
+          <a:prstGeom prst="rect">
+            <a:avLst/>
+          </a:prstGeom>
+          <a:noFill/>
+          <a:ln/>
+        </p:spPr>
+        <p:txBody>
+          <a:bodyPr wrap="square" lIns="0" tIns="0" rIns="0" bIns="0" rtlCol="0" anchor="ctr"/>
+          <a:lstStyle/>
+          <a:p>
+            <a:pPr rtl="1" algn="ctr" indent="0" marL="0">
+              <a:buNone/>
+            </a:pPr>
+            <a:r>
+              <a:rPr lang="ar-SA" altLang="en-US" sz="5400" dirty="0">
                 <a:solidFill>
                   <a:srgbClr val="16213E"/>
                 </a:solidFill>
@@ -22509,20 +19057,20 @@
               </a:rPr>
               <a:t>ه</a:t>
             </a:r>
-            <a:endParaRPr lang="ar-SA" sz="7800" dirty="0"/>
+            <a:endParaRPr lang="ar-SA" sz="5400" dirty="0"/>
           </a:p>
         </p:txBody>
       </p:sp>
       <p:sp>
         <p:nvSpPr>
-          <p:cNvPr id="32" name="F2 fathah"/>
+          <p:cNvPr id="36" name="F3 fathah"/>
           <p:cNvSpPr txBox="1"/>
           <p:nvPr/>
         </p:nvSpPr>
         <p:spPr>
           <a:xfrm>
-            <a:off x="4671487" y="1691640"/>
-            <a:ext cx="1737360" cy="1737360"/>
+            <a:off x="3930457" y="1920240"/>
+            <a:ext cx="1280160" cy="1280160"/>
           </a:xfrm>
           <a:prstGeom prst="rect">
             <a:avLst/>
@@ -22538,7 +19086,7 @@
               <a:buNone/>
             </a:pPr>
             <a:r>
-              <a:rPr lang="ar-SA" altLang="en-US" sz="7800" dirty="0">
+              <a:rPr lang="ar-SA" altLang="en-US" sz="5400" dirty="0">
                 <a:solidFill>
                   <a:srgbClr val="16213E"/>
                 </a:solidFill>
@@ -22548,20 +19096,20 @@
               </a:rPr>
               <a:t>هَ</a:t>
             </a:r>
-            <a:endParaRPr lang="ar-SA" sz="7800" dirty="0"/>
+            <a:endParaRPr lang="ar-SA" sz="5400" dirty="0"/>
           </a:p>
         </p:txBody>
       </p:sp>
       <p:sp>
         <p:nvSpPr>
-          <p:cNvPr id="33" name="M2 alif"/>
+          <p:cNvPr id="37" name="M3 alif"/>
           <p:cNvSpPr txBox="1"/>
           <p:nvPr/>
         </p:nvSpPr>
         <p:spPr>
           <a:xfrm>
-            <a:off x="3787079" y="1691640"/>
-            <a:ext cx="1737360" cy="1737360"/>
+            <a:off x="3318175" y="1920240"/>
+            <a:ext cx="1280160" cy="1280160"/>
           </a:xfrm>
           <a:prstGeom prst="rect">
             <a:avLst/>
@@ -22577,7 +19125,7 @@
               <a:buNone/>
             </a:pPr>
             <a:r>
-              <a:rPr lang="ar-SA" altLang="en-US" sz="7800" dirty="0">
+              <a:rPr lang="ar-SA" altLang="en-US" sz="5400" dirty="0">
                 <a:solidFill>
                   <a:srgbClr val="16213E"/>
                 </a:solidFill>
@@ -22587,20 +19135,20 @@
               </a:rPr>
               <a:t>ا</a:t>
             </a:r>
-            <a:endParaRPr lang="ar-SA" sz="7800" dirty="0"/>
+            <a:endParaRPr lang="ar-SA" sz="5400" dirty="0"/>
           </a:p>
         </p:txBody>
       </p:sp>
       <p:sp>
         <p:nvSpPr>
-          <p:cNvPr id="34" name="R result"/>
+          <p:cNvPr id="38" name="R result"/>
           <p:cNvSpPr txBox="1"/>
           <p:nvPr/>
         </p:nvSpPr>
         <p:spPr>
           <a:xfrm>
-            <a:off x="685800" y="1554480"/>
-            <a:ext cx="2743200" cy="2011680"/>
+            <a:off x="594360" y="1645920"/>
+            <a:ext cx="2331720" cy="1828800"/>
           </a:xfrm>
           <a:prstGeom prst="rect">
             <a:avLst/>
@@ -22616,7 +19164,7 @@
               <a:buNone/>
             </a:pPr>
             <a:r>
-              <a:rPr lang="ar-SA" altLang="en-US" sz="9000" dirty="0">
+              <a:rPr lang="ar-SA" altLang="en-US" sz="6600" dirty="0">
                 <a:solidFill>
                   <a:srgbClr val="16213E"/>
                 </a:solidFill>
@@ -22624,9 +19172,9 @@
                 <a:ea typeface="Arial" pitchFamily="34" charset="-122"/>
                 <a:cs typeface="Arial" pitchFamily="34" charset="-120"/>
               </a:rPr>
-              <a:t>خَهَا</a:t>
+              <a:t>كَرَهَا</a:t>
             </a:r>
-            <a:endParaRPr lang="ar-SA" sz="9000" dirty="0"/>
+            <a:endParaRPr lang="ar-SA" sz="6600" dirty="0"/>
           </a:p>
         </p:txBody>
       </p:sp>
@@ -22669,7 +19217,7 @@
                                           </p:stCondLst>
                                         </p:cTn>
                                         <p:tgtEl>
-                                          <p:spTgt spid="29"/>
+                                          <p:spTgt spid="31"/>
                                         </p:tgtEl>
                                         <p:attrNameLst>
                                           <p:attrName>style.visibility</p:attrName>
@@ -22683,7 +19231,7 @@
                                       <p:cBhvr>
                                         <p:cTn id="7" dur="300"/>
                                         <p:tgtEl>
-                                          <p:spTgt spid="29"/>
+                                          <p:spTgt spid="31"/>
                                         </p:tgtEl>
                                       </p:cBhvr>
                                     </p:animEffect>
@@ -22722,7 +19270,7 @@
                                           </p:stCondLst>
                                         </p:cTn>
                                         <p:tgtEl>
-                                          <p:spTgt spid="30"/>
+                                          <p:spTgt spid="32"/>
                                         </p:tgtEl>
                                         <p:attrNameLst>
                                           <p:attrName>style.visibility</p:attrName>
@@ -22736,7 +19284,7 @@
                                       <p:cBhvr>
                                         <p:cTn id="12" dur="300"/>
                                         <p:tgtEl>
-                                          <p:spTgt spid="30"/>
+                                          <p:spTgt spid="32"/>
                                         </p:tgtEl>
                                       </p:cBhvr>
                                     </p:animEffect>
@@ -22775,7 +19323,7 @@
                                           </p:stCondLst>
                                         </p:cTn>
                                         <p:tgtEl>
-                                          <p:spTgt spid="27"/>
+                                          <p:spTgt spid="28"/>
                                         </p:tgtEl>
                                         <p:attrNameLst>
                                           <p:attrName>style.visibility</p:attrName>
@@ -22789,7 +19337,7 @@
                                       <p:cBhvr>
                                         <p:cTn id="17" dur="300"/>
                                         <p:tgtEl>
-                                          <p:spTgt spid="27"/>
+                                          <p:spTgt spid="28"/>
                                         </p:tgtEl>
                                       </p:cBhvr>
                                     </p:animEffect>
@@ -22828,7 +19376,7 @@
                                           </p:stCondLst>
                                         </p:cTn>
                                         <p:tgtEl>
-                                          <p:spTgt spid="31"/>
+                                          <p:spTgt spid="33"/>
                                         </p:tgtEl>
                                         <p:attrNameLst>
                                           <p:attrName>style.visibility</p:attrName>
@@ -22842,7 +19390,7 @@
                                       <p:cBhvr>
                                         <p:cTn id="22" dur="300"/>
                                         <p:tgtEl>
-                                          <p:spTgt spid="31"/>
+                                          <p:spTgt spid="33"/>
                                         </p:tgtEl>
                                       </p:cBhvr>
                                     </p:animEffect>
@@ -22881,7 +19429,7 @@
                                           </p:stCondLst>
                                         </p:cTn>
                                         <p:tgtEl>
-                                          <p:spTgt spid="32"/>
+                                          <p:spTgt spid="34"/>
                                         </p:tgtEl>
                                         <p:attrNameLst>
                                           <p:attrName>style.visibility</p:attrName>
@@ -22895,7 +19443,7 @@
                                       <p:cBhvr>
                                         <p:cTn id="27" dur="300"/>
                                         <p:tgtEl>
-                                          <p:spTgt spid="32"/>
+                                          <p:spTgt spid="34"/>
                                         </p:tgtEl>
                                       </p:cBhvr>
                                     </p:animEffect>
@@ -22934,7 +19482,7 @@
                                           </p:stCondLst>
                                         </p:cTn>
                                         <p:tgtEl>
-                                          <p:spTgt spid="33"/>
+                                          <p:spTgt spid="29"/>
                                         </p:tgtEl>
                                         <p:attrNameLst>
                                           <p:attrName>style.visibility</p:attrName>
@@ -22948,7 +19496,7 @@
                                       <p:cBhvr>
                                         <p:cTn id="32" dur="300"/>
                                         <p:tgtEl>
-                                          <p:spTgt spid="33"/>
+                                          <p:spTgt spid="29"/>
                                         </p:tgtEl>
                                       </p:cBhvr>
                                     </p:animEffect>
@@ -22987,7 +19535,7 @@
                                           </p:stCondLst>
                                         </p:cTn>
                                         <p:tgtEl>
-                                          <p:spTgt spid="28"/>
+                                          <p:spTgt spid="35"/>
                                         </p:tgtEl>
                                         <p:attrNameLst>
                                           <p:attrName>style.visibility</p:attrName>
@@ -23001,7 +19549,7 @@
                                       <p:cBhvr>
                                         <p:cTn id="37" dur="300"/>
                                         <p:tgtEl>
-                                          <p:spTgt spid="28"/>
+                                          <p:spTgt spid="35"/>
                                         </p:tgtEl>
                                       </p:cBhvr>
                                     </p:animEffect>
@@ -23040,7 +19588,7 @@
                                           </p:stCondLst>
                                         </p:cTn>
                                         <p:tgtEl>
-                                          <p:spTgt spid="34"/>
+                                          <p:spTgt spid="36"/>
                                         </p:tgtEl>
                                         <p:attrNameLst>
                                           <p:attrName>style.visibility</p:attrName>
@@ -23054,7 +19602,166 @@
                                       <p:cBhvr>
                                         <p:cTn id="42" dur="300"/>
                                         <p:tgtEl>
-                                          <p:spTgt spid="34"/>
+                                          <p:spTgt spid="36"/>
+                                        </p:tgtEl>
+                                      </p:cBhvr>
+                                    </p:animEffect>
+                                  </p:childTnLst>
+                                </p:cTn>
+                              </p:par>
+                            </p:childTnLst>
+                          </p:cTn>
+                        </p:par>
+                      </p:childTnLst>
+                    </p:cTn>
+                  </p:par>
+                  <p:par>
+                    <p:cTn id="43" fill="hold">
+                      <p:stCondLst>
+                        <p:cond delay="indefinite"/>
+                      </p:stCondLst>
+                      <p:childTnLst>
+                        <p:par>
+                          <p:cTn id="44" fill="hold">
+                            <p:stCondLst>
+                              <p:cond delay="0"/>
+                            </p:stCondLst>
+                            <p:childTnLst>
+                              <p:par>
+                                <p:cTn id="45" presetID="10" presetClass="entr" presetSubtype="0" fill="hold" grpId="0" nodeType="clickEffect">
+                                  <p:stCondLst>
+                                    <p:cond delay="0"/>
+                                  </p:stCondLst>
+                                  <p:childTnLst>
+                                    <p:set>
+                                      <p:cBhvr>
+                                        <p:cTn id="46" dur="1" fill="hold">
+                                          <p:stCondLst>
+                                            <p:cond delay="0"/>
+                                          </p:stCondLst>
+                                        </p:cTn>
+                                        <p:tgtEl>
+                                          <p:spTgt spid="37"/>
+                                        </p:tgtEl>
+                                        <p:attrNameLst>
+                                          <p:attrName>style.visibility</p:attrName>
+                                        </p:attrNameLst>
+                                      </p:cBhvr>
+                                      <p:to>
+                                        <p:strVal val="visible"/>
+                                      </p:to>
+                                    </p:set>
+                                    <p:animEffect transition="in" filter="fade">
+                                      <p:cBhvr>
+                                        <p:cTn id="47" dur="300"/>
+                                        <p:tgtEl>
+                                          <p:spTgt spid="37"/>
+                                        </p:tgtEl>
+                                      </p:cBhvr>
+                                    </p:animEffect>
+                                  </p:childTnLst>
+                                </p:cTn>
+                              </p:par>
+                            </p:childTnLst>
+                          </p:cTn>
+                        </p:par>
+                      </p:childTnLst>
+                    </p:cTn>
+                  </p:par>
+                  <p:par>
+                    <p:cTn id="48" fill="hold">
+                      <p:stCondLst>
+                        <p:cond delay="indefinite"/>
+                      </p:stCondLst>
+                      <p:childTnLst>
+                        <p:par>
+                          <p:cTn id="49" fill="hold">
+                            <p:stCondLst>
+                              <p:cond delay="0"/>
+                            </p:stCondLst>
+                            <p:childTnLst>
+                              <p:par>
+                                <p:cTn id="50" presetID="10" presetClass="entr" presetSubtype="0" fill="hold" grpId="0" nodeType="clickEffect">
+                                  <p:stCondLst>
+                                    <p:cond delay="0"/>
+                                  </p:stCondLst>
+                                  <p:childTnLst>
+                                    <p:set>
+                                      <p:cBhvr>
+                                        <p:cTn id="51" dur="1" fill="hold">
+                                          <p:stCondLst>
+                                            <p:cond delay="0"/>
+                                          </p:stCondLst>
+                                        </p:cTn>
+                                        <p:tgtEl>
+                                          <p:spTgt spid="30"/>
+                                        </p:tgtEl>
+                                        <p:attrNameLst>
+                                          <p:attrName>style.visibility</p:attrName>
+                                        </p:attrNameLst>
+                                      </p:cBhvr>
+                                      <p:to>
+                                        <p:strVal val="visible"/>
+                                      </p:to>
+                                    </p:set>
+                                    <p:animEffect transition="in" filter="fade">
+                                      <p:cBhvr>
+                                        <p:cTn id="52" dur="300"/>
+                                        <p:tgtEl>
+                                          <p:spTgt spid="30"/>
+                                        </p:tgtEl>
+                                      </p:cBhvr>
+                                    </p:animEffect>
+                                  </p:childTnLst>
+                                </p:cTn>
+                              </p:par>
+                            </p:childTnLst>
+                          </p:cTn>
+                        </p:par>
+                      </p:childTnLst>
+                    </p:cTn>
+                  </p:par>
+                  <p:par>
+                    <p:cTn id="53" fill="hold">
+                      <p:stCondLst>
+                        <p:cond delay="indefinite"/>
+                      </p:stCondLst>
+                      <p:childTnLst>
+                        <p:par>
+                          <p:cTn id="54" fill="hold">
+                            <p:stCondLst>
+                              <p:cond delay="0"/>
+                            </p:stCondLst>
+                            <p:childTnLst>
+                              <p:par>
+                                <p:cTn id="55" presetID="10" presetClass="entr" presetSubtype="0" fill="hold" grpId="0" nodeType="clickEffect">
+                                  <p:stCondLst>
+                                    <p:cond delay="0"/>
+                                  </p:stCondLst>
+                                  <p:childTnLst>
+                                    <p:set>
+                                      <p:cBhvr>
+                                        <p:cTn id="56" dur="1" fill="hold">
+                                          <p:stCondLst>
+                                            <p:cond delay="0"/>
+                                          </p:stCondLst>
+                                        </p:cTn>
+                                        <p:tgtEl>
+                                          <p:spTgt spid="38"/>
+                                        </p:tgtEl>
+                                        <p:attrNameLst>
+                                          <p:attrName>style.visibility</p:attrName>
+                                        </p:attrNameLst>
+                                      </p:cBhvr>
+                                      <p:to>
+                                        <p:strVal val="visible"/>
+                                      </p:to>
+                                    </p:set>
+                                    <p:animEffect transition="in" filter="fade">
+                                      <p:cBhvr>
+                                        <p:cTn id="57" dur="300"/>
+                                        <p:tgtEl>
+                                          <p:spTgt spid="38"/>
                                         </p:tgtEl>
                                       </p:cBhvr>
                                     </p:animEffect>
@@ -23089,14 +19796,17 @@
       </p:par>
     </p:tnLst>
     <p:bldLst>
-      <p:bldP spid="29" grpId="0"/>
-      <p:bldP spid="30" grpId="0"/>
-      <p:bldP spid="27" grpId="0" animBg="1"/>
       <p:bldP spid="31" grpId="0"/>
       <p:bldP spid="32" grpId="0"/>
+      <p:bldP spid="28" grpId="0" animBg="1"/>
       <p:bldP spid="33" grpId="0"/>
-      <p:bldP spid="28" grpId="0" animBg="1"/>
       <p:bldP spid="34" grpId="0"/>
+      <p:bldP spid="29" grpId="0" animBg="1"/>
+      <p:bldP spid="35" grpId="0"/>
+      <p:bldP spid="36" grpId="0"/>
+      <p:bldP spid="37" grpId="0"/>
+      <p:bldP spid="30" grpId="0" animBg="1"/>
+      <p:bldP spid="38" grpId="0"/>
     </p:bldLst>
   </p:timing>
 </p:sld>
@@ -23890,7 +20600,7 @@
                 <a:ea typeface="Arial" pitchFamily="34" charset="-122"/>
                 <a:cs typeface="Arial" pitchFamily="34" charset="-120"/>
               </a:rPr>
-              <a:t>ب</a:t>
+              <a:t>و</a:t>
             </a:r>
             <a:endParaRPr lang="ar-SA" sz="5400" dirty="0"/>
           </a:p>
@@ -23929,7 +20639,7 @@
                 <a:ea typeface="Arial" pitchFamily="34" charset="-122"/>
                 <a:cs typeface="Arial" pitchFamily="34" charset="-120"/>
               </a:rPr>
-              <a:t>بَ</a:t>
+              <a:t>وَ</a:t>
             </a:r>
             <a:endParaRPr lang="ar-SA" sz="5400" dirty="0"/>
           </a:p>
@@ -23968,7 +20678,7 @@
                 <a:ea typeface="Arial" pitchFamily="34" charset="-122"/>
                 <a:cs typeface="Arial" pitchFamily="34" charset="-120"/>
               </a:rPr>
-              <a:t>ت</a:t>
+              <a:t>ج</a:t>
             </a:r>
             <a:endParaRPr lang="ar-SA" sz="5400" dirty="0"/>
           </a:p>
@@ -24007,7 +20717,7 @@
                 <a:ea typeface="Arial" pitchFamily="34" charset="-122"/>
                 <a:cs typeface="Arial" pitchFamily="34" charset="-120"/>
               </a:rPr>
-              <a:t>تَ</a:t>
+              <a:t>جَ</a:t>
             </a:r>
             <a:endParaRPr lang="ar-SA" sz="5400" dirty="0"/>
           </a:p>
@@ -24163,7 +20873,7 @@
                 <a:ea typeface="Arial" pitchFamily="34" charset="-122"/>
                 <a:cs typeface="Arial" pitchFamily="34" charset="-120"/>
               </a:rPr>
-              <a:t>بَتَهَا</a:t>
+              <a:t>وَجَهَا</a:t>
             </a:r>
             <a:endParaRPr lang="ar-SA" sz="6600" dirty="0"/>
           </a:p>

--- a/madd-decks/madd-alif/14-ha.pptx
+++ b/madd-decks/madd-alif/14-ha.pptx
@@ -4,6 +4,9 @@
   <p:sldMasterIdLst>
     <p:sldMasterId id="2147483648" r:id="rId1"/>
   </p:sldMasterIdLst>
+  <p:notesMasterIdLst>
+    <p:notesMasterId r:id="rId15"/>
+  </p:notesMasterIdLst>
   <p:sldIdLst>
     <p:sldId id="256" r:id="rId2"/>
     <p:sldId id="257" r:id="rId3"/>
@@ -19,9 +22,6 @@
     <p:sldId id="267" r:id="rId13"/>
     <p:sldId id="268" r:id="rId14"/>
   </p:sldIdLst>
-  <p:notesMasterIdLst>
-    <p:notesMasterId r:id="rId15"/>
-  </p:notesMasterIdLst>
   <p:sldSz cx="9144000" cy="5143500"/>
   <p:notesSz cx="5143500" cy="9144000"/>
   <p:defaultTextStyle>
